--- a/customer_behaviour_presentation.pptx
+++ b/customer_behaviour_presentation.pptx
@@ -137,395 +137,1030 @@
 </p:presentation>
 </file>
 
-<file path=ppt/charts/chart1.xml><?xml version="1.0" encoding="utf-8"?>
-<c:chartSpace xmlns:c="http://schemas.openxmlformats.org/drawingml/2006/chart" xmlns:a="http://schemas.openxmlformats.org/drawingml/2006/main" xmlns:r="http://schemas.openxmlformats.org/officeDocument/2006/relationships" xmlns:c16r2="http://schemas.microsoft.com/office/drawing/2015/06/chart">
-  <c:date1904 val="0"/>
-  <c:lang val="en-US"/>
-  <c:roundedCorners val="1"/>
-  <c:style val="10"/>
-  <c:chart>
-    <c:title>
-      <c:overlay val="0"/>
-    </c:title>
-    <c:autoTitleDeleted val="0"/>
-    <c:plotArea>
-      <c:layout/>
-      <c:barChart>
-        <c:barDir val="col"/>
-        <c:grouping val="clustered"/>
-        <c:varyColors val="1"/>
-        <c:ser>
-          <c:idx val="0"/>
-          <c:order val="0"/>
-          <c:tx>
-            <c:strRef>
-              <c:f>Sheet1!$B$1</c:f>
-              <c:strCache>
-                <c:ptCount val="1"/>
-                <c:pt idx="0">
-                  <c:v>Revenue</c:v>
-                </c:pt>
-              </c:strCache>
-            </c:strRef>
-          </c:tx>
-          <c:invertIfNegative val="1"/>
-          <c:dLbls>
-            <c:spPr>
-              <a:noFill/>
-              <a:ln>
-                <a:noFill/>
-              </a:ln>
-              <a:effectLst/>
-            </c:spPr>
-            <c:txPr>
-              <a:bodyPr/>
-              <a:lstStyle/>
-              <a:p>
-                <a:pPr>
-                  <a:defRPr sz="900"/>
-                </a:pPr>
-                <a:endParaRPr lang="en-US"/>
-              </a:p>
-            </c:txPr>
-            <c:showLegendKey val="0"/>
-            <c:showVal val="1"/>
-            <c:showCatName val="0"/>
-            <c:showSerName val="0"/>
-            <c:showPercent val="0"/>
-            <c:showBubbleSize val="0"/>
-            <c:showLeaderLines val="0"/>
-            <c:extLst>
-              <c:ext xmlns:c15="http://schemas.microsoft.com/office/drawing/2012/chart" uri="{CE6537A1-D6FC-4f65-9D91-7224C49458BB}">
-                <c15:showLeaderLines val="0"/>
-              </c:ext>
-            </c:extLst>
-          </c:dLbls>
-          <c:cat>
-            <c:strRef>
-              <c:f>Sheet1!$A$2:$A$3</c:f>
-              <c:strCache>
-                <c:ptCount val="2"/>
-                <c:pt idx="0">
-                  <c:v>Male</c:v>
-                </c:pt>
-                <c:pt idx="1">
-                  <c:v>Female</c:v>
-                </c:pt>
-              </c:strCache>
-            </c:strRef>
-          </c:cat>
-          <c:val>
-            <c:numRef>
-              <c:f>Sheet1!$B$2:$B$3</c:f>
-              <c:numCache>
-                <c:formatCode>General</c:formatCode>
-                <c:ptCount val="2"/>
-                <c:pt idx="0">
-                  <c:v>157890</c:v>
-                </c:pt>
-                <c:pt idx="1">
-                  <c:v>75191</c:v>
-                </c:pt>
-              </c:numCache>
-            </c:numRef>
-          </c:val>
-          <c:extLst>
-            <c:ext xmlns:c16="http://schemas.microsoft.com/office/drawing/2014/chart" uri="{C3380CC4-5D6E-409C-BE32-E72D297353CC}">
-              <c16:uniqueId val="{00000000-C517-4221-96A6-16CDE3906626}"/>
-            </c:ext>
-          </c:extLst>
-        </c:ser>
-        <c:dLbls>
-          <c:showLegendKey val="0"/>
-          <c:showVal val="1"/>
-          <c:showCatName val="0"/>
-          <c:showSerName val="0"/>
-          <c:showPercent val="0"/>
-          <c:showBubbleSize val="0"/>
-        </c:dLbls>
-        <c:gapWidth val="150"/>
-        <c:axId val="-2068027336"/>
-        <c:axId val="-2113994440"/>
-      </c:barChart>
-      <c:catAx>
-        <c:axId val="-2068027336"/>
-        <c:scaling>
-          <c:orientation val="minMax"/>
-        </c:scaling>
-        <c:delete val="0"/>
-        <c:axPos val="b"/>
-        <c:numFmt formatCode="General" sourceLinked="0"/>
-        <c:majorTickMark val="out"/>
-        <c:minorTickMark val="none"/>
-        <c:tickLblPos val="nextTo"/>
-        <c:txPr>
-          <a:bodyPr/>
-          <a:lstStyle/>
-          <a:p>
-            <a:pPr>
-              <a:defRPr sz="900"/>
-            </a:pPr>
-            <a:endParaRPr lang="en-US"/>
-          </a:p>
-        </c:txPr>
-        <c:crossAx val="-2113994440"/>
-        <c:crosses val="autoZero"/>
-        <c:auto val="1"/>
-        <c:lblAlgn val="ctr"/>
-        <c:lblOffset val="100"/>
-        <c:noMultiLvlLbl val="0"/>
-      </c:catAx>
-      <c:valAx>
-        <c:axId val="-2113994440"/>
-        <c:scaling>
-          <c:orientation val="minMax"/>
-        </c:scaling>
-        <c:delete val="0"/>
-        <c:axPos val="l"/>
-        <c:majorGridlines/>
-        <c:numFmt formatCode="General" sourceLinked="1"/>
-        <c:majorTickMark val="out"/>
-        <c:minorTickMark val="none"/>
-        <c:tickLblPos val="nextTo"/>
-        <c:txPr>
-          <a:bodyPr/>
-          <a:lstStyle/>
-          <a:p>
-            <a:pPr>
-              <a:defRPr sz="900"/>
-            </a:pPr>
-            <a:endParaRPr lang="en-US"/>
-          </a:p>
-        </c:txPr>
-        <c:crossAx val="-2068027336"/>
-        <c:crosses val="autoZero"/>
-        <c:crossBetween val="between"/>
-      </c:valAx>
-    </c:plotArea>
-    <c:plotVisOnly val="1"/>
-    <c:dispBlanksAs val="gap"/>
-    <c:showDLblsOverMax val="1"/>
-  </c:chart>
-  <c:txPr>
-    <a:bodyPr/>
-    <a:lstStyle/>
-    <a:p>
-      <a:pPr>
-        <a:defRPr sz="1800"/>
-      </a:pPr>
-      <a:endParaRPr lang="en-US"/>
-    </a:p>
-  </c:txPr>
-  <c:externalData r:id="rId1">
-    <c:autoUpdate val="0"/>
-  </c:externalData>
-</c:chartSpace>
+<file path=ppt/revisionInfo.xml><?xml version="1.0" encoding="utf-8"?>
+<p1510:revInfo xmlns:a="http://schemas.openxmlformats.org/drawingml/2006/main" xmlns:r="http://schemas.openxmlformats.org/officeDocument/2006/relationships" xmlns:p1510="http://schemas.microsoft.com/office/powerpoint/2015/10/main">
+  <p1510:revLst>
+    <p1510:client id="{60511AC4-F4C0-4756-86BD-CCC3E392E7DE}" v="87" dt="2026-09-08T22:27:48.658"/>
+  </p1510:revLst>
+</p1510:revInfo>
 </file>
 
-<file path=ppt/charts/chart2.xml><?xml version="1.0" encoding="utf-8"?>
-<c:chartSpace xmlns:c="http://schemas.openxmlformats.org/drawingml/2006/chart" xmlns:a="http://schemas.openxmlformats.org/drawingml/2006/main" xmlns:r="http://schemas.openxmlformats.org/officeDocument/2006/relationships" xmlns:c16r2="http://schemas.microsoft.com/office/drawing/2015/06/chart">
-  <c:date1904 val="0"/>
-  <c:lang val="en-US"/>
-  <c:roundedCorners val="1"/>
-  <c:style val="10"/>
-  <c:chart>
-    <c:title>
-      <c:overlay val="0"/>
-    </c:title>
-    <c:autoTitleDeleted val="0"/>
-    <c:plotArea>
-      <c:layout/>
-      <c:barChart>
-        <c:barDir val="bar"/>
-        <c:grouping val="clustered"/>
-        <c:varyColors val="1"/>
-        <c:ser>
-          <c:idx val="0"/>
-          <c:order val="0"/>
-          <c:tx>
-            <c:strRef>
-              <c:f>Sheet1!$B$1</c:f>
-              <c:strCache>
-                <c:ptCount val="1"/>
-                <c:pt idx="0">
-                  <c:v>Avg rating</c:v>
-                </c:pt>
-              </c:strCache>
-            </c:strRef>
-          </c:tx>
-          <c:invertIfNegative val="1"/>
-          <c:dLbls>
-            <c:spPr>
-              <a:noFill/>
-              <a:ln>
-                <a:noFill/>
-              </a:ln>
-              <a:effectLst/>
-            </c:spPr>
-            <c:txPr>
-              <a:bodyPr/>
-              <a:lstStyle/>
-              <a:p>
-                <a:pPr>
-                  <a:defRPr sz="900"/>
-                </a:pPr>
-                <a:endParaRPr lang="en-US"/>
-              </a:p>
-            </c:txPr>
-            <c:showLegendKey val="0"/>
-            <c:showVal val="1"/>
-            <c:showCatName val="0"/>
-            <c:showSerName val="0"/>
-            <c:showPercent val="0"/>
-            <c:showBubbleSize val="0"/>
-            <c:showLeaderLines val="0"/>
-            <c:extLst>
-              <c:ext xmlns:c15="http://schemas.microsoft.com/office/drawing/2012/chart" uri="{CE6537A1-D6FC-4f65-9D91-7224C49458BB}">
-                <c15:showLeaderLines val="0"/>
-              </c:ext>
-            </c:extLst>
-          </c:dLbls>
-          <c:cat>
-            <c:strRef>
-              <c:f>Sheet1!$A$2:$A$6</c:f>
-              <c:strCache>
-                <c:ptCount val="5"/>
-                <c:pt idx="0">
-                  <c:v>Gloves</c:v>
-                </c:pt>
-                <c:pt idx="1">
-                  <c:v>Sandals</c:v>
-                </c:pt>
-                <c:pt idx="2">
-                  <c:v>Boots</c:v>
-                </c:pt>
-                <c:pt idx="3">
-                  <c:v>Hat</c:v>
-                </c:pt>
-                <c:pt idx="4">
-                  <c:v>Skirt</c:v>
-                </c:pt>
-              </c:strCache>
-            </c:strRef>
-          </c:cat>
-          <c:val>
-            <c:numRef>
-              <c:f>Sheet1!$B$2:$B$6</c:f>
-              <c:numCache>
-                <c:formatCode>General</c:formatCode>
-                <c:ptCount val="5"/>
-                <c:pt idx="0">
-                  <c:v>3.8627737226277374</c:v>
-                </c:pt>
-                <c:pt idx="1">
-                  <c:v>3.8446540880503144</c:v>
-                </c:pt>
-                <c:pt idx="2">
-                  <c:v>3.8188811188811189</c:v>
-                </c:pt>
-                <c:pt idx="3">
-                  <c:v>3.8013071895424839</c:v>
-                </c:pt>
-                <c:pt idx="4">
-                  <c:v>3.7853503184713371</c:v>
-                </c:pt>
-              </c:numCache>
-            </c:numRef>
-          </c:val>
-          <c:extLst>
-            <c:ext xmlns:c16="http://schemas.microsoft.com/office/drawing/2014/chart" uri="{C3380CC4-5D6E-409C-BE32-E72D297353CC}">
-              <c16:uniqueId val="{00000000-6045-455B-833A-58CBC3CABB65}"/>
-            </c:ext>
-          </c:extLst>
-        </c:ser>
-        <c:dLbls>
-          <c:showLegendKey val="0"/>
-          <c:showVal val="1"/>
-          <c:showCatName val="0"/>
-          <c:showSerName val="0"/>
-          <c:showPercent val="0"/>
-          <c:showBubbleSize val="0"/>
-        </c:dLbls>
-        <c:gapWidth val="150"/>
-        <c:axId val="-2068027336"/>
-        <c:axId val="-2113994440"/>
-      </c:barChart>
-      <c:catAx>
-        <c:axId val="-2068027336"/>
-        <c:scaling>
-          <c:orientation val="minMax"/>
-        </c:scaling>
-        <c:delete val="0"/>
-        <c:axPos val="l"/>
-        <c:numFmt formatCode="General" sourceLinked="0"/>
-        <c:majorTickMark val="out"/>
-        <c:minorTickMark val="none"/>
-        <c:tickLblPos val="nextTo"/>
-        <c:txPr>
-          <a:bodyPr/>
-          <a:lstStyle/>
-          <a:p>
-            <a:pPr>
-              <a:defRPr sz="900"/>
-            </a:pPr>
-            <a:endParaRPr lang="en-US"/>
-          </a:p>
-        </c:txPr>
-        <c:crossAx val="-2113994440"/>
-        <c:crosses val="autoZero"/>
-        <c:auto val="1"/>
-        <c:lblAlgn val="ctr"/>
-        <c:lblOffset val="100"/>
-        <c:noMultiLvlLbl val="0"/>
-      </c:catAx>
-      <c:valAx>
-        <c:axId val="-2113994440"/>
-        <c:scaling>
-          <c:orientation val="minMax"/>
-        </c:scaling>
-        <c:delete val="0"/>
-        <c:axPos val="b"/>
-        <c:majorGridlines/>
-        <c:numFmt formatCode="General" sourceLinked="1"/>
-        <c:majorTickMark val="out"/>
-        <c:minorTickMark val="none"/>
-        <c:tickLblPos val="nextTo"/>
-        <c:txPr>
-          <a:bodyPr/>
-          <a:lstStyle/>
-          <a:p>
-            <a:pPr>
-              <a:defRPr sz="900"/>
-            </a:pPr>
-            <a:endParaRPr lang="en-US"/>
-          </a:p>
-        </c:txPr>
-        <c:crossAx val="-2068027336"/>
-        <c:crosses val="autoZero"/>
-        <c:crossBetween val="between"/>
-      </c:valAx>
-    </c:plotArea>
-    <c:plotVisOnly val="1"/>
-    <c:dispBlanksAs val="gap"/>
-    <c:showDLblsOverMax val="1"/>
-  </c:chart>
-  <c:txPr>
-    <a:bodyPr/>
-    <a:lstStyle/>
-    <a:p>
-      <a:pPr>
-        <a:defRPr sz="1800"/>
-      </a:pPr>
-      <a:endParaRPr lang="en-US"/>
-    </a:p>
-  </c:txPr>
-  <c:externalData r:id="rId1">
-    <c:autoUpdate val="0"/>
-  </c:externalData>
-</c:chartSpace>
+<file path=ppt/changesInfos/changesInfo1.xml><?xml version="1.0" encoding="utf-8"?>
+<pc:chgInfo xmlns:a="http://schemas.openxmlformats.org/drawingml/2006/main" xmlns:r="http://schemas.openxmlformats.org/officeDocument/2006/relationships" xmlns:ac="http://schemas.microsoft.com/office/drawing/2013/main/command" xmlns:pc="http://schemas.microsoft.com/office/powerpoint/2013/main/command">
+  <pc:docChgLst>
+    <pc:chgData name="Mann Shah" userId="31d329eb7dfec00a" providerId="LiveId" clId="{1234865F-BA3E-41EE-8C6C-04782AEFA19C}"/>
+    <pc:docChg chg="undo custSel modSld">
+      <pc:chgData name="Mann Shah" userId="31d329eb7dfec00a" providerId="LiveId" clId="{1234865F-BA3E-41EE-8C6C-04782AEFA19C}" dt="2026-09-08T22:29:44.772" v="1281" actId="14100"/>
+      <pc:docMkLst>
+        <pc:docMk/>
+      </pc:docMkLst>
+      <pc:sldChg chg="delSp modSp mod">
+        <pc:chgData name="Mann Shah" userId="31d329eb7dfec00a" providerId="LiveId" clId="{1234865F-BA3E-41EE-8C6C-04782AEFA19C}" dt="2026-09-08T21:34:12.718" v="326" actId="20577"/>
+        <pc:sldMkLst>
+          <pc:docMk/>
+          <pc:sldMk cId="0" sldId="258"/>
+        </pc:sldMkLst>
+        <pc:spChg chg="mod">
+          <ac:chgData name="Mann Shah" userId="31d329eb7dfec00a" providerId="LiveId" clId="{1234865F-BA3E-41EE-8C6C-04782AEFA19C}" dt="2026-09-08T21:26:47.127" v="7" actId="20577"/>
+          <ac:spMkLst>
+            <pc:docMk/>
+            <pc:sldMk cId="0" sldId="258"/>
+            <ac:spMk id="3" creationId="{00000000-0000-0000-0000-000000000000}"/>
+          </ac:spMkLst>
+        </pc:spChg>
+        <pc:spChg chg="del">
+          <ac:chgData name="Mann Shah" userId="31d329eb7dfec00a" providerId="LiveId" clId="{1234865F-BA3E-41EE-8C6C-04782AEFA19C}" dt="2026-09-08T21:27:47.715" v="8" actId="478"/>
+          <ac:spMkLst>
+            <pc:docMk/>
+            <pc:sldMk cId="0" sldId="258"/>
+            <ac:spMk id="4" creationId="{00000000-0000-0000-0000-000000000000}"/>
+          </ac:spMkLst>
+        </pc:spChg>
+        <pc:spChg chg="mod">
+          <ac:chgData name="Mann Shah" userId="31d329eb7dfec00a" providerId="LiveId" clId="{1234865F-BA3E-41EE-8C6C-04782AEFA19C}" dt="2026-09-08T21:29:27.833" v="21" actId="20577"/>
+          <ac:spMkLst>
+            <pc:docMk/>
+            <pc:sldMk cId="0" sldId="258"/>
+            <ac:spMk id="8" creationId="{00000000-0000-0000-0000-000000000000}"/>
+          </ac:spMkLst>
+        </pc:spChg>
+        <pc:spChg chg="mod">
+          <ac:chgData name="Mann Shah" userId="31d329eb7dfec00a" providerId="LiveId" clId="{1234865F-BA3E-41EE-8C6C-04782AEFA19C}" dt="2026-09-08T21:32:11.392" v="161" actId="20577"/>
+          <ac:spMkLst>
+            <pc:docMk/>
+            <pc:sldMk cId="0" sldId="258"/>
+            <ac:spMk id="9" creationId="{00000000-0000-0000-0000-000000000000}"/>
+          </ac:spMkLst>
+        </pc:spChg>
+        <pc:spChg chg="mod">
+          <ac:chgData name="Mann Shah" userId="31d329eb7dfec00a" providerId="LiveId" clId="{1234865F-BA3E-41EE-8C6C-04782AEFA19C}" dt="2026-09-08T21:32:59.753" v="256" actId="20577"/>
+          <ac:spMkLst>
+            <pc:docMk/>
+            <pc:sldMk cId="0" sldId="258"/>
+            <ac:spMk id="13" creationId="{00000000-0000-0000-0000-000000000000}"/>
+          </ac:spMkLst>
+        </pc:spChg>
+        <pc:spChg chg="mod">
+          <ac:chgData name="Mann Shah" userId="31d329eb7dfec00a" providerId="LiveId" clId="{1234865F-BA3E-41EE-8C6C-04782AEFA19C}" dt="2026-09-08T21:32:55.972" v="249" actId="20577"/>
+          <ac:spMkLst>
+            <pc:docMk/>
+            <pc:sldMk cId="0" sldId="258"/>
+            <ac:spMk id="14" creationId="{00000000-0000-0000-0000-000000000000}"/>
+          </ac:spMkLst>
+        </pc:spChg>
+        <pc:spChg chg="mod">
+          <ac:chgData name="Mann Shah" userId="31d329eb7dfec00a" providerId="LiveId" clId="{1234865F-BA3E-41EE-8C6C-04782AEFA19C}" dt="2026-09-08T21:33:06.484" v="274" actId="20577"/>
+          <ac:spMkLst>
+            <pc:docMk/>
+            <pc:sldMk cId="0" sldId="258"/>
+            <ac:spMk id="18" creationId="{00000000-0000-0000-0000-000000000000}"/>
+          </ac:spMkLst>
+        </pc:spChg>
+        <pc:spChg chg="mod">
+          <ac:chgData name="Mann Shah" userId="31d329eb7dfec00a" providerId="LiveId" clId="{1234865F-BA3E-41EE-8C6C-04782AEFA19C}" dt="2026-09-08T21:33:21.835" v="294" actId="20577"/>
+          <ac:spMkLst>
+            <pc:docMk/>
+            <pc:sldMk cId="0" sldId="258"/>
+            <ac:spMk id="19" creationId="{00000000-0000-0000-0000-000000000000}"/>
+          </ac:spMkLst>
+        </pc:spChg>
+        <pc:spChg chg="mod">
+          <ac:chgData name="Mann Shah" userId="31d329eb7dfec00a" providerId="LiveId" clId="{1234865F-BA3E-41EE-8C6C-04782AEFA19C}" dt="2026-09-08T21:33:47.925" v="302" actId="20577"/>
+          <ac:spMkLst>
+            <pc:docMk/>
+            <pc:sldMk cId="0" sldId="258"/>
+            <ac:spMk id="23" creationId="{00000000-0000-0000-0000-000000000000}"/>
+          </ac:spMkLst>
+        </pc:spChg>
+        <pc:spChg chg="mod">
+          <ac:chgData name="Mann Shah" userId="31d329eb7dfec00a" providerId="LiveId" clId="{1234865F-BA3E-41EE-8C6C-04782AEFA19C}" dt="2026-09-08T21:34:12.718" v="326" actId="20577"/>
+          <ac:spMkLst>
+            <pc:docMk/>
+            <pc:sldMk cId="0" sldId="258"/>
+            <ac:spMk id="24" creationId="{00000000-0000-0000-0000-000000000000}"/>
+          </ac:spMkLst>
+        </pc:spChg>
+      </pc:sldChg>
+      <pc:sldChg chg="addSp delSp modSp mod">
+        <pc:chgData name="Mann Shah" userId="31d329eb7dfec00a" providerId="LiveId" clId="{1234865F-BA3E-41EE-8C6C-04782AEFA19C}" dt="2026-09-08T22:20:39.056" v="1146"/>
+        <pc:sldMkLst>
+          <pc:docMk/>
+          <pc:sldMk cId="0" sldId="259"/>
+        </pc:sldMkLst>
+        <pc:spChg chg="del mod">
+          <ac:chgData name="Mann Shah" userId="31d329eb7dfec00a" providerId="LiveId" clId="{1234865F-BA3E-41EE-8C6C-04782AEFA19C}" dt="2026-09-08T21:43:20.060" v="415" actId="478"/>
+          <ac:spMkLst>
+            <pc:docMk/>
+            <pc:sldMk cId="0" sldId="259"/>
+            <ac:spMk id="2" creationId="{00000000-0000-0000-0000-000000000000}"/>
+          </ac:spMkLst>
+        </pc:spChg>
+        <pc:spChg chg="mod">
+          <ac:chgData name="Mann Shah" userId="31d329eb7dfec00a" providerId="LiveId" clId="{1234865F-BA3E-41EE-8C6C-04782AEFA19C}" dt="2026-09-08T21:45:42.667" v="453" actId="20577"/>
+          <ac:spMkLst>
+            <pc:docMk/>
+            <pc:sldMk cId="0" sldId="259"/>
+            <ac:spMk id="3" creationId="{00000000-0000-0000-0000-000000000000}"/>
+          </ac:spMkLst>
+        </pc:spChg>
+        <pc:spChg chg="del">
+          <ac:chgData name="Mann Shah" userId="31d329eb7dfec00a" providerId="LiveId" clId="{1234865F-BA3E-41EE-8C6C-04782AEFA19C}" dt="2026-09-08T21:43:32.784" v="417" actId="478"/>
+          <ac:spMkLst>
+            <pc:docMk/>
+            <pc:sldMk cId="0" sldId="259"/>
+            <ac:spMk id="4" creationId="{00000000-0000-0000-0000-000000000000}"/>
+          </ac:spMkLst>
+        </pc:spChg>
+        <pc:spChg chg="del">
+          <ac:chgData name="Mann Shah" userId="31d329eb7dfec00a" providerId="LiveId" clId="{1234865F-BA3E-41EE-8C6C-04782AEFA19C}" dt="2026-09-08T21:43:35.998" v="420" actId="478"/>
+          <ac:spMkLst>
+            <pc:docMk/>
+            <pc:sldMk cId="0" sldId="259"/>
+            <ac:spMk id="6" creationId="{00000000-0000-0000-0000-000000000000}"/>
+          </ac:spMkLst>
+        </pc:spChg>
+        <pc:spChg chg="del">
+          <ac:chgData name="Mann Shah" userId="31d329eb7dfec00a" providerId="LiveId" clId="{1234865F-BA3E-41EE-8C6C-04782AEFA19C}" dt="2026-09-08T21:43:32.784" v="417" actId="478"/>
+          <ac:spMkLst>
+            <pc:docMk/>
+            <pc:sldMk cId="0" sldId="259"/>
+            <ac:spMk id="7" creationId="{00000000-0000-0000-0000-000000000000}"/>
+          </ac:spMkLst>
+        </pc:spChg>
+        <pc:spChg chg="del">
+          <ac:chgData name="Mann Shah" userId="31d329eb7dfec00a" providerId="LiveId" clId="{1234865F-BA3E-41EE-8C6C-04782AEFA19C}" dt="2026-09-08T21:43:32.784" v="417" actId="478"/>
+          <ac:spMkLst>
+            <pc:docMk/>
+            <pc:sldMk cId="0" sldId="259"/>
+            <ac:spMk id="8" creationId="{00000000-0000-0000-0000-000000000000}"/>
+          </ac:spMkLst>
+        </pc:spChg>
+        <pc:spChg chg="del">
+          <ac:chgData name="Mann Shah" userId="31d329eb7dfec00a" providerId="LiveId" clId="{1234865F-BA3E-41EE-8C6C-04782AEFA19C}" dt="2026-09-08T21:43:35.998" v="420" actId="478"/>
+          <ac:spMkLst>
+            <pc:docMk/>
+            <pc:sldMk cId="0" sldId="259"/>
+            <ac:spMk id="9" creationId="{00000000-0000-0000-0000-000000000000}"/>
+          </ac:spMkLst>
+        </pc:spChg>
+        <pc:spChg chg="del">
+          <ac:chgData name="Mann Shah" userId="31d329eb7dfec00a" providerId="LiveId" clId="{1234865F-BA3E-41EE-8C6C-04782AEFA19C}" dt="2026-09-08T21:43:33.730" v="418" actId="478"/>
+          <ac:spMkLst>
+            <pc:docMk/>
+            <pc:sldMk cId="0" sldId="259"/>
+            <ac:spMk id="10" creationId="{00000000-0000-0000-0000-000000000000}"/>
+          </ac:spMkLst>
+        </pc:spChg>
+        <pc:spChg chg="del">
+          <ac:chgData name="Mann Shah" userId="31d329eb7dfec00a" providerId="LiveId" clId="{1234865F-BA3E-41EE-8C6C-04782AEFA19C}" dt="2026-09-08T21:43:32.784" v="417" actId="478"/>
+          <ac:spMkLst>
+            <pc:docMk/>
+            <pc:sldMk cId="0" sldId="259"/>
+            <ac:spMk id="11" creationId="{00000000-0000-0000-0000-000000000000}"/>
+          </ac:spMkLst>
+        </pc:spChg>
+        <pc:spChg chg="del">
+          <ac:chgData name="Mann Shah" userId="31d329eb7dfec00a" providerId="LiveId" clId="{1234865F-BA3E-41EE-8C6C-04782AEFA19C}" dt="2026-09-08T21:43:32.784" v="417" actId="478"/>
+          <ac:spMkLst>
+            <pc:docMk/>
+            <pc:sldMk cId="0" sldId="259"/>
+            <ac:spMk id="12" creationId="{00000000-0000-0000-0000-000000000000}"/>
+          </ac:spMkLst>
+        </pc:spChg>
+        <pc:spChg chg="del mod">
+          <ac:chgData name="Mann Shah" userId="31d329eb7dfec00a" providerId="LiveId" clId="{1234865F-BA3E-41EE-8C6C-04782AEFA19C}" dt="2026-09-08T21:43:35.998" v="420" actId="478"/>
+          <ac:spMkLst>
+            <pc:docMk/>
+            <pc:sldMk cId="0" sldId="259"/>
+            <ac:spMk id="13" creationId="{00000000-0000-0000-0000-000000000000}"/>
+          </ac:spMkLst>
+        </pc:spChg>
+        <pc:spChg chg="del">
+          <ac:chgData name="Mann Shah" userId="31d329eb7dfec00a" providerId="LiveId" clId="{1234865F-BA3E-41EE-8C6C-04782AEFA19C}" dt="2026-09-08T21:43:30.555" v="416" actId="478"/>
+          <ac:spMkLst>
+            <pc:docMk/>
+            <pc:sldMk cId="0" sldId="259"/>
+            <ac:spMk id="14" creationId="{00000000-0000-0000-0000-000000000000}"/>
+          </ac:spMkLst>
+        </pc:spChg>
+        <pc:spChg chg="del">
+          <ac:chgData name="Mann Shah" userId="31d329eb7dfec00a" providerId="LiveId" clId="{1234865F-BA3E-41EE-8C6C-04782AEFA19C}" dt="2026-09-08T21:43:32.784" v="417" actId="478"/>
+          <ac:spMkLst>
+            <pc:docMk/>
+            <pc:sldMk cId="0" sldId="259"/>
+            <ac:spMk id="15" creationId="{00000000-0000-0000-0000-000000000000}"/>
+          </ac:spMkLst>
+        </pc:spChg>
+        <pc:spChg chg="del">
+          <ac:chgData name="Mann Shah" userId="31d329eb7dfec00a" providerId="LiveId" clId="{1234865F-BA3E-41EE-8C6C-04782AEFA19C}" dt="2026-09-08T21:43:32.784" v="417" actId="478"/>
+          <ac:spMkLst>
+            <pc:docMk/>
+            <pc:sldMk cId="0" sldId="259"/>
+            <ac:spMk id="16" creationId="{00000000-0000-0000-0000-000000000000}"/>
+          </ac:spMkLst>
+        </pc:spChg>
+        <pc:spChg chg="del">
+          <ac:chgData name="Mann Shah" userId="31d329eb7dfec00a" providerId="LiveId" clId="{1234865F-BA3E-41EE-8C6C-04782AEFA19C}" dt="2026-09-08T21:43:34.293" v="419" actId="478"/>
+          <ac:spMkLst>
+            <pc:docMk/>
+            <pc:sldMk cId="0" sldId="259"/>
+            <ac:spMk id="17" creationId="{00000000-0000-0000-0000-000000000000}"/>
+          </ac:spMkLst>
+        </pc:spChg>
+        <pc:spChg chg="mod">
+          <ac:chgData name="Mann Shah" userId="31d329eb7dfec00a" providerId="LiveId" clId="{1234865F-BA3E-41EE-8C6C-04782AEFA19C}" dt="2026-09-08T21:51:22.536" v="602" actId="1076"/>
+          <ac:spMkLst>
+            <pc:docMk/>
+            <pc:sldMk cId="0" sldId="259"/>
+            <ac:spMk id="19" creationId="{00000000-0000-0000-0000-000000000000}"/>
+          </ac:spMkLst>
+        </pc:spChg>
+        <pc:spChg chg="mod">
+          <ac:chgData name="Mann Shah" userId="31d329eb7dfec00a" providerId="LiveId" clId="{1234865F-BA3E-41EE-8C6C-04782AEFA19C}" dt="2026-09-08T21:51:22.536" v="602" actId="1076"/>
+          <ac:spMkLst>
+            <pc:docMk/>
+            <pc:sldMk cId="0" sldId="259"/>
+            <ac:spMk id="20" creationId="{00000000-0000-0000-0000-000000000000}"/>
+          </ac:spMkLst>
+        </pc:spChg>
+        <pc:spChg chg="del mod">
+          <ac:chgData name="Mann Shah" userId="31d329eb7dfec00a" providerId="LiveId" clId="{1234865F-BA3E-41EE-8C6C-04782AEFA19C}" dt="2026-09-08T21:45:57.385" v="456" actId="478"/>
+          <ac:spMkLst>
+            <pc:docMk/>
+            <pc:sldMk cId="0" sldId="259"/>
+            <ac:spMk id="21" creationId="{00000000-0000-0000-0000-000000000000}"/>
+          </ac:spMkLst>
+        </pc:spChg>
+        <pc:spChg chg="mod">
+          <ac:chgData name="Mann Shah" userId="31d329eb7dfec00a" providerId="LiveId" clId="{1234865F-BA3E-41EE-8C6C-04782AEFA19C}" dt="2026-09-08T22:20:39.056" v="1146"/>
+          <ac:spMkLst>
+            <pc:docMk/>
+            <pc:sldMk cId="0" sldId="259"/>
+            <ac:spMk id="22" creationId="{00000000-0000-0000-0000-000000000000}"/>
+          </ac:spMkLst>
+        </pc:spChg>
+        <pc:spChg chg="add del mod">
+          <ac:chgData name="Mann Shah" userId="31d329eb7dfec00a" providerId="LiveId" clId="{1234865F-BA3E-41EE-8C6C-04782AEFA19C}" dt="2026-09-08T21:43:19.599" v="414" actId="478"/>
+          <ac:spMkLst>
+            <pc:docMk/>
+            <pc:sldMk cId="0" sldId="259"/>
+            <ac:spMk id="23" creationId="{CB68EC67-E296-C2C6-2208-95B5A092771B}"/>
+          </ac:spMkLst>
+        </pc:spChg>
+        <pc:graphicFrameChg chg="del">
+          <ac:chgData name="Mann Shah" userId="31d329eb7dfec00a" providerId="LiveId" clId="{1234865F-BA3E-41EE-8C6C-04782AEFA19C}" dt="2026-09-08T21:35:51.911" v="335" actId="478"/>
+          <ac:graphicFrameMkLst>
+            <pc:docMk/>
+            <pc:sldMk cId="0" sldId="259"/>
+            <ac:graphicFrameMk id="18" creationId="{00000000-0000-0000-0000-000000000000}"/>
+          </ac:graphicFrameMkLst>
+        </pc:graphicFrameChg>
+        <pc:graphicFrameChg chg="add mod ord modGraphic">
+          <ac:chgData name="Mann Shah" userId="31d329eb7dfec00a" providerId="LiveId" clId="{1234865F-BA3E-41EE-8C6C-04782AEFA19C}" dt="2026-09-08T21:51:18.311" v="601" actId="1076"/>
+          <ac:graphicFrameMkLst>
+            <pc:docMk/>
+            <pc:sldMk cId="0" sldId="259"/>
+            <ac:graphicFrameMk id="25" creationId="{3740724E-B60F-5BF5-BF1A-1EF93E1A4CA8}"/>
+          </ac:graphicFrameMkLst>
+        </pc:graphicFrameChg>
+      </pc:sldChg>
+      <pc:sldChg chg="addSp delSp modSp mod">
+        <pc:chgData name="Mann Shah" userId="31d329eb7dfec00a" providerId="LiveId" clId="{1234865F-BA3E-41EE-8C6C-04782AEFA19C}" dt="2026-09-08T22:05:12.274" v="853" actId="20577"/>
+        <pc:sldMkLst>
+          <pc:docMk/>
+          <pc:sldMk cId="0" sldId="260"/>
+        </pc:sldMkLst>
+        <pc:spChg chg="add del mod">
+          <ac:chgData name="Mann Shah" userId="31d329eb7dfec00a" providerId="LiveId" clId="{1234865F-BA3E-41EE-8C6C-04782AEFA19C}" dt="2026-09-08T22:00:11.806" v="739" actId="1076"/>
+          <ac:spMkLst>
+            <pc:docMk/>
+            <pc:sldMk cId="0" sldId="260"/>
+            <ac:spMk id="2" creationId="{00000000-0000-0000-0000-000000000000}"/>
+          </ac:spMkLst>
+        </pc:spChg>
+        <pc:spChg chg="mod">
+          <ac:chgData name="Mann Shah" userId="31d329eb7dfec00a" providerId="LiveId" clId="{1234865F-BA3E-41EE-8C6C-04782AEFA19C}" dt="2026-09-08T21:53:58.720" v="624" actId="20577"/>
+          <ac:spMkLst>
+            <pc:docMk/>
+            <pc:sldMk cId="0" sldId="260"/>
+            <ac:spMk id="3" creationId="{00000000-0000-0000-0000-000000000000}"/>
+          </ac:spMkLst>
+        </pc:spChg>
+        <pc:spChg chg="mod">
+          <ac:chgData name="Mann Shah" userId="31d329eb7dfec00a" providerId="LiveId" clId="{1234865F-BA3E-41EE-8C6C-04782AEFA19C}" dt="2026-09-08T22:00:49.178" v="749" actId="1076"/>
+          <ac:spMkLst>
+            <pc:docMk/>
+            <pc:sldMk cId="0" sldId="260"/>
+            <ac:spMk id="4" creationId="{00000000-0000-0000-0000-000000000000}"/>
+          </ac:spMkLst>
+        </pc:spChg>
+        <pc:spChg chg="mod">
+          <ac:chgData name="Mann Shah" userId="31d329eb7dfec00a" providerId="LiveId" clId="{1234865F-BA3E-41EE-8C6C-04782AEFA19C}" dt="2026-09-08T22:00:49.178" v="749" actId="1076"/>
+          <ac:spMkLst>
+            <pc:docMk/>
+            <pc:sldMk cId="0" sldId="260"/>
+            <ac:spMk id="6" creationId="{00000000-0000-0000-0000-000000000000}"/>
+          </ac:spMkLst>
+        </pc:spChg>
+        <pc:spChg chg="mod">
+          <ac:chgData name="Mann Shah" userId="31d329eb7dfec00a" providerId="LiveId" clId="{1234865F-BA3E-41EE-8C6C-04782AEFA19C}" dt="2026-09-08T22:00:49.178" v="749" actId="1076"/>
+          <ac:spMkLst>
+            <pc:docMk/>
+            <pc:sldMk cId="0" sldId="260"/>
+            <ac:spMk id="7" creationId="{00000000-0000-0000-0000-000000000000}"/>
+          </ac:spMkLst>
+        </pc:spChg>
+        <pc:spChg chg="mod">
+          <ac:chgData name="Mann Shah" userId="31d329eb7dfec00a" providerId="LiveId" clId="{1234865F-BA3E-41EE-8C6C-04782AEFA19C}" dt="2026-09-08T22:00:49.178" v="749" actId="1076"/>
+          <ac:spMkLst>
+            <pc:docMk/>
+            <pc:sldMk cId="0" sldId="260"/>
+            <ac:spMk id="8" creationId="{00000000-0000-0000-0000-000000000000}"/>
+          </ac:spMkLst>
+        </pc:spChg>
+        <pc:spChg chg="mod">
+          <ac:chgData name="Mann Shah" userId="31d329eb7dfec00a" providerId="LiveId" clId="{1234865F-BA3E-41EE-8C6C-04782AEFA19C}" dt="2026-09-08T22:00:49.178" v="749" actId="1076"/>
+          <ac:spMkLst>
+            <pc:docMk/>
+            <pc:sldMk cId="0" sldId="260"/>
+            <ac:spMk id="10" creationId="{00000000-0000-0000-0000-000000000000}"/>
+          </ac:spMkLst>
+        </pc:spChg>
+        <pc:spChg chg="del">
+          <ac:chgData name="Mann Shah" userId="31d329eb7dfec00a" providerId="LiveId" clId="{1234865F-BA3E-41EE-8C6C-04782AEFA19C}" dt="2026-09-08T21:58:16.261" v="700" actId="478"/>
+          <ac:spMkLst>
+            <pc:docMk/>
+            <pc:sldMk cId="0" sldId="260"/>
+            <ac:spMk id="11" creationId="{00000000-0000-0000-0000-000000000000}"/>
+          </ac:spMkLst>
+        </pc:spChg>
+        <pc:spChg chg="del mod">
+          <ac:chgData name="Mann Shah" userId="31d329eb7dfec00a" providerId="LiveId" clId="{1234865F-BA3E-41EE-8C6C-04782AEFA19C}" dt="2026-09-08T21:58:20.306" v="704" actId="478"/>
+          <ac:spMkLst>
+            <pc:docMk/>
+            <pc:sldMk cId="0" sldId="260"/>
+            <ac:spMk id="12" creationId="{00000000-0000-0000-0000-000000000000}"/>
+          </ac:spMkLst>
+        </pc:spChg>
+        <pc:spChg chg="del">
+          <ac:chgData name="Mann Shah" userId="31d329eb7dfec00a" providerId="LiveId" clId="{1234865F-BA3E-41EE-8C6C-04782AEFA19C}" dt="2026-09-08T21:58:21.438" v="705" actId="478"/>
+          <ac:spMkLst>
+            <pc:docMk/>
+            <pc:sldMk cId="0" sldId="260"/>
+            <ac:spMk id="13" creationId="{00000000-0000-0000-0000-000000000000}"/>
+          </ac:spMkLst>
+        </pc:spChg>
+        <pc:spChg chg="del">
+          <ac:chgData name="Mann Shah" userId="31d329eb7dfec00a" providerId="LiveId" clId="{1234865F-BA3E-41EE-8C6C-04782AEFA19C}" dt="2026-09-08T21:58:22.294" v="706" actId="478"/>
+          <ac:spMkLst>
+            <pc:docMk/>
+            <pc:sldMk cId="0" sldId="260"/>
+            <ac:spMk id="14" creationId="{00000000-0000-0000-0000-000000000000}"/>
+          </ac:spMkLst>
+        </pc:spChg>
+        <pc:spChg chg="mod">
+          <ac:chgData name="Mann Shah" userId="31d329eb7dfec00a" providerId="LiveId" clId="{1234865F-BA3E-41EE-8C6C-04782AEFA19C}" dt="2026-09-08T22:00:49.178" v="749" actId="1076"/>
+          <ac:spMkLst>
+            <pc:docMk/>
+            <pc:sldMk cId="0" sldId="260"/>
+            <ac:spMk id="15" creationId="{00000000-0000-0000-0000-000000000000}"/>
+          </ac:spMkLst>
+        </pc:spChg>
+        <pc:spChg chg="mod">
+          <ac:chgData name="Mann Shah" userId="31d329eb7dfec00a" providerId="LiveId" clId="{1234865F-BA3E-41EE-8C6C-04782AEFA19C}" dt="2026-09-08T22:00:49.178" v="749" actId="1076"/>
+          <ac:spMkLst>
+            <pc:docMk/>
+            <pc:sldMk cId="0" sldId="260"/>
+            <ac:spMk id="16" creationId="{00000000-0000-0000-0000-000000000000}"/>
+          </ac:spMkLst>
+        </pc:spChg>
+        <pc:spChg chg="mod">
+          <ac:chgData name="Mann Shah" userId="31d329eb7dfec00a" providerId="LiveId" clId="{1234865F-BA3E-41EE-8C6C-04782AEFA19C}" dt="2026-09-08T22:00:49.178" v="749" actId="1076"/>
+          <ac:spMkLst>
+            <pc:docMk/>
+            <pc:sldMk cId="0" sldId="260"/>
+            <ac:spMk id="17" creationId="{00000000-0000-0000-0000-000000000000}"/>
+          </ac:spMkLst>
+        </pc:spChg>
+        <pc:spChg chg="mod">
+          <ac:chgData name="Mann Shah" userId="31d329eb7dfec00a" providerId="LiveId" clId="{1234865F-BA3E-41EE-8C6C-04782AEFA19C}" dt="2026-09-08T22:00:49.178" v="749" actId="1076"/>
+          <ac:spMkLst>
+            <pc:docMk/>
+            <pc:sldMk cId="0" sldId="260"/>
+            <ac:spMk id="18" creationId="{00000000-0000-0000-0000-000000000000}"/>
+          </ac:spMkLst>
+        </pc:spChg>
+        <pc:spChg chg="mod">
+          <ac:chgData name="Mann Shah" userId="31d329eb7dfec00a" providerId="LiveId" clId="{1234865F-BA3E-41EE-8C6C-04782AEFA19C}" dt="2026-09-08T22:00:49.178" v="749" actId="1076"/>
+          <ac:spMkLst>
+            <pc:docMk/>
+            <pc:sldMk cId="0" sldId="260"/>
+            <ac:spMk id="19" creationId="{00000000-0000-0000-0000-000000000000}"/>
+          </ac:spMkLst>
+        </pc:spChg>
+        <pc:spChg chg="del">
+          <ac:chgData name="Mann Shah" userId="31d329eb7dfec00a" providerId="LiveId" clId="{1234865F-BA3E-41EE-8C6C-04782AEFA19C}" dt="2026-09-08T21:58:26.620" v="709" actId="478"/>
+          <ac:spMkLst>
+            <pc:docMk/>
+            <pc:sldMk cId="0" sldId="260"/>
+            <ac:spMk id="20" creationId="{00000000-0000-0000-0000-000000000000}"/>
+          </ac:spMkLst>
+        </pc:spChg>
+        <pc:spChg chg="del mod">
+          <ac:chgData name="Mann Shah" userId="31d329eb7dfec00a" providerId="LiveId" clId="{1234865F-BA3E-41EE-8C6C-04782AEFA19C}" dt="2026-09-08T21:58:30.300" v="712" actId="478"/>
+          <ac:spMkLst>
+            <pc:docMk/>
+            <pc:sldMk cId="0" sldId="260"/>
+            <ac:spMk id="21" creationId="{00000000-0000-0000-0000-000000000000}"/>
+          </ac:spMkLst>
+        </pc:spChg>
+        <pc:spChg chg="del">
+          <ac:chgData name="Mann Shah" userId="31d329eb7dfec00a" providerId="LiveId" clId="{1234865F-BA3E-41EE-8C6C-04782AEFA19C}" dt="2026-09-08T21:58:28.910" v="711" actId="478"/>
+          <ac:spMkLst>
+            <pc:docMk/>
+            <pc:sldMk cId="0" sldId="260"/>
+            <ac:spMk id="22" creationId="{00000000-0000-0000-0000-000000000000}"/>
+          </ac:spMkLst>
+        </pc:spChg>
+        <pc:spChg chg="del mod">
+          <ac:chgData name="Mann Shah" userId="31d329eb7dfec00a" providerId="LiveId" clId="{1234865F-BA3E-41EE-8C6C-04782AEFA19C}" dt="2026-09-08T21:57:21.032" v="698" actId="478"/>
+          <ac:spMkLst>
+            <pc:docMk/>
+            <pc:sldMk cId="0" sldId="260"/>
+            <ac:spMk id="23" creationId="{00000000-0000-0000-0000-000000000000}"/>
+          </ac:spMkLst>
+        </pc:spChg>
+        <pc:spChg chg="del mod">
+          <ac:chgData name="Mann Shah" userId="31d329eb7dfec00a" providerId="LiveId" clId="{1234865F-BA3E-41EE-8C6C-04782AEFA19C}" dt="2026-09-08T21:57:21.824" v="699" actId="478"/>
+          <ac:spMkLst>
+            <pc:docMk/>
+            <pc:sldMk cId="0" sldId="260"/>
+            <ac:spMk id="24" creationId="{00000000-0000-0000-0000-000000000000}"/>
+          </ac:spMkLst>
+        </pc:spChg>
+        <pc:spChg chg="mod">
+          <ac:chgData name="Mann Shah" userId="31d329eb7dfec00a" providerId="LiveId" clId="{1234865F-BA3E-41EE-8C6C-04782AEFA19C}" dt="2026-09-08T21:59:24.174" v="725" actId="1076"/>
+          <ac:spMkLst>
+            <pc:docMk/>
+            <pc:sldMk cId="0" sldId="260"/>
+            <ac:spMk id="25" creationId="{00000000-0000-0000-0000-000000000000}"/>
+          </ac:spMkLst>
+        </pc:spChg>
+        <pc:spChg chg="mod">
+          <ac:chgData name="Mann Shah" userId="31d329eb7dfec00a" providerId="LiveId" clId="{1234865F-BA3E-41EE-8C6C-04782AEFA19C}" dt="2026-09-08T21:59:24.174" v="725" actId="1076"/>
+          <ac:spMkLst>
+            <pc:docMk/>
+            <pc:sldMk cId="0" sldId="260"/>
+            <ac:spMk id="26" creationId="{00000000-0000-0000-0000-000000000000}"/>
+          </ac:spMkLst>
+        </pc:spChg>
+        <pc:spChg chg="mod">
+          <ac:chgData name="Mann Shah" userId="31d329eb7dfec00a" providerId="LiveId" clId="{1234865F-BA3E-41EE-8C6C-04782AEFA19C}" dt="2026-09-08T22:05:12.274" v="853" actId="20577"/>
+          <ac:spMkLst>
+            <pc:docMk/>
+            <pc:sldMk cId="0" sldId="260"/>
+            <ac:spMk id="27" creationId="{00000000-0000-0000-0000-000000000000}"/>
+          </ac:spMkLst>
+        </pc:spChg>
+        <pc:spChg chg="add del mod">
+          <ac:chgData name="Mann Shah" userId="31d329eb7dfec00a" providerId="LiveId" clId="{1234865F-BA3E-41EE-8C6C-04782AEFA19C}" dt="2026-09-08T21:54:01.149" v="626" actId="478"/>
+          <ac:spMkLst>
+            <pc:docMk/>
+            <pc:sldMk cId="0" sldId="260"/>
+            <ac:spMk id="30" creationId="{F329123D-C856-5EA9-56B6-C6D7907354C8}"/>
+          </ac:spMkLst>
+        </pc:spChg>
+        <pc:spChg chg="add del mod">
+          <ac:chgData name="Mann Shah" userId="31d329eb7dfec00a" providerId="LiveId" clId="{1234865F-BA3E-41EE-8C6C-04782AEFA19C}" dt="2026-09-08T21:59:42.436" v="727" actId="478"/>
+          <ac:spMkLst>
+            <pc:docMk/>
+            <pc:sldMk cId="0" sldId="260"/>
+            <ac:spMk id="32" creationId="{8509DAAE-B312-9687-9FE7-EFBF1ADFE321}"/>
+          </ac:spMkLst>
+        </pc:spChg>
+        <pc:spChg chg="add del mod">
+          <ac:chgData name="Mann Shah" userId="31d329eb7dfec00a" providerId="LiveId" clId="{1234865F-BA3E-41EE-8C6C-04782AEFA19C}" dt="2026-09-08T21:58:57.170" v="719" actId="478"/>
+          <ac:spMkLst>
+            <pc:docMk/>
+            <pc:sldMk cId="0" sldId="260"/>
+            <ac:spMk id="34" creationId="{FDDB3E5C-727D-EEF8-54A9-094CE8B06D6B}"/>
+          </ac:spMkLst>
+        </pc:spChg>
+        <pc:spChg chg="add del mod">
+          <ac:chgData name="Mann Shah" userId="31d329eb7dfec00a" providerId="LiveId" clId="{1234865F-BA3E-41EE-8C6C-04782AEFA19C}" dt="2026-09-08T21:58:56.435" v="718" actId="478"/>
+          <ac:spMkLst>
+            <pc:docMk/>
+            <pc:sldMk cId="0" sldId="260"/>
+            <ac:spMk id="36" creationId="{58F27B39-EFAF-DCAE-F89C-2CFE0D8A0463}"/>
+          </ac:spMkLst>
+        </pc:spChg>
+        <pc:spChg chg="add del">
+          <ac:chgData name="Mann Shah" userId="31d329eb7dfec00a" providerId="LiveId" clId="{1234865F-BA3E-41EE-8C6C-04782AEFA19C}" dt="2026-09-08T21:59:47.435" v="729" actId="22"/>
+          <ac:spMkLst>
+            <pc:docMk/>
+            <pc:sldMk cId="0" sldId="260"/>
+            <ac:spMk id="38" creationId="{55077CAA-698A-F371-C9E6-26190DC5366D}"/>
+          </ac:spMkLst>
+        </pc:spChg>
+        <pc:spChg chg="add del">
+          <ac:chgData name="Mann Shah" userId="31d329eb7dfec00a" providerId="LiveId" clId="{1234865F-BA3E-41EE-8C6C-04782AEFA19C}" dt="2026-09-08T21:59:47.435" v="729" actId="22"/>
+          <ac:spMkLst>
+            <pc:docMk/>
+            <pc:sldMk cId="0" sldId="260"/>
+            <ac:spMk id="40" creationId="{F97CC792-BE3F-F8E9-4A32-9289D618A87D}"/>
+          </ac:spMkLst>
+        </pc:spChg>
+        <pc:spChg chg="add del">
+          <ac:chgData name="Mann Shah" userId="31d329eb7dfec00a" providerId="LiveId" clId="{1234865F-BA3E-41EE-8C6C-04782AEFA19C}" dt="2026-09-08T21:59:47.435" v="729" actId="22"/>
+          <ac:spMkLst>
+            <pc:docMk/>
+            <pc:sldMk cId="0" sldId="260"/>
+            <ac:spMk id="42" creationId="{0E200B8D-F6AD-2000-AE5E-C4B58550A243}"/>
+          </ac:spMkLst>
+        </pc:spChg>
+        <pc:spChg chg="add mod">
+          <ac:chgData name="Mann Shah" userId="31d329eb7dfec00a" providerId="LiveId" clId="{1234865F-BA3E-41EE-8C6C-04782AEFA19C}" dt="2026-09-08T22:00:36.393" v="748" actId="14100"/>
+          <ac:spMkLst>
+            <pc:docMk/>
+            <pc:sldMk cId="0" sldId="260"/>
+            <ac:spMk id="44" creationId="{A1C08F83-E3E9-FF19-1082-8BEB93CAF919}"/>
+          </ac:spMkLst>
+        </pc:spChg>
+        <pc:spChg chg="add mod">
+          <ac:chgData name="Mann Shah" userId="31d329eb7dfec00a" providerId="LiveId" clId="{1234865F-BA3E-41EE-8C6C-04782AEFA19C}" dt="2026-09-08T22:00:15.057" v="740" actId="1076"/>
+          <ac:spMkLst>
+            <pc:docMk/>
+            <pc:sldMk cId="0" sldId="260"/>
+            <ac:spMk id="46" creationId="{CB71B0D4-C528-8414-9405-758C26E9BDE7}"/>
+          </ac:spMkLst>
+        </pc:spChg>
+        <pc:spChg chg="add mod">
+          <ac:chgData name="Mann Shah" userId="31d329eb7dfec00a" providerId="LiveId" clId="{1234865F-BA3E-41EE-8C6C-04782AEFA19C}" dt="2026-09-08T22:04:13.775" v="786"/>
+          <ac:spMkLst>
+            <pc:docMk/>
+            <pc:sldMk cId="0" sldId="260"/>
+            <ac:spMk id="48" creationId="{701C47C8-E8F6-08D6-9DEC-283511F439FD}"/>
+          </ac:spMkLst>
+        </pc:spChg>
+      </pc:sldChg>
+      <pc:sldChg chg="addSp delSp modSp mod">
+        <pc:chgData name="Mann Shah" userId="31d329eb7dfec00a" providerId="LiveId" clId="{1234865F-BA3E-41EE-8C6C-04782AEFA19C}" dt="2026-09-08T22:16:45.601" v="1135" actId="14100"/>
+        <pc:sldMkLst>
+          <pc:docMk/>
+          <pc:sldMk cId="0" sldId="261"/>
+        </pc:sldMkLst>
+        <pc:spChg chg="mod">
+          <ac:chgData name="Mann Shah" userId="31d329eb7dfec00a" providerId="LiveId" clId="{1234865F-BA3E-41EE-8C6C-04782AEFA19C}" dt="2026-09-08T22:06:52.683" v="970" actId="20577"/>
+          <ac:spMkLst>
+            <pc:docMk/>
+            <pc:sldMk cId="0" sldId="261"/>
+            <ac:spMk id="3" creationId="{00000000-0000-0000-0000-000000000000}"/>
+          </ac:spMkLst>
+        </pc:spChg>
+        <pc:spChg chg="del">
+          <ac:chgData name="Mann Shah" userId="31d329eb7dfec00a" providerId="LiveId" clId="{1234865F-BA3E-41EE-8C6C-04782AEFA19C}" dt="2026-09-08T22:06:55.376" v="971" actId="478"/>
+          <ac:spMkLst>
+            <pc:docMk/>
+            <pc:sldMk cId="0" sldId="261"/>
+            <ac:spMk id="4" creationId="{00000000-0000-0000-0000-000000000000}"/>
+          </ac:spMkLst>
+        </pc:spChg>
+        <pc:spChg chg="mod">
+          <ac:chgData name="Mann Shah" userId="31d329eb7dfec00a" providerId="LiveId" clId="{1234865F-BA3E-41EE-8C6C-04782AEFA19C}" dt="2026-09-08T22:07:08.758" v="976" actId="1076"/>
+          <ac:spMkLst>
+            <pc:docMk/>
+            <pc:sldMk cId="0" sldId="261"/>
+            <ac:spMk id="7" creationId="{00000000-0000-0000-0000-000000000000}"/>
+          </ac:spMkLst>
+        </pc:spChg>
+        <pc:spChg chg="del">
+          <ac:chgData name="Mann Shah" userId="31d329eb7dfec00a" providerId="LiveId" clId="{1234865F-BA3E-41EE-8C6C-04782AEFA19C}" dt="2026-09-08T22:07:02.732" v="974" actId="478"/>
+          <ac:spMkLst>
+            <pc:docMk/>
+            <pc:sldMk cId="0" sldId="261"/>
+            <ac:spMk id="8" creationId="{00000000-0000-0000-0000-000000000000}"/>
+          </ac:spMkLst>
+        </pc:spChg>
+        <pc:spChg chg="mod">
+          <ac:chgData name="Mann Shah" userId="31d329eb7dfec00a" providerId="LiveId" clId="{1234865F-BA3E-41EE-8C6C-04782AEFA19C}" dt="2026-09-08T22:07:08.758" v="976" actId="1076"/>
+          <ac:spMkLst>
+            <pc:docMk/>
+            <pc:sldMk cId="0" sldId="261"/>
+            <ac:spMk id="10" creationId="{00000000-0000-0000-0000-000000000000}"/>
+          </ac:spMkLst>
+        </pc:spChg>
+        <pc:spChg chg="mod">
+          <ac:chgData name="Mann Shah" userId="31d329eb7dfec00a" providerId="LiveId" clId="{1234865F-BA3E-41EE-8C6C-04782AEFA19C}" dt="2026-09-08T22:07:08.758" v="976" actId="1076"/>
+          <ac:spMkLst>
+            <pc:docMk/>
+            <pc:sldMk cId="0" sldId="261"/>
+            <ac:spMk id="11" creationId="{00000000-0000-0000-0000-000000000000}"/>
+          </ac:spMkLst>
+        </pc:spChg>
+        <pc:spChg chg="mod">
+          <ac:chgData name="Mann Shah" userId="31d329eb7dfec00a" providerId="LiveId" clId="{1234865F-BA3E-41EE-8C6C-04782AEFA19C}" dt="2026-09-08T22:07:08.758" v="976" actId="1076"/>
+          <ac:spMkLst>
+            <pc:docMk/>
+            <pc:sldMk cId="0" sldId="261"/>
+            <ac:spMk id="12" creationId="{00000000-0000-0000-0000-000000000000}"/>
+          </ac:spMkLst>
+        </pc:spChg>
+        <pc:spChg chg="mod">
+          <ac:chgData name="Mann Shah" userId="31d329eb7dfec00a" providerId="LiveId" clId="{1234865F-BA3E-41EE-8C6C-04782AEFA19C}" dt="2026-09-08T22:07:08.758" v="976" actId="1076"/>
+          <ac:spMkLst>
+            <pc:docMk/>
+            <pc:sldMk cId="0" sldId="261"/>
+            <ac:spMk id="13" creationId="{00000000-0000-0000-0000-000000000000}"/>
+          </ac:spMkLst>
+        </pc:spChg>
+        <pc:spChg chg="mod">
+          <ac:chgData name="Mann Shah" userId="31d329eb7dfec00a" providerId="LiveId" clId="{1234865F-BA3E-41EE-8C6C-04782AEFA19C}" dt="2026-09-08T22:07:08.758" v="976" actId="1076"/>
+          <ac:spMkLst>
+            <pc:docMk/>
+            <pc:sldMk cId="0" sldId="261"/>
+            <ac:spMk id="14" creationId="{00000000-0000-0000-0000-000000000000}"/>
+          </ac:spMkLst>
+        </pc:spChg>
+        <pc:spChg chg="mod">
+          <ac:chgData name="Mann Shah" userId="31d329eb7dfec00a" providerId="LiveId" clId="{1234865F-BA3E-41EE-8C6C-04782AEFA19C}" dt="2026-09-08T22:07:08.758" v="976" actId="1076"/>
+          <ac:spMkLst>
+            <pc:docMk/>
+            <pc:sldMk cId="0" sldId="261"/>
+            <ac:spMk id="16" creationId="{00000000-0000-0000-0000-000000000000}"/>
+          </ac:spMkLst>
+        </pc:spChg>
+        <pc:spChg chg="mod">
+          <ac:chgData name="Mann Shah" userId="31d329eb7dfec00a" providerId="LiveId" clId="{1234865F-BA3E-41EE-8C6C-04782AEFA19C}" dt="2026-09-08T22:07:08.758" v="976" actId="1076"/>
+          <ac:spMkLst>
+            <pc:docMk/>
+            <pc:sldMk cId="0" sldId="261"/>
+            <ac:spMk id="17" creationId="{00000000-0000-0000-0000-000000000000}"/>
+          </ac:spMkLst>
+        </pc:spChg>
+        <pc:spChg chg="mod">
+          <ac:chgData name="Mann Shah" userId="31d329eb7dfec00a" providerId="LiveId" clId="{1234865F-BA3E-41EE-8C6C-04782AEFA19C}" dt="2026-09-08T22:07:08.758" v="976" actId="1076"/>
+          <ac:spMkLst>
+            <pc:docMk/>
+            <pc:sldMk cId="0" sldId="261"/>
+            <ac:spMk id="19" creationId="{00000000-0000-0000-0000-000000000000}"/>
+          </ac:spMkLst>
+        </pc:spChg>
+        <pc:spChg chg="mod">
+          <ac:chgData name="Mann Shah" userId="31d329eb7dfec00a" providerId="LiveId" clId="{1234865F-BA3E-41EE-8C6C-04782AEFA19C}" dt="2026-09-08T22:07:08.758" v="976" actId="1076"/>
+          <ac:spMkLst>
+            <pc:docMk/>
+            <pc:sldMk cId="0" sldId="261"/>
+            <ac:spMk id="21" creationId="{00000000-0000-0000-0000-000000000000}"/>
+          </ac:spMkLst>
+        </pc:spChg>
+        <pc:spChg chg="del">
+          <ac:chgData name="Mann Shah" userId="31d329eb7dfec00a" providerId="LiveId" clId="{1234865F-BA3E-41EE-8C6C-04782AEFA19C}" dt="2026-09-08T22:06:25.541" v="895" actId="478"/>
+          <ac:spMkLst>
+            <pc:docMk/>
+            <pc:sldMk cId="0" sldId="261"/>
+            <ac:spMk id="24" creationId="{00000000-0000-0000-0000-000000000000}"/>
+          </ac:spMkLst>
+        </pc:spChg>
+        <pc:spChg chg="del">
+          <ac:chgData name="Mann Shah" userId="31d329eb7dfec00a" providerId="LiveId" clId="{1234865F-BA3E-41EE-8C6C-04782AEFA19C}" dt="2026-09-08T22:06:21.827" v="894" actId="478"/>
+          <ac:spMkLst>
+            <pc:docMk/>
+            <pc:sldMk cId="0" sldId="261"/>
+            <ac:spMk id="25" creationId="{00000000-0000-0000-0000-000000000000}"/>
+          </ac:spMkLst>
+        </pc:spChg>
+        <pc:spChg chg="add mod">
+          <ac:chgData name="Mann Shah" userId="31d329eb7dfec00a" providerId="LiveId" clId="{1234865F-BA3E-41EE-8C6C-04782AEFA19C}" dt="2026-09-08T22:12:18.409" v="1088" actId="14100"/>
+          <ac:spMkLst>
+            <pc:docMk/>
+            <pc:sldMk cId="0" sldId="261"/>
+            <ac:spMk id="28" creationId="{59136665-B4F5-149C-CED0-C9C0A8C6CC48}"/>
+          </ac:spMkLst>
+        </pc:spChg>
+        <pc:spChg chg="add mod">
+          <ac:chgData name="Mann Shah" userId="31d329eb7dfec00a" providerId="LiveId" clId="{1234865F-BA3E-41EE-8C6C-04782AEFA19C}" dt="2026-09-08T22:07:59.800" v="980" actId="1076"/>
+          <ac:spMkLst>
+            <pc:docMk/>
+            <pc:sldMk cId="0" sldId="261"/>
+            <ac:spMk id="30" creationId="{382A2A92-64C2-A314-536C-022DEF8FF1AA}"/>
+          </ac:spMkLst>
+        </pc:spChg>
+        <pc:spChg chg="add mod">
+          <ac:chgData name="Mann Shah" userId="31d329eb7dfec00a" providerId="LiveId" clId="{1234865F-BA3E-41EE-8C6C-04782AEFA19C}" dt="2026-09-08T22:12:15.921" v="1087" actId="14100"/>
+          <ac:spMkLst>
+            <pc:docMk/>
+            <pc:sldMk cId="0" sldId="261"/>
+            <ac:spMk id="32" creationId="{EE4A2FC0-CE88-232C-A98E-2B13E5C86129}"/>
+          </ac:spMkLst>
+        </pc:spChg>
+        <pc:spChg chg="add mod">
+          <ac:chgData name="Mann Shah" userId="31d329eb7dfec00a" providerId="LiveId" clId="{1234865F-BA3E-41EE-8C6C-04782AEFA19C}" dt="2026-09-08T22:16:45.601" v="1135" actId="14100"/>
+          <ac:spMkLst>
+            <pc:docMk/>
+            <pc:sldMk cId="0" sldId="261"/>
+            <ac:spMk id="34" creationId="{C62259D4-FEE8-94C7-7AD8-10FA929301AB}"/>
+          </ac:spMkLst>
+        </pc:spChg>
+        <pc:spChg chg="add mod">
+          <ac:chgData name="Mann Shah" userId="31d329eb7dfec00a" providerId="LiveId" clId="{1234865F-BA3E-41EE-8C6C-04782AEFA19C}" dt="2026-09-08T22:15:27.054" v="1102" actId="1076"/>
+          <ac:spMkLst>
+            <pc:docMk/>
+            <pc:sldMk cId="0" sldId="261"/>
+            <ac:spMk id="36" creationId="{CCD075B8-0ACF-F7DD-A165-17F2678E5631}"/>
+          </ac:spMkLst>
+        </pc:spChg>
+        <pc:spChg chg="add mod">
+          <ac:chgData name="Mann Shah" userId="31d329eb7dfec00a" providerId="LiveId" clId="{1234865F-BA3E-41EE-8C6C-04782AEFA19C}" dt="2026-09-08T22:15:58.220" v="1131" actId="20577"/>
+          <ac:spMkLst>
+            <pc:docMk/>
+            <pc:sldMk cId="0" sldId="261"/>
+            <ac:spMk id="38" creationId="{6E963FAF-C2C7-DD67-4276-8F573A75A61D}"/>
+          </ac:spMkLst>
+        </pc:spChg>
+        <pc:spChg chg="add del mod">
+          <ac:chgData name="Mann Shah" userId="31d329eb7dfec00a" providerId="LiveId" clId="{1234865F-BA3E-41EE-8C6C-04782AEFA19C}" dt="2026-09-08T22:16:22.890" v="1134"/>
+          <ac:spMkLst>
+            <pc:docMk/>
+            <pc:sldMk cId="0" sldId="261"/>
+            <ac:spMk id="39" creationId="{D99BF010-9947-925F-7C33-7721C439CA93}"/>
+          </ac:spMkLst>
+        </pc:spChg>
+        <pc:graphicFrameChg chg="del mod">
+          <ac:chgData name="Mann Shah" userId="31d329eb7dfec00a" providerId="LiveId" clId="{1234865F-BA3E-41EE-8C6C-04782AEFA19C}" dt="2026-09-08T22:06:57.227" v="972" actId="478"/>
+          <ac:graphicFrameMkLst>
+            <pc:docMk/>
+            <pc:sldMk cId="0" sldId="261"/>
+            <ac:graphicFrameMk id="6" creationId="{00000000-0000-0000-0000-000000000000}"/>
+          </ac:graphicFrameMkLst>
+        </pc:graphicFrameChg>
+      </pc:sldChg>
+      <pc:sldChg chg="addSp delSp modSp mod">
+        <pc:chgData name="Mann Shah" userId="31d329eb7dfec00a" providerId="LiveId" clId="{1234865F-BA3E-41EE-8C6C-04782AEFA19C}" dt="2026-09-08T22:28:36.714" v="1236" actId="20577"/>
+        <pc:sldMkLst>
+          <pc:docMk/>
+          <pc:sldMk cId="0" sldId="265"/>
+        </pc:sldMkLst>
+        <pc:spChg chg="mod">
+          <ac:chgData name="Mann Shah" userId="31d329eb7dfec00a" providerId="LiveId" clId="{1234865F-BA3E-41EE-8C6C-04782AEFA19C}" dt="2026-09-08T22:23:31.130" v="1187" actId="1076"/>
+          <ac:spMkLst>
+            <pc:docMk/>
+            <pc:sldMk cId="0" sldId="265"/>
+            <ac:spMk id="2" creationId="{00000000-0000-0000-0000-000000000000}"/>
+          </ac:spMkLst>
+        </pc:spChg>
+        <pc:spChg chg="del">
+          <ac:chgData name="Mann Shah" userId="31d329eb7dfec00a" providerId="LiveId" clId="{1234865F-BA3E-41EE-8C6C-04782AEFA19C}" dt="2026-09-08T22:19:11.875" v="1136" actId="478"/>
+          <ac:spMkLst>
+            <pc:docMk/>
+            <pc:sldMk cId="0" sldId="265"/>
+            <ac:spMk id="4" creationId="{00000000-0000-0000-0000-000000000000}"/>
+          </ac:spMkLst>
+        </pc:spChg>
+        <pc:spChg chg="mod">
+          <ac:chgData name="Mann Shah" userId="31d329eb7dfec00a" providerId="LiveId" clId="{1234865F-BA3E-41EE-8C6C-04782AEFA19C}" dt="2026-09-08T22:24:52.873" v="1201" actId="1076"/>
+          <ac:spMkLst>
+            <pc:docMk/>
+            <pc:sldMk cId="0" sldId="265"/>
+            <ac:spMk id="7" creationId="{00000000-0000-0000-0000-000000000000}"/>
+          </ac:spMkLst>
+        </pc:spChg>
+        <pc:spChg chg="mod">
+          <ac:chgData name="Mann Shah" userId="31d329eb7dfec00a" providerId="LiveId" clId="{1234865F-BA3E-41EE-8C6C-04782AEFA19C}" dt="2026-09-08T22:24:52.873" v="1201" actId="1076"/>
+          <ac:spMkLst>
+            <pc:docMk/>
+            <pc:sldMk cId="0" sldId="265"/>
+            <ac:spMk id="8" creationId="{00000000-0000-0000-0000-000000000000}"/>
+          </ac:spMkLst>
+        </pc:spChg>
+        <pc:spChg chg="mod">
+          <ac:chgData name="Mann Shah" userId="31d329eb7dfec00a" providerId="LiveId" clId="{1234865F-BA3E-41EE-8C6C-04782AEFA19C}" dt="2026-09-08T22:24:52.873" v="1201" actId="1076"/>
+          <ac:spMkLst>
+            <pc:docMk/>
+            <pc:sldMk cId="0" sldId="265"/>
+            <ac:spMk id="10" creationId="{00000000-0000-0000-0000-000000000000}"/>
+          </ac:spMkLst>
+        </pc:spChg>
+        <pc:spChg chg="mod">
+          <ac:chgData name="Mann Shah" userId="31d329eb7dfec00a" providerId="LiveId" clId="{1234865F-BA3E-41EE-8C6C-04782AEFA19C}" dt="2026-09-08T22:24:52.873" v="1201" actId="1076"/>
+          <ac:spMkLst>
+            <pc:docMk/>
+            <pc:sldMk cId="0" sldId="265"/>
+            <ac:spMk id="12" creationId="{00000000-0000-0000-0000-000000000000}"/>
+          </ac:spMkLst>
+        </pc:spChg>
+        <pc:spChg chg="mod">
+          <ac:chgData name="Mann Shah" userId="31d329eb7dfec00a" providerId="LiveId" clId="{1234865F-BA3E-41EE-8C6C-04782AEFA19C}" dt="2026-09-08T22:24:52.873" v="1201" actId="1076"/>
+          <ac:spMkLst>
+            <pc:docMk/>
+            <pc:sldMk cId="0" sldId="265"/>
+            <ac:spMk id="14" creationId="{00000000-0000-0000-0000-000000000000}"/>
+          </ac:spMkLst>
+        </pc:spChg>
+        <pc:spChg chg="mod">
+          <ac:chgData name="Mann Shah" userId="31d329eb7dfec00a" providerId="LiveId" clId="{1234865F-BA3E-41EE-8C6C-04782AEFA19C}" dt="2026-09-08T22:24:52.873" v="1201" actId="1076"/>
+          <ac:spMkLst>
+            <pc:docMk/>
+            <pc:sldMk cId="0" sldId="265"/>
+            <ac:spMk id="15" creationId="{00000000-0000-0000-0000-000000000000}"/>
+          </ac:spMkLst>
+        </pc:spChg>
+        <pc:spChg chg="mod">
+          <ac:chgData name="Mann Shah" userId="31d329eb7dfec00a" providerId="LiveId" clId="{1234865F-BA3E-41EE-8C6C-04782AEFA19C}" dt="2026-09-08T22:24:52.873" v="1201" actId="1076"/>
+          <ac:spMkLst>
+            <pc:docMk/>
+            <pc:sldMk cId="0" sldId="265"/>
+            <ac:spMk id="18" creationId="{00000000-0000-0000-0000-000000000000}"/>
+          </ac:spMkLst>
+        </pc:spChg>
+        <pc:spChg chg="mod">
+          <ac:chgData name="Mann Shah" userId="31d329eb7dfec00a" providerId="LiveId" clId="{1234865F-BA3E-41EE-8C6C-04782AEFA19C}" dt="2026-09-08T22:24:52.873" v="1201" actId="1076"/>
+          <ac:spMkLst>
+            <pc:docMk/>
+            <pc:sldMk cId="0" sldId="265"/>
+            <ac:spMk id="19" creationId="{00000000-0000-0000-0000-000000000000}"/>
+          </ac:spMkLst>
+        </pc:spChg>
+        <pc:spChg chg="mod">
+          <ac:chgData name="Mann Shah" userId="31d329eb7dfec00a" providerId="LiveId" clId="{1234865F-BA3E-41EE-8C6C-04782AEFA19C}" dt="2026-09-08T22:24:52.873" v="1201" actId="1076"/>
+          <ac:spMkLst>
+            <pc:docMk/>
+            <pc:sldMk cId="0" sldId="265"/>
+            <ac:spMk id="20" creationId="{00000000-0000-0000-0000-000000000000}"/>
+          </ac:spMkLst>
+        </pc:spChg>
+        <pc:spChg chg="mod">
+          <ac:chgData name="Mann Shah" userId="31d329eb7dfec00a" providerId="LiveId" clId="{1234865F-BA3E-41EE-8C6C-04782AEFA19C}" dt="2026-09-08T22:24:52.873" v="1201" actId="1076"/>
+          <ac:spMkLst>
+            <pc:docMk/>
+            <pc:sldMk cId="0" sldId="265"/>
+            <ac:spMk id="21" creationId="{00000000-0000-0000-0000-000000000000}"/>
+          </ac:spMkLst>
+        </pc:spChg>
+        <pc:spChg chg="mod">
+          <ac:chgData name="Mann Shah" userId="31d329eb7dfec00a" providerId="LiveId" clId="{1234865F-BA3E-41EE-8C6C-04782AEFA19C}" dt="2026-09-08T22:28:18.279" v="1235" actId="1076"/>
+          <ac:spMkLst>
+            <pc:docMk/>
+            <pc:sldMk cId="0" sldId="265"/>
+            <ac:spMk id="22" creationId="{00000000-0000-0000-0000-000000000000}"/>
+          </ac:spMkLst>
+        </pc:spChg>
+        <pc:spChg chg="del">
+          <ac:chgData name="Mann Shah" userId="31d329eb7dfec00a" providerId="LiveId" clId="{1234865F-BA3E-41EE-8C6C-04782AEFA19C}" dt="2026-09-08T22:19:34.381" v="1138" actId="478"/>
+          <ac:spMkLst>
+            <pc:docMk/>
+            <pc:sldMk cId="0" sldId="265"/>
+            <ac:spMk id="23" creationId="{00000000-0000-0000-0000-000000000000}"/>
+          </ac:spMkLst>
+        </pc:spChg>
+        <pc:spChg chg="del mod">
+          <ac:chgData name="Mann Shah" userId="31d329eb7dfec00a" providerId="LiveId" clId="{1234865F-BA3E-41EE-8C6C-04782AEFA19C}" dt="2026-09-08T22:20:31.586" v="1144"/>
+          <ac:spMkLst>
+            <pc:docMk/>
+            <pc:sldMk cId="0" sldId="265"/>
+            <ac:spMk id="24" creationId="{00000000-0000-0000-0000-000000000000}"/>
+          </ac:spMkLst>
+        </pc:spChg>
+        <pc:spChg chg="del">
+          <ac:chgData name="Mann Shah" userId="31d329eb7dfec00a" providerId="LiveId" clId="{1234865F-BA3E-41EE-8C6C-04782AEFA19C}" dt="2026-09-08T22:20:31.585" v="1142" actId="478"/>
+          <ac:spMkLst>
+            <pc:docMk/>
+            <pc:sldMk cId="0" sldId="265"/>
+            <ac:spMk id="25" creationId="{00000000-0000-0000-0000-000000000000}"/>
+          </ac:spMkLst>
+        </pc:spChg>
+        <pc:spChg chg="add mod">
+          <ac:chgData name="Mann Shah" userId="31d329eb7dfec00a" providerId="LiveId" clId="{1234865F-BA3E-41EE-8C6C-04782AEFA19C}" dt="2026-09-08T22:28:18.279" v="1235" actId="1076"/>
+          <ac:spMkLst>
+            <pc:docMk/>
+            <pc:sldMk cId="0" sldId="265"/>
+            <ac:spMk id="28" creationId="{729BE792-247F-C6D5-D2A2-93ACFE67ACFF}"/>
+          </ac:spMkLst>
+        </pc:spChg>
+        <pc:spChg chg="add mod">
+          <ac:chgData name="Mann Shah" userId="31d329eb7dfec00a" providerId="LiveId" clId="{1234865F-BA3E-41EE-8C6C-04782AEFA19C}" dt="2026-09-08T22:28:18.279" v="1235" actId="1076"/>
+          <ac:spMkLst>
+            <pc:docMk/>
+            <pc:sldMk cId="0" sldId="265"/>
+            <ac:spMk id="30" creationId="{A18B4C87-D0AB-2FFA-FB37-226C950D6E11}"/>
+          </ac:spMkLst>
+        </pc:spChg>
+        <pc:spChg chg="add mod">
+          <ac:chgData name="Mann Shah" userId="31d329eb7dfec00a" providerId="LiveId" clId="{1234865F-BA3E-41EE-8C6C-04782AEFA19C}" dt="2026-09-08T22:28:18.279" v="1235" actId="1076"/>
+          <ac:spMkLst>
+            <pc:docMk/>
+            <pc:sldMk cId="0" sldId="265"/>
+            <ac:spMk id="32" creationId="{AC7DC121-64B0-1742-0A23-EE3ECEFB9D30}"/>
+          </ac:spMkLst>
+        </pc:spChg>
+        <pc:spChg chg="add mod">
+          <ac:chgData name="Mann Shah" userId="31d329eb7dfec00a" providerId="LiveId" clId="{1234865F-BA3E-41EE-8C6C-04782AEFA19C}" dt="2026-09-08T22:28:18.279" v="1235" actId="1076"/>
+          <ac:spMkLst>
+            <pc:docMk/>
+            <pc:sldMk cId="0" sldId="265"/>
+            <ac:spMk id="34" creationId="{7CEE5440-DDF4-4EE6-D23C-D2C695EC3231}"/>
+          </ac:spMkLst>
+        </pc:spChg>
+        <pc:spChg chg="add mod">
+          <ac:chgData name="Mann Shah" userId="31d329eb7dfec00a" providerId="LiveId" clId="{1234865F-BA3E-41EE-8C6C-04782AEFA19C}" dt="2026-09-08T22:28:36.714" v="1236" actId="20577"/>
+          <ac:spMkLst>
+            <pc:docMk/>
+            <pc:sldMk cId="0" sldId="265"/>
+            <ac:spMk id="36" creationId="{E53410E3-2E95-B1C5-7B8A-18F30180638C}"/>
+          </ac:spMkLst>
+        </pc:spChg>
+        <pc:graphicFrameChg chg="del mod">
+          <ac:chgData name="Mann Shah" userId="31d329eb7dfec00a" providerId="LiveId" clId="{1234865F-BA3E-41EE-8C6C-04782AEFA19C}" dt="2026-09-08T22:24:47.421" v="1200" actId="478"/>
+          <ac:graphicFrameMkLst>
+            <pc:docMk/>
+            <pc:sldMk cId="0" sldId="265"/>
+            <ac:graphicFrameMk id="6" creationId="{00000000-0000-0000-0000-000000000000}"/>
+          </ac:graphicFrameMkLst>
+        </pc:graphicFrameChg>
+      </pc:sldChg>
+      <pc:sldChg chg="modSp mod">
+        <pc:chgData name="Mann Shah" userId="31d329eb7dfec00a" providerId="LiveId" clId="{1234865F-BA3E-41EE-8C6C-04782AEFA19C}" dt="2026-09-08T22:29:44.772" v="1281" actId="14100"/>
+        <pc:sldMkLst>
+          <pc:docMk/>
+          <pc:sldMk cId="0" sldId="266"/>
+        </pc:sldMkLst>
+        <pc:spChg chg="mod">
+          <ac:chgData name="Mann Shah" userId="31d329eb7dfec00a" providerId="LiveId" clId="{1234865F-BA3E-41EE-8C6C-04782AEFA19C}" dt="2026-09-08T22:29:44.772" v="1281" actId="14100"/>
+          <ac:spMkLst>
+            <pc:docMk/>
+            <pc:sldMk cId="0" sldId="266"/>
+            <ac:spMk id="26" creationId="{00000000-0000-0000-0000-000000000000}"/>
+          </ac:spMkLst>
+        </pc:spChg>
+      </pc:sldChg>
+      <pc:sldChg chg="addSp delSp modSp mod">
+        <pc:chgData name="Mann Shah" userId="31d329eb7dfec00a" providerId="LiveId" clId="{1234865F-BA3E-41EE-8C6C-04782AEFA19C}" dt="2026-09-08T22:29:28.733" v="1280" actId="20577"/>
+        <pc:sldMkLst>
+          <pc:docMk/>
+          <pc:sldMk cId="0" sldId="267"/>
+        </pc:sldMkLst>
+        <pc:spChg chg="mod">
+          <ac:chgData name="Mann Shah" userId="31d329eb7dfec00a" providerId="LiveId" clId="{1234865F-BA3E-41EE-8C6C-04782AEFA19C}" dt="2026-09-08T22:29:28.733" v="1280" actId="20577"/>
+          <ac:spMkLst>
+            <pc:docMk/>
+            <pc:sldMk cId="0" sldId="267"/>
+            <ac:spMk id="3" creationId="{00000000-0000-0000-0000-000000000000}"/>
+          </ac:spMkLst>
+        </pc:spChg>
+        <pc:spChg chg="add del">
+          <ac:chgData name="Mann Shah" userId="31d329eb7dfec00a" providerId="LiveId" clId="{1234865F-BA3E-41EE-8C6C-04782AEFA19C}" dt="2026-09-08T22:29:05.819" v="1239" actId="478"/>
+          <ac:spMkLst>
+            <pc:docMk/>
+            <pc:sldMk cId="0" sldId="267"/>
+            <ac:spMk id="6" creationId="{00000000-0000-0000-0000-000000000000}"/>
+          </ac:spMkLst>
+        </pc:spChg>
+        <pc:spChg chg="del mod">
+          <ac:chgData name="Mann Shah" userId="31d329eb7dfec00a" providerId="LiveId" clId="{1234865F-BA3E-41EE-8C6C-04782AEFA19C}" dt="2026-09-08T22:29:06.745" v="1240" actId="478"/>
+          <ac:spMkLst>
+            <pc:docMk/>
+            <pc:sldMk cId="0" sldId="267"/>
+            <ac:spMk id="14" creationId="{00000000-0000-0000-0000-000000000000}"/>
+          </ac:spMkLst>
+        </pc:spChg>
+        <pc:spChg chg="del">
+          <ac:chgData name="Mann Shah" userId="31d329eb7dfec00a" providerId="LiveId" clId="{1234865F-BA3E-41EE-8C6C-04782AEFA19C}" dt="2026-09-08T22:29:12.997" v="1245" actId="478"/>
+          <ac:spMkLst>
+            <pc:docMk/>
+            <pc:sldMk cId="0" sldId="267"/>
+            <ac:spMk id="23" creationId="{00000000-0000-0000-0000-000000000000}"/>
+          </ac:spMkLst>
+        </pc:spChg>
+        <pc:spChg chg="del">
+          <ac:chgData name="Mann Shah" userId="31d329eb7dfec00a" providerId="LiveId" clId="{1234865F-BA3E-41EE-8C6C-04782AEFA19C}" dt="2026-09-08T22:29:08.096" v="1241" actId="478"/>
+          <ac:spMkLst>
+            <pc:docMk/>
+            <pc:sldMk cId="0" sldId="267"/>
+            <ac:spMk id="32" creationId="{00000000-0000-0000-0000-000000000000}"/>
+          </ac:spMkLst>
+        </pc:spChg>
+        <pc:spChg chg="add del">
+          <ac:chgData name="Mann Shah" userId="31d329eb7dfec00a" providerId="LiveId" clId="{1234865F-BA3E-41EE-8C6C-04782AEFA19C}" dt="2026-09-08T22:29:10.484" v="1243" actId="478"/>
+          <ac:spMkLst>
+            <pc:docMk/>
+            <pc:sldMk cId="0" sldId="267"/>
+            <ac:spMk id="33" creationId="{00000000-0000-0000-0000-000000000000}"/>
+          </ac:spMkLst>
+        </pc:spChg>
+        <pc:spChg chg="del">
+          <ac:chgData name="Mann Shah" userId="31d329eb7dfec00a" providerId="LiveId" clId="{1234865F-BA3E-41EE-8C6C-04782AEFA19C}" dt="2026-09-08T22:29:11.806" v="1244" actId="478"/>
+          <ac:spMkLst>
+            <pc:docMk/>
+            <pc:sldMk cId="0" sldId="267"/>
+            <ac:spMk id="39" creationId="{00000000-0000-0000-0000-000000000000}"/>
+          </ac:spMkLst>
+        </pc:spChg>
+      </pc:sldChg>
+    </pc:docChg>
+  </pc:docChgLst>
+</pc:chgInfo>
 </file>
 
-<file path=ppt/charts/chart3.xml><?xml version="1.0" encoding="utf-8"?>
+<file path=ppt/charts/chart1.xml><?xml version="1.0" encoding="utf-8"?>
 <c:chartSpace xmlns:c="http://schemas.openxmlformats.org/drawingml/2006/chart" xmlns:a="http://schemas.openxmlformats.org/drawingml/2006/main" xmlns:r="http://schemas.openxmlformats.org/officeDocument/2006/relationships" xmlns:c16r2="http://schemas.microsoft.com/office/drawing/2015/06/chart">
   <c:date1904 val="0"/>
   <c:lang val="en-US"/>
@@ -734,7 +1369,7 @@
 </c:chartSpace>
 </file>
 
-<file path=ppt/charts/chart4.xml><?xml version="1.0" encoding="utf-8"?>
+<file path=ppt/charts/chart2.xml><?xml version="1.0" encoding="utf-8"?>
 <c:chartSpace xmlns:c="http://schemas.openxmlformats.org/drawingml/2006/chart" xmlns:a="http://schemas.openxmlformats.org/drawingml/2006/main" xmlns:r="http://schemas.openxmlformats.org/officeDocument/2006/relationships" xmlns:c16r2="http://schemas.microsoft.com/office/drawing/2015/06/chart">
   <c:date1904 val="0"/>
   <c:lang val="en-US"/>
@@ -937,114 +1572,7 @@
 </c:chartSpace>
 </file>
 
-<file path=ppt/charts/chart5.xml><?xml version="1.0" encoding="utf-8"?>
-<c:chartSpace xmlns:c="http://schemas.openxmlformats.org/drawingml/2006/chart" xmlns:a="http://schemas.openxmlformats.org/drawingml/2006/main" xmlns:r="http://schemas.openxmlformats.org/officeDocument/2006/relationships" xmlns:c16r2="http://schemas.microsoft.com/office/drawing/2015/06/chart">
-  <c:date1904 val="0"/>
-  <c:lang val="en-US"/>
-  <c:roundedCorners val="0"/>
-  <c:style val="10"/>
-  <c:chart>
-    <c:title>
-      <c:overlay val="0"/>
-    </c:title>
-    <c:autoTitleDeleted val="0"/>
-    <c:plotArea>
-      <c:layout/>
-      <c:doughnutChart>
-        <c:varyColors val="1"/>
-        <c:ser>
-          <c:idx val="0"/>
-          <c:order val="0"/>
-          <c:tx>
-            <c:strRef>
-              <c:f>Sheet1!$B$1</c:f>
-              <c:strCache>
-                <c:ptCount val="1"/>
-                <c:pt idx="0">
-                  <c:v>Customers</c:v>
-                </c:pt>
-              </c:strCache>
-            </c:strRef>
-          </c:tx>
-          <c:cat>
-            <c:strRef>
-              <c:f>Sheet1!$A$2:$A$4</c:f>
-              <c:strCache>
-                <c:ptCount val="3"/>
-                <c:pt idx="0">
-                  <c:v>Loyal</c:v>
-                </c:pt>
-                <c:pt idx="1">
-                  <c:v>Returning</c:v>
-                </c:pt>
-                <c:pt idx="2">
-                  <c:v>New</c:v>
-                </c:pt>
-              </c:strCache>
-            </c:strRef>
-          </c:cat>
-          <c:val>
-            <c:numRef>
-              <c:f>Sheet1!$B$2:$B$4</c:f>
-              <c:numCache>
-                <c:formatCode>General</c:formatCode>
-                <c:ptCount val="3"/>
-                <c:pt idx="0">
-                  <c:v>3116</c:v>
-                </c:pt>
-                <c:pt idx="1">
-                  <c:v>701</c:v>
-                </c:pt>
-                <c:pt idx="2">
-                  <c:v>83</c:v>
-                </c:pt>
-              </c:numCache>
-            </c:numRef>
-          </c:val>
-          <c:extLst>
-            <c:ext xmlns:c16="http://schemas.microsoft.com/office/drawing/2014/chart" uri="{C3380CC4-5D6E-409C-BE32-E72D297353CC}">
-              <c16:uniqueId val="{00000000-0429-4FA1-8339-D049E4DC293A}"/>
-            </c:ext>
-          </c:extLst>
-        </c:ser>
-        <c:dLbls>
-          <c:showLegendKey val="0"/>
-          <c:showVal val="0"/>
-          <c:showCatName val="0"/>
-          <c:showSerName val="0"/>
-          <c:showPercent val="0"/>
-          <c:showBubbleSize val="0"/>
-          <c:showLeaderLines val="1"/>
-        </c:dLbls>
-        <c:firstSliceAng val="0"/>
-        <c:holeSize val="50"/>
-      </c:doughnutChart>
-    </c:plotArea>
-    <c:legend>
-      <c:legendPos val="b"/>
-      <c:overlay val="0"/>
-    </c:legend>
-    <c:plotVisOnly val="1"/>
-    <c:dispBlanksAs val="gap"/>
-    <c:showDLblsOverMax val="0"/>
-  </c:chart>
-  <c:txPr>
-    <a:bodyPr/>
-    <a:lstStyle/>
-    <a:p>
-      <a:pPr>
-        <a:defRPr sz="1800"/>
-      </a:pPr>
-      <a:endParaRPr lang="en-US"/>
-    </a:p>
-  </c:txPr>
-  <c:externalData r:id="rId1">
-    <c:autoUpdate val="0"/>
-  </c:externalData>
-</c:chartSpace>
-</file>
-
-<file path=ppt/charts/chart6.xml><?xml version="1.0" encoding="utf-8"?>
+<file path=ppt/charts/chart3.xml><?xml version="1.0" encoding="utf-8"?>
 <c:chartSpace xmlns:c="http://schemas.openxmlformats.org/drawingml/2006/chart" xmlns:a="http://schemas.openxmlformats.org/drawingml/2006/main" xmlns:r="http://schemas.openxmlformats.org/officeDocument/2006/relationships" xmlns:c16r2="http://schemas.microsoft.com/office/drawing/2015/06/chart">
   <c:date1904 val="0"/>
   <c:lang val="en-US"/>
@@ -4764,48 +5292,13 @@
           <a:p>
             <a:pPr algn="l"/>
             <a:r>
-              <a:rPr sz="2800" b="1">
+              <a:rPr sz="2800" b="1" dirty="0">
                 <a:solidFill>
                   <a:srgbClr val="141F31"/>
                 </a:solidFill>
                 <a:latin typeface="Aptos"/>
               </a:rPr>
               <a:t>The customer base is dominated by loyal shoppers</a:t>
-            </a:r>
-          </a:p>
-        </p:txBody>
-      </p:sp>
-      <p:sp>
-        <p:nvSpPr>
-          <p:cNvPr id="4" name="TextBox 3"/>
-          <p:cNvSpPr txBox="1"/>
-          <p:nvPr/>
-        </p:nvSpPr>
-        <p:spPr>
-          <a:xfrm>
-            <a:off x="658368" y="1033271"/>
-            <a:ext cx="10424160" cy="384048"/>
-          </a:xfrm>
-          <a:prstGeom prst="rect">
-            <a:avLst/>
-          </a:prstGeom>
-          <a:noFill/>
-        </p:spPr>
-        <p:txBody>
-          <a:bodyPr wrap="square" anchor="t">
-            <a:spAutoFit/>
-          </a:bodyPr>
-          <a:lstStyle/>
-          <a:p>
-            <a:pPr algn="l"/>
-            <a:r>
-              <a:rPr sz="1250" b="0">
-                <a:solidFill>
-                  <a:srgbClr val="64748B"/>
-                </a:solidFill>
-                <a:latin typeface="Aptos"/>
-              </a:rPr>
-              <a:t>3,116 customers are loyal, 701 returning and only 83 new.</a:t>
             </a:r>
           </a:p>
         </p:txBody>
@@ -4845,24 +5338,6 @@
           </a:p>
         </p:txBody>
       </p:sp>
-      <p:graphicFrame>
-        <p:nvGraphicFramePr>
-          <p:cNvPr id="6" name="Chart 5"/>
-          <p:cNvGraphicFramePr>
-            <a:graphicFrameLocks noGrp="1"/>
-          </p:cNvGraphicFramePr>
-          <p:nvPr/>
-        </p:nvGraphicFramePr>
-        <p:xfrm>
-          <a:off x="685800" y="1508760"/>
-          <a:ext cx="4754880" cy="4297680"/>
-        </p:xfrm>
-        <a:graphic>
-          <a:graphicData uri="http://schemas.openxmlformats.org/drawingml/2006/chart">
-            <c:chart xmlns:c="http://schemas.openxmlformats.org/drawingml/2006/chart" xmlns:r="http://schemas.openxmlformats.org/officeDocument/2006/relationships" r:id="rId2"/>
-          </a:graphicData>
-        </a:graphic>
-      </p:graphicFrame>
       <p:sp>
         <p:nvSpPr>
           <p:cNvPr id="7" name="Rounded Rectangle 6"/>
@@ -4871,7 +5346,7 @@
         </p:nvSpPr>
         <p:spPr>
           <a:xfrm>
-            <a:off x="5715000" y="1554480"/>
+            <a:off x="720213" y="1307593"/>
             <a:ext cx="1828800" cy="1078992"/>
           </a:xfrm>
           <a:prstGeom prst="roundRect">
@@ -4917,7 +5392,7 @@
         </p:nvSpPr>
         <p:spPr>
           <a:xfrm>
-            <a:off x="5879592" y="1691639"/>
+            <a:off x="884805" y="1444752"/>
             <a:ext cx="1499616" cy="182880"/>
           </a:xfrm>
           <a:prstGeom prst="rect">
@@ -4952,7 +5427,7 @@
         </p:nvSpPr>
         <p:spPr>
           <a:xfrm>
-            <a:off x="5879592" y="1911095"/>
+            <a:off x="884805" y="1664208"/>
             <a:ext cx="1499616" cy="393192"/>
           </a:xfrm>
           <a:prstGeom prst="rect">
@@ -4987,7 +5462,7 @@
         </p:nvSpPr>
         <p:spPr>
           <a:xfrm>
-            <a:off x="5879592" y="2350008"/>
+            <a:off x="884805" y="2103121"/>
             <a:ext cx="1499616" cy="182880"/>
           </a:xfrm>
           <a:prstGeom prst="rect">
@@ -5022,7 +5497,7 @@
         </p:nvSpPr>
         <p:spPr>
           <a:xfrm>
-            <a:off x="5715000" y="1554480"/>
+            <a:off x="720213" y="1307593"/>
             <a:ext cx="50292" cy="1078992"/>
           </a:xfrm>
           <a:prstGeom prst="rect">
@@ -5066,7 +5541,7 @@
         </p:nvSpPr>
         <p:spPr>
           <a:xfrm>
-            <a:off x="7726679" y="1554480"/>
+            <a:off x="2731892" y="1307593"/>
             <a:ext cx="1828800" cy="1078992"/>
           </a:xfrm>
           <a:prstGeom prst="roundRect">
@@ -5112,7 +5587,7 @@
         </p:nvSpPr>
         <p:spPr>
           <a:xfrm>
-            <a:off x="7891271" y="1691639"/>
+            <a:off x="2896484" y="1444752"/>
             <a:ext cx="1499616" cy="182880"/>
           </a:xfrm>
           <a:prstGeom prst="rect">
@@ -5147,7 +5622,7 @@
         </p:nvSpPr>
         <p:spPr>
           <a:xfrm>
-            <a:off x="7891271" y="1911095"/>
+            <a:off x="2896484" y="1664208"/>
             <a:ext cx="1499616" cy="393192"/>
           </a:xfrm>
           <a:prstGeom prst="rect">
@@ -5182,7 +5657,7 @@
         </p:nvSpPr>
         <p:spPr>
           <a:xfrm>
-            <a:off x="7891271" y="2350008"/>
+            <a:off x="2896484" y="2103121"/>
             <a:ext cx="1499616" cy="182880"/>
           </a:xfrm>
           <a:prstGeom prst="rect">
@@ -5217,7 +5692,7 @@
         </p:nvSpPr>
         <p:spPr>
           <a:xfrm>
-            <a:off x="7726679" y="1554480"/>
+            <a:off x="2731892" y="1307593"/>
             <a:ext cx="50292" cy="1078992"/>
           </a:xfrm>
           <a:prstGeom prst="rect">
@@ -5261,7 +5736,7 @@
         </p:nvSpPr>
         <p:spPr>
           <a:xfrm>
-            <a:off x="9738360" y="1554480"/>
+            <a:off x="4743573" y="1307593"/>
             <a:ext cx="1828800" cy="1078992"/>
           </a:xfrm>
           <a:prstGeom prst="roundRect">
@@ -5307,7 +5782,7 @@
         </p:nvSpPr>
         <p:spPr>
           <a:xfrm>
-            <a:off x="9902952" y="1691639"/>
+            <a:off x="4908165" y="1444752"/>
             <a:ext cx="1499616" cy="182880"/>
           </a:xfrm>
           <a:prstGeom prst="rect">
@@ -5342,7 +5817,7 @@
         </p:nvSpPr>
         <p:spPr>
           <a:xfrm>
-            <a:off x="9902952" y="1911095"/>
+            <a:off x="4908165" y="1664208"/>
             <a:ext cx="1499616" cy="393192"/>
           </a:xfrm>
           <a:prstGeom prst="rect">
@@ -5377,7 +5852,7 @@
         </p:nvSpPr>
         <p:spPr>
           <a:xfrm>
-            <a:off x="9902952" y="2350008"/>
+            <a:off x="4908165" y="2103121"/>
             <a:ext cx="1499616" cy="182880"/>
           </a:xfrm>
           <a:prstGeom prst="rect">
@@ -5412,7 +5887,7 @@
         </p:nvSpPr>
         <p:spPr>
           <a:xfrm>
-            <a:off x="9738360" y="1554480"/>
+            <a:off x="4743573" y="1307593"/>
             <a:ext cx="50292" cy="1078992"/>
           </a:xfrm>
           <a:prstGeom prst="rect">
@@ -5456,8 +5931,8 @@
         </p:nvSpPr>
         <p:spPr>
           <a:xfrm>
-            <a:off x="5715000" y="2971800"/>
-            <a:ext cx="5623560" cy="2468880"/>
+            <a:off x="699468" y="2921471"/>
+            <a:ext cx="5623560" cy="2966884"/>
           </a:xfrm>
           <a:prstGeom prst="roundRect">
             <a:avLst/>
@@ -5496,111 +5971,6 @@
       </p:sp>
       <p:sp>
         <p:nvSpPr>
-          <p:cNvPr id="23" name="TextBox 22"/>
-          <p:cNvSpPr txBox="1"/>
-          <p:nvPr/>
-        </p:nvSpPr>
-        <p:spPr>
-          <a:xfrm>
-            <a:off x="5989320" y="3273552"/>
-            <a:ext cx="2194560" cy="228600"/>
-          </a:xfrm>
-          <a:prstGeom prst="rect">
-            <a:avLst/>
-          </a:prstGeom>
-          <a:noFill/>
-        </p:spPr>
-        <p:txBody>
-          <a:bodyPr wrap="square" anchor="t">
-            <a:spAutoFit/>
-          </a:bodyPr>
-          <a:lstStyle/>
-          <a:p>
-            <a:pPr algn="l"/>
-            <a:r>
-              <a:rPr sz="900" b="1">
-                <a:solidFill>
-                  <a:srgbClr val="2A64AA"/>
-                </a:solidFill>
-                <a:latin typeface="Aptos"/>
-              </a:rPr>
-              <a:t>THE STRATEGIC TENSION</a:t>
-            </a:r>
-          </a:p>
-        </p:txBody>
-      </p:sp>
-      <p:sp>
-        <p:nvSpPr>
-          <p:cNvPr id="24" name="TextBox 23"/>
-          <p:cNvSpPr txBox="1"/>
-          <p:nvPr/>
-        </p:nvSpPr>
-        <p:spPr>
-          <a:xfrm>
-            <a:off x="5989320" y="3675887"/>
-            <a:ext cx="4754880" cy="640080"/>
-          </a:xfrm>
-          <a:prstGeom prst="rect">
-            <a:avLst/>
-          </a:prstGeom>
-          <a:noFill/>
-        </p:spPr>
-        <p:txBody>
-          <a:bodyPr wrap="square" anchor="t">
-            <a:spAutoFit/>
-          </a:bodyPr>
-          <a:lstStyle/>
-          <a:p>
-            <a:pPr algn="l"/>
-            <a:r>
-              <a:rPr sz="1900" b="1">
-                <a:solidFill>
-                  <a:srgbClr val="141F31"/>
-                </a:solidFill>
-                <a:latin typeface="Aptos"/>
-              </a:rPr>
-              <a:t>Retention looks healthy — acquisition may be the bottleneck.</a:t>
-            </a:r>
-          </a:p>
-        </p:txBody>
-      </p:sp>
-      <p:sp>
-        <p:nvSpPr>
-          <p:cNvPr id="25" name="TextBox 24"/>
-          <p:cNvSpPr txBox="1"/>
-          <p:nvPr/>
-        </p:nvSpPr>
-        <p:spPr>
-          <a:xfrm>
-            <a:off x="5989320" y="4498848"/>
-            <a:ext cx="4663440" cy="548640"/>
-          </a:xfrm>
-          <a:prstGeom prst="rect">
-            <a:avLst/>
-          </a:prstGeom>
-          <a:noFill/>
-        </p:spPr>
-        <p:txBody>
-          <a:bodyPr wrap="square" anchor="t">
-            <a:spAutoFit/>
-          </a:bodyPr>
-          <a:lstStyle/>
-          <a:p>
-            <a:pPr algn="l"/>
-            <a:r>
-              <a:rPr sz="1050" b="0">
-                <a:solidFill>
-                  <a:srgbClr val="64748B"/>
-                </a:solidFill>
-                <a:latin typeface="Aptos"/>
-              </a:rPr>
-              <a:t>Protect loyal customers while building a stronger top-of-funnel engine. Measure new-customer conversion into returning status.</a:t>
-            </a:r>
-          </a:p>
-        </p:txBody>
-      </p:sp>
-      <p:sp>
-        <p:nvSpPr>
           <p:cNvPr id="27" name="TextBox 26"/>
           <p:cNvSpPr txBox="1"/>
           <p:nvPr/>
@@ -5631,6 +6001,378 @@
               </a:rPr>
               <a:t>10</a:t>
             </a:r>
+          </a:p>
+        </p:txBody>
+      </p:sp>
+      <p:sp>
+        <p:nvSpPr>
+          <p:cNvPr id="28" name="TextBox 27">
+            <a:extLst>
+              <a:ext uri="{FF2B5EF4-FFF2-40B4-BE49-F238E27FC236}">
+                <a16:creationId xmlns:a16="http://schemas.microsoft.com/office/drawing/2014/main" id="{729BE792-247F-C6D5-D2A2-93ACFE67ACFF}"/>
+              </a:ext>
+            </a:extLst>
+          </p:cNvPr>
+          <p:cNvSpPr txBox="1"/>
+          <p:nvPr/>
+        </p:nvSpPr>
+        <p:spPr>
+          <a:xfrm>
+            <a:off x="882347" y="3232477"/>
+            <a:ext cx="1828800" cy="292388"/>
+          </a:xfrm>
+          <a:prstGeom prst="rect">
+            <a:avLst/>
+          </a:prstGeom>
+          <a:noFill/>
+        </p:spPr>
+        <p:txBody>
+          <a:bodyPr wrap="square" anchor="t">
+            <a:spAutoFit/>
+          </a:bodyPr>
+          <a:lstStyle/>
+          <a:p>
+            <a:pPr algn="l"/>
+            <a:r>
+              <a:rPr sz="1300" b="1" dirty="0">
+                <a:solidFill>
+                  <a:srgbClr val="2A64AA"/>
+                </a:solidFill>
+                <a:latin typeface="Aptos"/>
+              </a:rPr>
+              <a:t>WHAT IT MEANS</a:t>
+            </a:r>
+          </a:p>
+        </p:txBody>
+      </p:sp>
+      <p:sp>
+        <p:nvSpPr>
+          <p:cNvPr id="30" name="TextBox 29">
+            <a:extLst>
+              <a:ext uri="{FF2B5EF4-FFF2-40B4-BE49-F238E27FC236}">
+                <a16:creationId xmlns:a16="http://schemas.microsoft.com/office/drawing/2014/main" id="{A18B4C87-D0AB-2FFA-FB37-226C950D6E11}"/>
+              </a:ext>
+            </a:extLst>
+          </p:cNvPr>
+          <p:cNvSpPr txBox="1"/>
+          <p:nvPr/>
+        </p:nvSpPr>
+        <p:spPr>
+          <a:xfrm>
+            <a:off x="864060" y="3679967"/>
+            <a:ext cx="5522976" cy="2472472"/>
+          </a:xfrm>
+          <a:prstGeom prst="rect">
+            <a:avLst/>
+          </a:prstGeom>
+          <a:noFill/>
+        </p:spPr>
+        <p:txBody>
+          <a:bodyPr wrap="square">
+            <a:spAutoFit/>
+          </a:bodyPr>
+          <a:lstStyle/>
+          <a:p>
+            <a:pPr marL="285750" indent="-285750">
+              <a:spcAft>
+                <a:spcPts val="800"/>
+              </a:spcAft>
+              <a:buFont typeface="Arial" panose="020B0604020202020204" pitchFamily="34" charset="0"/>
+              <a:buChar char="•"/>
+              <a:defRPr sz="1050">
+                <a:solidFill>
+                  <a:srgbClr val="1F2937"/>
+                </a:solidFill>
+                <a:latin typeface="Aptos"/>
+              </a:defRPr>
+            </a:pPr>
+            <a:r>
+              <a:rPr lang="en-US" sz="1600" dirty="0"/>
+              <a:t>Retention looks healthy but acquisition may be the bottleneck</a:t>
+            </a:r>
+          </a:p>
+          <a:p>
+            <a:pPr marL="285750" indent="-285750">
+              <a:spcAft>
+                <a:spcPts val="800"/>
+              </a:spcAft>
+              <a:buFont typeface="Arial" panose="020B0604020202020204" pitchFamily="34" charset="0"/>
+              <a:buChar char="•"/>
+              <a:defRPr sz="1050">
+                <a:solidFill>
+                  <a:srgbClr val="1F2937"/>
+                </a:solidFill>
+                <a:latin typeface="Aptos"/>
+              </a:defRPr>
+            </a:pPr>
+            <a:r>
+              <a:rPr lang="en-US" sz="1600" dirty="0"/>
+              <a:t>The business may be heavily dependent on its existing customer base</a:t>
+            </a:r>
+          </a:p>
+          <a:p>
+            <a:pPr marL="285750" indent="-285750">
+              <a:spcAft>
+                <a:spcPts val="800"/>
+              </a:spcAft>
+              <a:buFont typeface="Arial" panose="020B0604020202020204" pitchFamily="34" charset="0"/>
+              <a:buChar char="•"/>
+              <a:defRPr sz="1050">
+                <a:solidFill>
+                  <a:srgbClr val="1F2937"/>
+                </a:solidFill>
+                <a:latin typeface="Aptos"/>
+              </a:defRPr>
+            </a:pPr>
+            <a:r>
+              <a:rPr lang="en-US" sz="1600" dirty="0"/>
+              <a:t>Potential growth opportunity lies with returning customers</a:t>
+            </a:r>
+          </a:p>
+          <a:p>
+            <a:pPr marL="285750" indent="-285750">
+              <a:spcAft>
+                <a:spcPts val="800"/>
+              </a:spcAft>
+              <a:buFont typeface="Arial" panose="020B0604020202020204" pitchFamily="34" charset="0"/>
+              <a:buChar char="•"/>
+              <a:defRPr sz="1050">
+                <a:solidFill>
+                  <a:srgbClr val="1F2937"/>
+                </a:solidFill>
+                <a:latin typeface="Aptos"/>
+              </a:defRPr>
+            </a:pPr>
+            <a:endParaRPr lang="en-US" sz="1600" dirty="0"/>
+          </a:p>
+          <a:p>
+            <a:pPr marL="285750" indent="-285750">
+              <a:spcAft>
+                <a:spcPts val="800"/>
+              </a:spcAft>
+              <a:buFont typeface="Arial" panose="020B0604020202020204" pitchFamily="34" charset="0"/>
+              <a:buChar char="•"/>
+              <a:defRPr sz="1050">
+                <a:solidFill>
+                  <a:srgbClr val="1F2937"/>
+                </a:solidFill>
+                <a:latin typeface="Aptos"/>
+              </a:defRPr>
+            </a:pPr>
+            <a:endParaRPr lang="en-US" sz="1600" dirty="0"/>
+          </a:p>
+        </p:txBody>
+      </p:sp>
+      <p:sp>
+        <p:nvSpPr>
+          <p:cNvPr id="32" name="Rounded Rectangle 24">
+            <a:extLst>
+              <a:ext uri="{FF2B5EF4-FFF2-40B4-BE49-F238E27FC236}">
+                <a16:creationId xmlns:a16="http://schemas.microsoft.com/office/drawing/2014/main" id="{AC7DC121-64B0-1742-0A23-EE3ECEFB9D30}"/>
+              </a:ext>
+            </a:extLst>
+          </p:cNvPr>
+          <p:cNvSpPr/>
+          <p:nvPr/>
+        </p:nvSpPr>
+        <p:spPr>
+          <a:xfrm>
+            <a:off x="6725069" y="2921471"/>
+            <a:ext cx="4750651" cy="2966884"/>
+          </a:xfrm>
+          <a:prstGeom prst="roundRect">
+            <a:avLst/>
+          </a:prstGeom>
+          <a:solidFill>
+            <a:srgbClr val="FFFFFF"/>
+          </a:solidFill>
+          <a:ln w="8890">
+            <a:solidFill>
+              <a:srgbClr val="E1E7EF"/>
+            </a:solidFill>
+          </a:ln>
+        </p:spPr>
+        <p:style>
+          <a:lnRef idx="1">
+            <a:schemeClr val="accent1"/>
+          </a:lnRef>
+          <a:fillRef idx="3">
+            <a:schemeClr val="accent1"/>
+          </a:fillRef>
+          <a:effectRef idx="2">
+            <a:schemeClr val="accent1"/>
+          </a:effectRef>
+          <a:fontRef idx="minor">
+            <a:schemeClr val="lt1"/>
+          </a:fontRef>
+        </p:style>
+        <p:txBody>
+          <a:bodyPr rtlCol="0" anchor="ctr"/>
+          <a:lstStyle/>
+          <a:p>
+            <a:pPr algn="ctr"/>
+            <a:endParaRPr/>
+          </a:p>
+        </p:txBody>
+      </p:sp>
+      <p:sp>
+        <p:nvSpPr>
+          <p:cNvPr id="34" name="TextBox 33">
+            <a:extLst>
+              <a:ext uri="{FF2B5EF4-FFF2-40B4-BE49-F238E27FC236}">
+                <a16:creationId xmlns:a16="http://schemas.microsoft.com/office/drawing/2014/main" id="{7CEE5440-DDF4-4EE6-D23C-D2C695EC3231}"/>
+              </a:ext>
+            </a:extLst>
+          </p:cNvPr>
+          <p:cNvSpPr txBox="1"/>
+          <p:nvPr/>
+        </p:nvSpPr>
+        <p:spPr>
+          <a:xfrm>
+            <a:off x="6891530" y="3155533"/>
+            <a:ext cx="2631608" cy="369332"/>
+          </a:xfrm>
+          <a:prstGeom prst="rect">
+            <a:avLst/>
+          </a:prstGeom>
+          <a:noFill/>
+        </p:spPr>
+        <p:txBody>
+          <a:bodyPr wrap="square" anchor="t">
+            <a:spAutoFit/>
+          </a:bodyPr>
+          <a:lstStyle/>
+          <a:p>
+            <a:pPr algn="l"/>
+            <a:r>
+              <a:rPr lang="en-GB" b="1" dirty="0">
+                <a:solidFill>
+                  <a:srgbClr val="1F8584"/>
+                </a:solidFill>
+                <a:latin typeface="Aptos"/>
+              </a:rPr>
+              <a:t>Recommendation</a:t>
+            </a:r>
+            <a:endParaRPr b="1" dirty="0">
+              <a:solidFill>
+                <a:srgbClr val="1F8584"/>
+              </a:solidFill>
+              <a:latin typeface="Aptos"/>
+            </a:endParaRPr>
+          </a:p>
+        </p:txBody>
+      </p:sp>
+      <p:sp>
+        <p:nvSpPr>
+          <p:cNvPr id="36" name="TextBox 35">
+            <a:extLst>
+              <a:ext uri="{FF2B5EF4-FFF2-40B4-BE49-F238E27FC236}">
+                <a16:creationId xmlns:a16="http://schemas.microsoft.com/office/drawing/2014/main" id="{E53410E3-2E95-B1C5-7B8A-18F30180638C}"/>
+              </a:ext>
+            </a:extLst>
+          </p:cNvPr>
+          <p:cNvSpPr txBox="1"/>
+          <p:nvPr/>
+        </p:nvSpPr>
+        <p:spPr>
+          <a:xfrm>
+            <a:off x="6891531" y="3560349"/>
+            <a:ext cx="4453664" cy="2462213"/>
+          </a:xfrm>
+          <a:prstGeom prst="rect">
+            <a:avLst/>
+          </a:prstGeom>
+          <a:noFill/>
+        </p:spPr>
+        <p:txBody>
+          <a:bodyPr wrap="square" anchor="t">
+            <a:spAutoFit/>
+          </a:bodyPr>
+          <a:lstStyle/>
+          <a:p>
+            <a:pPr marL="285750" indent="-285750">
+              <a:buFont typeface="Arial" panose="020B0604020202020204" pitchFamily="34" charset="0"/>
+              <a:buChar char="•"/>
+            </a:pPr>
+            <a:r>
+              <a:rPr lang="en-US" sz="1400" b="1" dirty="0">
+                <a:solidFill>
+                  <a:srgbClr val="141F31"/>
+                </a:solidFill>
+                <a:latin typeface="Aptos"/>
+              </a:rPr>
+              <a:t>Invest in acquisition channels such as social media advertising, and first-purchase incentives to broaden the customer base.</a:t>
+            </a:r>
+          </a:p>
+          <a:p>
+            <a:endParaRPr lang="en-US" sz="1400" b="1" dirty="0">
+              <a:solidFill>
+                <a:srgbClr val="141F31"/>
+              </a:solidFill>
+              <a:latin typeface="Aptos"/>
+            </a:endParaRPr>
+          </a:p>
+          <a:p>
+            <a:pPr marL="285750" indent="-285750">
+              <a:buFont typeface="Arial" panose="020B0604020202020204" pitchFamily="34" charset="0"/>
+              <a:buChar char="•"/>
+            </a:pPr>
+            <a:r>
+              <a:rPr lang="en-US" sz="1400" b="1" dirty="0">
+                <a:solidFill>
+                  <a:srgbClr val="141F31"/>
+                </a:solidFill>
+                <a:latin typeface="Aptos"/>
+              </a:rPr>
+              <a:t>Create personalised offers and loyalty incentives designed for returning customers</a:t>
+            </a:r>
+          </a:p>
+          <a:p>
+            <a:endParaRPr lang="en-US" sz="1400" b="1" dirty="0">
+              <a:solidFill>
+                <a:srgbClr val="141F31"/>
+              </a:solidFill>
+              <a:latin typeface="Aptos"/>
+            </a:endParaRPr>
+          </a:p>
+          <a:p>
+            <a:pPr marL="285750" indent="-285750">
+              <a:buFont typeface="Arial" panose="020B0604020202020204" pitchFamily="34" charset="0"/>
+              <a:buChar char="•"/>
+            </a:pPr>
+            <a:r>
+              <a:rPr lang="en-US" sz="1400" b="1" dirty="0">
+                <a:solidFill>
+                  <a:srgbClr val="141F31"/>
+                </a:solidFill>
+                <a:latin typeface="Aptos"/>
+              </a:rPr>
+              <a:t>Create a referral programme by leveraging the large loyal customer base</a:t>
+            </a:r>
+          </a:p>
+          <a:p>
+            <a:pPr marL="285750" indent="-285750">
+              <a:buFont typeface="Arial" panose="020B0604020202020204" pitchFamily="34" charset="0"/>
+              <a:buChar char="•"/>
+            </a:pPr>
+            <a:endParaRPr lang="en-US" sz="1400" b="1" dirty="0">
+              <a:solidFill>
+                <a:srgbClr val="141F31"/>
+              </a:solidFill>
+              <a:latin typeface="Aptos"/>
+            </a:endParaRPr>
+          </a:p>
+          <a:p>
+            <a:pPr marL="285750" indent="-285750">
+              <a:buFont typeface="Arial" panose="020B0604020202020204" pitchFamily="34" charset="0"/>
+              <a:buChar char="•"/>
+            </a:pPr>
+            <a:endParaRPr sz="1400" b="1" dirty="0">
+              <a:solidFill>
+                <a:srgbClr val="141F31"/>
+              </a:solidFill>
+              <a:latin typeface="Aptos"/>
+            </a:endParaRPr>
           </a:p>
         </p:txBody>
       </p:sp>
@@ -6608,7 +7350,7 @@
         <p:spPr>
           <a:xfrm>
             <a:off x="1024128" y="3730752"/>
-            <a:ext cx="4572000" cy="438912"/>
+            <a:ext cx="5266944" cy="415498"/>
           </a:xfrm>
           <a:prstGeom prst="rect">
             <a:avLst/>
@@ -6623,7 +7365,7 @@
           <a:p>
             <a:pPr algn="l"/>
             <a:r>
-              <a:rPr sz="2100" b="1">
+              <a:rPr sz="2100" b="1" dirty="0">
                 <a:solidFill>
                   <a:srgbClr val="141F31"/>
                 </a:solidFill>
@@ -6658,7 +7400,7 @@
           <a:p>
             <a:pPr algn="l"/>
             <a:r>
-              <a:rPr sz="1100" b="0">
+              <a:rPr sz="1100" b="0" dirty="0">
                 <a:solidFill>
                   <a:srgbClr val="64748B"/>
                 </a:solidFill>
@@ -6782,7 +7524,7 @@
         <p:spPr>
           <a:xfrm>
             <a:off x="640080" y="438912"/>
-            <a:ext cx="10698480" cy="566928"/>
+            <a:ext cx="10698480" cy="523220"/>
           </a:xfrm>
           <a:prstGeom prst="rect">
             <a:avLst/>
@@ -6797,14 +7539,20 @@
           <a:p>
             <a:pPr algn="l"/>
             <a:r>
-              <a:rPr sz="2800" b="1">
+              <a:rPr lang="en-GB" sz="2800" b="1" dirty="0">
                 <a:solidFill>
                   <a:srgbClr val="141F31"/>
                 </a:solidFill>
                 <a:latin typeface="Aptos"/>
               </a:rPr>
-              <a:t>A focused product set drives each category</a:t>
-            </a:r>
+              <a:t>Top 3 best sellers of each category</a:t>
+            </a:r>
+            <a:endParaRPr sz="2800" b="1" dirty="0">
+              <a:solidFill>
+                <a:srgbClr val="141F31"/>
+              </a:solidFill>
+              <a:latin typeface="Aptos"/>
+            </a:endParaRPr>
           </a:p>
         </p:txBody>
       </p:sp>
@@ -6832,7 +7580,7 @@
           <a:p>
             <a:pPr algn="l"/>
             <a:r>
-              <a:rPr sz="1250" b="0">
+              <a:rPr sz="1250" b="0" dirty="0">
                 <a:solidFill>
                   <a:srgbClr val="64748B"/>
                 </a:solidFill>
@@ -7171,41 +7919,6 @@
       </p:sp>
       <p:sp>
         <p:nvSpPr>
-          <p:cNvPr id="14" name="TextBox 13"/>
-          <p:cNvSpPr txBox="1"/>
-          <p:nvPr/>
-        </p:nvSpPr>
-        <p:spPr>
-          <a:xfrm>
-            <a:off x="3474720" y="3017520"/>
-            <a:ext cx="1965960" cy="201168"/>
-          </a:xfrm>
-          <a:prstGeom prst="rect">
-            <a:avLst/>
-          </a:prstGeom>
-          <a:noFill/>
-        </p:spPr>
-        <p:txBody>
-          <a:bodyPr wrap="square" anchor="t">
-            <a:spAutoFit/>
-          </a:bodyPr>
-          <a:lstStyle/>
-          <a:p>
-            <a:pPr algn="r"/>
-            <a:r>
-              <a:rPr sz="750" b="1">
-                <a:solidFill>
-                  <a:srgbClr val="64748B"/>
-                </a:solidFill>
-                <a:latin typeface="Aptos"/>
-              </a:rPr>
-              <a:t>INVENTORY • CROSS-SELL • PROMOTION</a:t>
-            </a:r>
-          </a:p>
-        </p:txBody>
-      </p:sp>
-      <p:sp>
-        <p:nvSpPr>
           <p:cNvPr id="15" name="Rounded Rectangle 14"/>
           <p:cNvSpPr/>
           <p:nvPr/>
@@ -7497,41 +8210,6 @@
       </p:sp>
       <p:sp>
         <p:nvSpPr>
-          <p:cNvPr id="23" name="TextBox 22"/>
-          <p:cNvSpPr txBox="1"/>
-          <p:nvPr/>
-        </p:nvSpPr>
-        <p:spPr>
-          <a:xfrm>
-            <a:off x="9052559" y="3017520"/>
-            <a:ext cx="1965960" cy="201168"/>
-          </a:xfrm>
-          <a:prstGeom prst="rect">
-            <a:avLst/>
-          </a:prstGeom>
-          <a:noFill/>
-        </p:spPr>
-        <p:txBody>
-          <a:bodyPr wrap="square" anchor="t">
-            <a:spAutoFit/>
-          </a:bodyPr>
-          <a:lstStyle/>
-          <a:p>
-            <a:pPr algn="r"/>
-            <a:r>
-              <a:rPr sz="750" b="1">
-                <a:solidFill>
-                  <a:srgbClr val="64748B"/>
-                </a:solidFill>
-                <a:latin typeface="Aptos"/>
-              </a:rPr>
-              <a:t>INVENTORY • CROSS-SELL • PROMOTION</a:t>
-            </a:r>
-          </a:p>
-        </p:txBody>
-      </p:sp>
-      <p:sp>
-        <p:nvSpPr>
           <p:cNvPr id="24" name="Rounded Rectangle 23"/>
           <p:cNvSpPr/>
           <p:nvPr/>
@@ -7823,41 +8501,6 @@
       </p:sp>
       <p:sp>
         <p:nvSpPr>
-          <p:cNvPr id="32" name="TextBox 31"/>
-          <p:cNvSpPr txBox="1"/>
-          <p:nvPr/>
-        </p:nvSpPr>
-        <p:spPr>
-          <a:xfrm>
-            <a:off x="3474720" y="5349240"/>
-            <a:ext cx="1965960" cy="201168"/>
-          </a:xfrm>
-          <a:prstGeom prst="rect">
-            <a:avLst/>
-          </a:prstGeom>
-          <a:noFill/>
-        </p:spPr>
-        <p:txBody>
-          <a:bodyPr wrap="square" anchor="t">
-            <a:spAutoFit/>
-          </a:bodyPr>
-          <a:lstStyle/>
-          <a:p>
-            <a:pPr algn="r"/>
-            <a:r>
-              <a:rPr sz="750" b="1">
-                <a:solidFill>
-                  <a:srgbClr val="64748B"/>
-                </a:solidFill>
-                <a:latin typeface="Aptos"/>
-              </a:rPr>
-              <a:t>INVENTORY • CROSS-SELL • PROMOTION</a:t>
-            </a:r>
-          </a:p>
-        </p:txBody>
-      </p:sp>
-      <p:sp>
-        <p:nvSpPr>
           <p:cNvPr id="33" name="Rounded Rectangle 32"/>
           <p:cNvSpPr/>
           <p:nvPr/>
@@ -8073,41 +8716,6 @@
                 <a:latin typeface="Aptos"/>
               </a:rPr>
               <a:t>Coat</a:t>
-            </a:r>
-          </a:p>
-        </p:txBody>
-      </p:sp>
-      <p:sp>
-        <p:nvSpPr>
-          <p:cNvPr id="39" name="TextBox 38"/>
-          <p:cNvSpPr txBox="1"/>
-          <p:nvPr/>
-        </p:nvSpPr>
-        <p:spPr>
-          <a:xfrm>
-            <a:off x="9052559" y="5349240"/>
-            <a:ext cx="1965960" cy="201168"/>
-          </a:xfrm>
-          <a:prstGeom prst="rect">
-            <a:avLst/>
-          </a:prstGeom>
-          <a:noFill/>
-        </p:spPr>
-        <p:txBody>
-          <a:bodyPr wrap="square" anchor="t">
-            <a:spAutoFit/>
-          </a:bodyPr>
-          <a:lstStyle/>
-          <a:p>
-            <a:pPr algn="r"/>
-            <a:r>
-              <a:rPr sz="750" b="1">
-                <a:solidFill>
-                  <a:srgbClr val="64748B"/>
-                </a:solidFill>
-                <a:latin typeface="Aptos"/>
-              </a:rPr>
-              <a:t>INVENTORY • CROSS-SELL • PROMOTION</a:t>
             </a:r>
           </a:p>
         </p:txBody>
@@ -9109,7 +9717,7 @@
           <a:p>
             <a:pPr algn="l"/>
             <a:r>
-              <a:rPr sz="950" b="0">
+              <a:rPr sz="950" b="0" dirty="0">
                 <a:solidFill>
                   <a:srgbClr val="C6D3E5"/>
                 </a:solidFill>
@@ -10333,7 +10941,7 @@
           <a:p>
             <a:pPr algn="l"/>
             <a:r>
-              <a:rPr sz="800" b="1">
+              <a:rPr sz="800" b="1" dirty="0">
                 <a:solidFill>
                   <a:srgbClr val="2A64AA"/>
                 </a:solidFill>
@@ -10492,7 +11100,7 @@
         <p:spPr>
           <a:xfrm>
             <a:off x="640080" y="438912"/>
-            <a:ext cx="10698480" cy="566928"/>
+            <a:ext cx="10698480" cy="523220"/>
           </a:xfrm>
           <a:prstGeom prst="rect">
             <a:avLst/>
@@ -10507,49 +11115,20 @@
           <a:p>
             <a:pPr algn="l"/>
             <a:r>
-              <a:rPr sz="2800" b="1">
+              <a:rPr lang="en-GB" sz="2800" b="1" dirty="0">
                 <a:solidFill>
                   <a:srgbClr val="141F31"/>
                 </a:solidFill>
                 <a:latin typeface="Aptos"/>
               </a:rPr>
-              <a:t>From raw transactions to business insight</a:t>
-            </a:r>
-          </a:p>
-        </p:txBody>
-      </p:sp>
-      <p:sp>
-        <p:nvSpPr>
-          <p:cNvPr id="4" name="TextBox 3"/>
-          <p:cNvSpPr txBox="1"/>
-          <p:nvPr/>
-        </p:nvSpPr>
-        <p:spPr>
-          <a:xfrm>
-            <a:off x="658368" y="1033271"/>
-            <a:ext cx="10424160" cy="384048"/>
-          </a:xfrm>
-          <a:prstGeom prst="rect">
-            <a:avLst/>
-          </a:prstGeom>
-          <a:noFill/>
-        </p:spPr>
-        <p:txBody>
-          <a:bodyPr wrap="square" anchor="t">
-            <a:spAutoFit/>
-          </a:bodyPr>
-          <a:lstStyle/>
-          <a:p>
-            <a:pPr algn="l"/>
-            <a:r>
-              <a:rPr sz="1250" b="0">
-                <a:solidFill>
-                  <a:srgbClr val="64748B"/>
-                </a:solidFill>
-                <a:latin typeface="Aptos"/>
-              </a:rPr>
-              <a:t>A simple analytical flow keeps the work reproducible and decision-focused.</a:t>
-            </a:r>
+              <a:t>Workflow</a:t>
+            </a:r>
+            <a:endParaRPr sz="2800" b="1" dirty="0">
+              <a:solidFill>
+                <a:srgbClr val="141F31"/>
+              </a:solidFill>
+              <a:latin typeface="Aptos"/>
+            </a:endParaRPr>
           </a:p>
         </p:txBody>
       </p:sp>
@@ -10678,7 +11257,7 @@
         <p:spPr>
           <a:xfrm>
             <a:off x="932688" y="2542032"/>
-            <a:ext cx="1920240" cy="274320"/>
+            <a:ext cx="1920240" cy="292388"/>
           </a:xfrm>
           <a:prstGeom prst="rect">
             <a:avLst/>
@@ -10693,14 +11272,20 @@
           <a:p>
             <a:pPr algn="l"/>
             <a:r>
-              <a:rPr sz="1300" b="1">
+              <a:rPr lang="en-GB" sz="1300" b="1" dirty="0">
                 <a:solidFill>
                   <a:srgbClr val="141F31"/>
                 </a:solidFill>
                 <a:latin typeface="Aptos"/>
               </a:rPr>
-              <a:t>CLEAN</a:t>
-            </a:r>
+              <a:t>EDA in Python</a:t>
+            </a:r>
+            <a:endParaRPr sz="1300" b="1" dirty="0">
+              <a:solidFill>
+                <a:srgbClr val="141F31"/>
+              </a:solidFill>
+              <a:latin typeface="Aptos"/>
+            </a:endParaRPr>
           </a:p>
         </p:txBody>
       </p:sp>
@@ -10713,30 +11298,94 @@
         <p:spPr>
           <a:xfrm>
             <a:off x="932688" y="2907792"/>
-            <a:ext cx="1938528" cy="566928"/>
-          </a:xfrm>
-          <a:prstGeom prst="rect">
-            <a:avLst/>
-          </a:prstGeom>
-          <a:noFill/>
-        </p:spPr>
-        <p:txBody>
-          <a:bodyPr wrap="square" anchor="t">
-            <a:spAutoFit/>
-          </a:bodyPr>
-          <a:lstStyle/>
-          <a:p>
-            <a:pPr algn="l"/>
-            <a:r>
-              <a:rPr sz="1050" b="0">
+            <a:ext cx="1938528" cy="900246"/>
+          </a:xfrm>
+          <a:prstGeom prst="rect">
+            <a:avLst/>
+          </a:prstGeom>
+          <a:noFill/>
+        </p:spPr>
+        <p:txBody>
+          <a:bodyPr wrap="square" anchor="t">
+            <a:spAutoFit/>
+          </a:bodyPr>
+          <a:lstStyle/>
+          <a:p>
+            <a:pPr marL="171450" indent="-171450" algn="l">
+              <a:buFont typeface="Arial" panose="020B0604020202020204" pitchFamily="34" charset="0"/>
+              <a:buChar char="•"/>
+            </a:pPr>
+            <a:r>
+              <a:rPr lang="en-GB" sz="1050" b="0" dirty="0">
                 <a:solidFill>
                   <a:srgbClr val="64748B"/>
                 </a:solidFill>
                 <a:latin typeface="Aptos"/>
               </a:rPr>
-              <a:t>Standardise fields,
-remove errors, validate types</a:t>
-            </a:r>
+              <a:t>Replacing missing values</a:t>
+            </a:r>
+          </a:p>
+          <a:p>
+            <a:pPr marL="171450" indent="-171450" algn="l">
+              <a:buFont typeface="Arial" panose="020B0604020202020204" pitchFamily="34" charset="0"/>
+              <a:buChar char="•"/>
+            </a:pPr>
+            <a:r>
+              <a:rPr lang="en-GB" sz="1050" dirty="0">
+                <a:solidFill>
+                  <a:srgbClr val="64748B"/>
+                </a:solidFill>
+                <a:latin typeface="Aptos"/>
+              </a:rPr>
+              <a:t>Feature Engineering</a:t>
+            </a:r>
+          </a:p>
+          <a:p>
+            <a:pPr marL="171450" indent="-171450" algn="l">
+              <a:buFont typeface="Arial" panose="020B0604020202020204" pitchFamily="34" charset="0"/>
+              <a:buChar char="•"/>
+            </a:pPr>
+            <a:r>
+              <a:rPr lang="en-GB" sz="1050" b="0" dirty="0">
+                <a:solidFill>
+                  <a:srgbClr val="64748B"/>
+                </a:solidFill>
+                <a:latin typeface="Aptos"/>
+              </a:rPr>
+              <a:t>Column </a:t>
+            </a:r>
+            <a:r>
+              <a:rPr lang="en-GB" sz="1050" dirty="0">
+                <a:solidFill>
+                  <a:srgbClr val="64748B"/>
+                </a:solidFill>
+                <a:latin typeface="Aptos"/>
+              </a:rPr>
+              <a:t>Standardization</a:t>
+            </a:r>
+          </a:p>
+          <a:p>
+            <a:pPr marL="171450" indent="-171450" algn="l">
+              <a:buFont typeface="Arial" panose="020B0604020202020204" pitchFamily="34" charset="0"/>
+              <a:buChar char="•"/>
+            </a:pPr>
+            <a:r>
+              <a:rPr lang="en-GB" sz="1050" dirty="0">
+                <a:solidFill>
+                  <a:srgbClr val="64748B"/>
+                </a:solidFill>
+                <a:latin typeface="Aptos"/>
+              </a:rPr>
+              <a:t>Removing redundant data</a:t>
+            </a:r>
+          </a:p>
+          <a:p>
+            <a:endParaRPr sz="1050" b="0" dirty="0">
+              <a:solidFill>
+                <a:srgbClr val="64748B"/>
+              </a:solidFill>
+              <a:latin typeface="Aptos"/>
+            </a:endParaRPr>
           </a:p>
         </p:txBody>
       </p:sp>
@@ -10865,7 +11514,7 @@
         <p:spPr>
           <a:xfrm>
             <a:off x="3721607" y="2542032"/>
-            <a:ext cx="1920240" cy="274320"/>
+            <a:ext cx="1920240" cy="292388"/>
           </a:xfrm>
           <a:prstGeom prst="rect">
             <a:avLst/>
@@ -10880,14 +11529,20 @@
           <a:p>
             <a:pPr algn="l"/>
             <a:r>
-              <a:rPr sz="1300" b="1">
+              <a:rPr lang="en-GB" sz="1300" b="1" dirty="0">
                 <a:solidFill>
                   <a:srgbClr val="141F31"/>
                 </a:solidFill>
                 <a:latin typeface="Aptos"/>
               </a:rPr>
-              <a:t>LOAD</a:t>
-            </a:r>
+              <a:t>Connect</a:t>
+            </a:r>
+            <a:endParaRPr sz="1300" b="1" dirty="0">
+              <a:solidFill>
+                <a:srgbClr val="141F31"/>
+              </a:solidFill>
+              <a:latin typeface="Aptos"/>
+            </a:endParaRPr>
           </a:p>
         </p:txBody>
       </p:sp>
@@ -10900,7 +11555,7 @@
         <p:spPr>
           <a:xfrm>
             <a:off x="3721607" y="2907792"/>
-            <a:ext cx="1938528" cy="566928"/>
+            <a:ext cx="1938528" cy="577081"/>
           </a:xfrm>
           <a:prstGeom prst="rect">
             <a:avLst/>
@@ -10915,15 +11570,20 @@
           <a:p>
             <a:pPr algn="l"/>
             <a:r>
-              <a:rPr sz="1050" b="0">
+              <a:rPr lang="en-GB" sz="1050" b="0" dirty="0">
                 <a:solidFill>
                   <a:srgbClr val="64748B"/>
                 </a:solidFill>
                 <a:latin typeface="Aptos"/>
               </a:rPr>
-              <a:t>Bring cleaned data into
-PostgreSQL via pgAdmin</a:t>
-            </a:r>
+              <a:t>Connecting python script to PostgreSQL and loading data frame into the database.</a:t>
+            </a:r>
+            <a:endParaRPr sz="1050" b="0" dirty="0">
+              <a:solidFill>
+                <a:srgbClr val="64748B"/>
+              </a:solidFill>
+              <a:latin typeface="Aptos"/>
+            </a:endParaRPr>
           </a:p>
         </p:txBody>
       </p:sp>
@@ -11052,7 +11712,7 @@
         <p:spPr>
           <a:xfrm>
             <a:off x="6510527" y="2542032"/>
-            <a:ext cx="1920240" cy="274320"/>
+            <a:ext cx="1920240" cy="292388"/>
           </a:xfrm>
           <a:prstGeom prst="rect">
             <a:avLst/>
@@ -11067,14 +11727,20 @@
           <a:p>
             <a:pPr algn="l"/>
             <a:r>
-              <a:rPr sz="1300" b="1">
+              <a:rPr lang="en-GB" sz="1300" b="1" dirty="0">
                 <a:solidFill>
                   <a:srgbClr val="141F31"/>
                 </a:solidFill>
                 <a:latin typeface="Aptos"/>
               </a:rPr>
-              <a:t>QUERY</a:t>
-            </a:r>
+              <a:t>SQL Analysis</a:t>
+            </a:r>
+            <a:endParaRPr sz="1300" b="1" dirty="0">
+              <a:solidFill>
+                <a:srgbClr val="141F31"/>
+              </a:solidFill>
+              <a:latin typeface="Aptos"/>
+            </a:endParaRPr>
           </a:p>
         </p:txBody>
       </p:sp>
@@ -11087,7 +11753,7 @@
         <p:spPr>
           <a:xfrm>
             <a:off x="6510527" y="2907792"/>
-            <a:ext cx="1938528" cy="566928"/>
+            <a:ext cx="1938528" cy="415498"/>
           </a:xfrm>
           <a:prstGeom prst="rect">
             <a:avLst/>
@@ -11102,14 +11768,50 @@
           <a:p>
             <a:pPr algn="l"/>
             <a:r>
-              <a:rPr sz="1050" b="0">
+              <a:rPr sz="1050" b="0" dirty="0">
                 <a:solidFill>
                   <a:srgbClr val="64748B"/>
                 </a:solidFill>
                 <a:latin typeface="Aptos"/>
               </a:rPr>
-              <a:t>Use SQL to answer
-commercial questions</a:t>
+              <a:t>Us</a:t>
+            </a:r>
+            <a:r>
+              <a:rPr lang="en-GB" sz="1050" b="0" dirty="0" err="1">
+                <a:solidFill>
+                  <a:srgbClr val="64748B"/>
+                </a:solidFill>
+                <a:latin typeface="Aptos"/>
+              </a:rPr>
+              <a:t>ing</a:t>
+            </a:r>
+            <a:r>
+              <a:rPr sz="1050" b="0" dirty="0">
+                <a:solidFill>
+                  <a:srgbClr val="64748B"/>
+                </a:solidFill>
+                <a:latin typeface="Aptos"/>
+              </a:rPr>
+              <a:t> SQL to answer
+</a:t>
+            </a:r>
+            <a:r>
+              <a:rPr lang="en-GB" sz="1050" b="0" dirty="0">
+                <a:solidFill>
+                  <a:srgbClr val="64748B"/>
+                </a:solidFill>
+                <a:latin typeface="Aptos"/>
+              </a:rPr>
+              <a:t>several business</a:t>
+            </a:r>
+            <a:r>
+              <a:rPr sz="1050" b="0" dirty="0">
+                <a:solidFill>
+                  <a:srgbClr val="64748B"/>
+                </a:solidFill>
+                <a:latin typeface="Aptos"/>
+              </a:rPr>
+              <a:t> questions</a:t>
             </a:r>
           </a:p>
         </p:txBody>
@@ -11239,7 +11941,7 @@
         <p:spPr>
           <a:xfrm>
             <a:off x="9299448" y="2542032"/>
-            <a:ext cx="1920240" cy="274320"/>
+            <a:ext cx="1920240" cy="292388"/>
           </a:xfrm>
           <a:prstGeom prst="rect">
             <a:avLst/>
@@ -11254,14 +11956,20 @@
           <a:p>
             <a:pPr algn="l"/>
             <a:r>
-              <a:rPr sz="1300" b="1">
+              <a:rPr lang="en-GB" sz="1300" b="1" dirty="0">
                 <a:solidFill>
                   <a:srgbClr val="141F31"/>
                 </a:solidFill>
                 <a:latin typeface="Aptos"/>
               </a:rPr>
-              <a:t>INTERPRET</a:t>
-            </a:r>
+              <a:t>Insights</a:t>
+            </a:r>
+            <a:endParaRPr sz="1300" b="1" dirty="0">
+              <a:solidFill>
+                <a:srgbClr val="141F31"/>
+              </a:solidFill>
+              <a:latin typeface="Aptos"/>
+            </a:endParaRPr>
           </a:p>
         </p:txBody>
       </p:sp>
@@ -11274,7 +11982,7 @@
         <p:spPr>
           <a:xfrm>
             <a:off x="9299448" y="2907792"/>
-            <a:ext cx="1938528" cy="566928"/>
+            <a:ext cx="1938528" cy="415498"/>
           </a:xfrm>
           <a:prstGeom prst="rect">
             <a:avLst/>
@@ -11289,13 +11997,22 @@
           <a:p>
             <a:pPr algn="l"/>
             <a:r>
-              <a:rPr sz="1050" b="0">
+              <a:rPr lang="en-GB" sz="1050" dirty="0">
                 <a:solidFill>
                   <a:srgbClr val="64748B"/>
                 </a:solidFill>
                 <a:latin typeface="Aptos"/>
               </a:rPr>
-              <a:t>Translate metrics into
+              <a:t>Translating</a:t>
+            </a:r>
+            <a:r>
+              <a:rPr sz="1050" b="0" dirty="0">
+                <a:solidFill>
+                  <a:srgbClr val="64748B"/>
+                </a:solidFill>
+                <a:latin typeface="Aptos"/>
+              </a:rPr>
+              <a:t> metrics into
 actions and hypotheses</a:t>
             </a:r>
           </a:p>
@@ -11433,50 +12150,6 @@
       </p:grpSpPr>
       <p:sp>
         <p:nvSpPr>
-          <p:cNvPr id="2" name="Rectangle 1"/>
-          <p:cNvSpPr/>
-          <p:nvPr/>
-        </p:nvSpPr>
-        <p:spPr>
-          <a:xfrm>
-            <a:off x="0" y="0"/>
-            <a:ext cx="12191695" cy="6858000"/>
-          </a:xfrm>
-          <a:prstGeom prst="rect">
-            <a:avLst/>
-          </a:prstGeom>
-          <a:solidFill>
-            <a:srgbClr val="F7F9FC"/>
-          </a:solidFill>
-          <a:ln>
-            <a:noFill/>
-          </a:ln>
-        </p:spPr>
-        <p:style>
-          <a:lnRef idx="1">
-            <a:schemeClr val="accent1"/>
-          </a:lnRef>
-          <a:fillRef idx="3">
-            <a:schemeClr val="accent1"/>
-          </a:fillRef>
-          <a:effectRef idx="2">
-            <a:schemeClr val="accent1"/>
-          </a:effectRef>
-          <a:fontRef idx="minor">
-            <a:schemeClr val="lt1"/>
-          </a:fontRef>
-        </p:style>
-        <p:txBody>
-          <a:bodyPr rtlCol="0" anchor="ctr"/>
-          <a:lstStyle/>
-          <a:p>
-            <a:pPr algn="ctr"/>
-            <a:endParaRPr/>
-          </a:p>
-        </p:txBody>
-      </p:sp>
-      <p:sp>
-        <p:nvSpPr>
           <p:cNvPr id="3" name="TextBox 2"/>
           <p:cNvSpPr txBox="1"/>
           <p:nvPr/>
@@ -11484,64 +12157,34 @@
         <p:spPr>
           <a:xfrm>
             <a:off x="640080" y="438912"/>
-            <a:ext cx="10698480" cy="566928"/>
-          </a:xfrm>
-          <a:prstGeom prst="rect">
-            <a:avLst/>
-          </a:prstGeom>
-          <a:noFill/>
-        </p:spPr>
-        <p:txBody>
-          <a:bodyPr wrap="square" anchor="t">
-            <a:spAutoFit/>
-          </a:bodyPr>
-          <a:lstStyle/>
-          <a:p>
-            <a:pPr algn="l"/>
-            <a:r>
-              <a:rPr sz="2800" b="1">
+            <a:ext cx="10698480" cy="523220"/>
+          </a:xfrm>
+          <a:prstGeom prst="rect">
+            <a:avLst/>
+          </a:prstGeom>
+          <a:noFill/>
+        </p:spPr>
+        <p:txBody>
+          <a:bodyPr wrap="square" anchor="t">
+            <a:spAutoFit/>
+          </a:bodyPr>
+          <a:lstStyle/>
+          <a:p>
+            <a:r>
+              <a:rPr lang="en-GB" sz="2800" b="1" dirty="0">
                 <a:solidFill>
                   <a:srgbClr val="141F31"/>
                 </a:solidFill>
                 <a:latin typeface="Aptos"/>
               </a:rPr>
-              <a:t>Revenue is heavily skewed toward male customers</a:t>
-            </a:r>
-          </a:p>
-        </p:txBody>
-      </p:sp>
-      <p:sp>
-        <p:nvSpPr>
-          <p:cNvPr id="4" name="TextBox 3"/>
-          <p:cNvSpPr txBox="1"/>
-          <p:nvPr/>
-        </p:nvSpPr>
-        <p:spPr>
-          <a:xfrm>
-            <a:off x="658368" y="1033271"/>
-            <a:ext cx="10424160" cy="384048"/>
-          </a:xfrm>
-          <a:prstGeom prst="rect">
-            <a:avLst/>
-          </a:prstGeom>
-          <a:noFill/>
-        </p:spPr>
-        <p:txBody>
-          <a:bodyPr wrap="square" anchor="t">
-            <a:spAutoFit/>
-          </a:bodyPr>
-          <a:lstStyle/>
-          <a:p>
-            <a:pPr algn="l"/>
-            <a:r>
-              <a:rPr sz="1250" b="0">
-                <a:solidFill>
-                  <a:srgbClr val="64748B"/>
-                </a:solidFill>
-                <a:latin typeface="Aptos"/>
-              </a:rPr>
-              <a:t>Male customers generated more than twice the revenue of female customers.</a:t>
-            </a:r>
+              <a:t>Male vs Female</a:t>
+            </a:r>
+            <a:endParaRPr sz="2800" b="1" dirty="0">
+              <a:solidFill>
+                <a:srgbClr val="141F31"/>
+              </a:solidFill>
+              <a:latin typeface="Aptos"/>
+            </a:endParaRPr>
           </a:p>
         </p:txBody>
       </p:sp>
@@ -11582,512 +12225,14 @@
       </p:sp>
       <p:sp>
         <p:nvSpPr>
-          <p:cNvPr id="6" name="Rounded Rectangle 5"/>
-          <p:cNvSpPr/>
-          <p:nvPr/>
-        </p:nvSpPr>
-        <p:spPr>
-          <a:xfrm>
-            <a:off x="731520" y="1508760"/>
-            <a:ext cx="2560320" cy="1078992"/>
-          </a:xfrm>
-          <a:prstGeom prst="roundRect">
-            <a:avLst/>
-          </a:prstGeom>
-          <a:solidFill>
-            <a:srgbClr val="FFFFFF"/>
-          </a:solidFill>
-          <a:ln w="8890">
-            <a:solidFill>
-              <a:srgbClr val="E1E7EF"/>
-            </a:solidFill>
-          </a:ln>
-        </p:spPr>
-        <p:style>
-          <a:lnRef idx="1">
-            <a:schemeClr val="accent1"/>
-          </a:lnRef>
-          <a:fillRef idx="3">
-            <a:schemeClr val="accent1"/>
-          </a:fillRef>
-          <a:effectRef idx="2">
-            <a:schemeClr val="accent1"/>
-          </a:effectRef>
-          <a:fontRef idx="minor">
-            <a:schemeClr val="lt1"/>
-          </a:fontRef>
-        </p:style>
-        <p:txBody>
-          <a:bodyPr rtlCol="0" anchor="ctr"/>
-          <a:lstStyle/>
-          <a:p>
-            <a:pPr algn="ctr"/>
-            <a:endParaRPr/>
-          </a:p>
-        </p:txBody>
-      </p:sp>
-      <p:sp>
-        <p:nvSpPr>
-          <p:cNvPr id="7" name="TextBox 6"/>
-          <p:cNvSpPr txBox="1"/>
-          <p:nvPr/>
-        </p:nvSpPr>
-        <p:spPr>
-          <a:xfrm>
-            <a:off x="896112" y="1645919"/>
-            <a:ext cx="2231136" cy="182880"/>
-          </a:xfrm>
-          <a:prstGeom prst="rect">
-            <a:avLst/>
-          </a:prstGeom>
-          <a:noFill/>
-        </p:spPr>
-        <p:txBody>
-          <a:bodyPr wrap="square" anchor="t">
-            <a:spAutoFit/>
-          </a:bodyPr>
-          <a:lstStyle/>
-          <a:p>
-            <a:pPr algn="l"/>
-            <a:r>
-              <a:rPr sz="850" b="1">
-                <a:solidFill>
-                  <a:srgbClr val="64748B"/>
-                </a:solidFill>
-                <a:latin typeface="Aptos"/>
-              </a:rPr>
-              <a:t>MALE REVENUE</a:t>
-            </a:r>
-          </a:p>
-        </p:txBody>
-      </p:sp>
-      <p:sp>
-        <p:nvSpPr>
-          <p:cNvPr id="8" name="TextBox 7"/>
-          <p:cNvSpPr txBox="1"/>
-          <p:nvPr/>
-        </p:nvSpPr>
-        <p:spPr>
-          <a:xfrm>
-            <a:off x="896112" y="1865376"/>
-            <a:ext cx="2231136" cy="393192"/>
-          </a:xfrm>
-          <a:prstGeom prst="rect">
-            <a:avLst/>
-          </a:prstGeom>
-          <a:noFill/>
-        </p:spPr>
-        <p:txBody>
-          <a:bodyPr wrap="square" anchor="t">
-            <a:spAutoFit/>
-          </a:bodyPr>
-          <a:lstStyle/>
-          <a:p>
-            <a:pPr algn="l"/>
-            <a:r>
-              <a:rPr sz="2200" b="1">
-                <a:solidFill>
-                  <a:srgbClr val="141F31"/>
-                </a:solidFill>
-                <a:latin typeface="Aptos"/>
-              </a:rPr>
-              <a:t>£157,890</a:t>
-            </a:r>
-          </a:p>
-        </p:txBody>
-      </p:sp>
-      <p:sp>
-        <p:nvSpPr>
-          <p:cNvPr id="9" name="Rectangle 8"/>
-          <p:cNvSpPr/>
-          <p:nvPr/>
-        </p:nvSpPr>
-        <p:spPr>
-          <a:xfrm>
-            <a:off x="731520" y="1508760"/>
-            <a:ext cx="50292" cy="1078992"/>
-          </a:xfrm>
-          <a:prstGeom prst="rect">
-            <a:avLst/>
-          </a:prstGeom>
-          <a:solidFill>
-            <a:srgbClr val="2A64AA"/>
-          </a:solidFill>
-          <a:ln>
-            <a:noFill/>
-          </a:ln>
-        </p:spPr>
-        <p:style>
-          <a:lnRef idx="1">
-            <a:schemeClr val="accent1"/>
-          </a:lnRef>
-          <a:fillRef idx="3">
-            <a:schemeClr val="accent1"/>
-          </a:fillRef>
-          <a:effectRef idx="2">
-            <a:schemeClr val="accent1"/>
-          </a:effectRef>
-          <a:fontRef idx="minor">
-            <a:schemeClr val="lt1"/>
-          </a:fontRef>
-        </p:style>
-        <p:txBody>
-          <a:bodyPr rtlCol="0" anchor="ctr"/>
-          <a:lstStyle/>
-          <a:p>
-            <a:pPr algn="ctr"/>
-            <a:endParaRPr/>
-          </a:p>
-        </p:txBody>
-      </p:sp>
-      <p:sp>
-        <p:nvSpPr>
-          <p:cNvPr id="10" name="Rounded Rectangle 9"/>
-          <p:cNvSpPr/>
-          <p:nvPr/>
-        </p:nvSpPr>
-        <p:spPr>
-          <a:xfrm>
-            <a:off x="3474720" y="1508760"/>
-            <a:ext cx="2560320" cy="1078992"/>
-          </a:xfrm>
-          <a:prstGeom prst="roundRect">
-            <a:avLst/>
-          </a:prstGeom>
-          <a:solidFill>
-            <a:srgbClr val="FFFFFF"/>
-          </a:solidFill>
-          <a:ln w="8890">
-            <a:solidFill>
-              <a:srgbClr val="E1E7EF"/>
-            </a:solidFill>
-          </a:ln>
-        </p:spPr>
-        <p:style>
-          <a:lnRef idx="1">
-            <a:schemeClr val="accent1"/>
-          </a:lnRef>
-          <a:fillRef idx="3">
-            <a:schemeClr val="accent1"/>
-          </a:fillRef>
-          <a:effectRef idx="2">
-            <a:schemeClr val="accent1"/>
-          </a:effectRef>
-          <a:fontRef idx="minor">
-            <a:schemeClr val="lt1"/>
-          </a:fontRef>
-        </p:style>
-        <p:txBody>
-          <a:bodyPr rtlCol="0" anchor="ctr"/>
-          <a:lstStyle/>
-          <a:p>
-            <a:pPr algn="ctr"/>
-            <a:endParaRPr/>
-          </a:p>
-        </p:txBody>
-      </p:sp>
-      <p:sp>
-        <p:nvSpPr>
-          <p:cNvPr id="11" name="TextBox 10"/>
-          <p:cNvSpPr txBox="1"/>
-          <p:nvPr/>
-        </p:nvSpPr>
-        <p:spPr>
-          <a:xfrm>
-            <a:off x="3639312" y="1645919"/>
-            <a:ext cx="2231136" cy="182880"/>
-          </a:xfrm>
-          <a:prstGeom prst="rect">
-            <a:avLst/>
-          </a:prstGeom>
-          <a:noFill/>
-        </p:spPr>
-        <p:txBody>
-          <a:bodyPr wrap="square" anchor="t">
-            <a:spAutoFit/>
-          </a:bodyPr>
-          <a:lstStyle/>
-          <a:p>
-            <a:pPr algn="l"/>
-            <a:r>
-              <a:rPr sz="850" b="1">
-                <a:solidFill>
-                  <a:srgbClr val="64748B"/>
-                </a:solidFill>
-                <a:latin typeface="Aptos"/>
-              </a:rPr>
-              <a:t>FEMALE REVENUE</a:t>
-            </a:r>
-          </a:p>
-        </p:txBody>
-      </p:sp>
-      <p:sp>
-        <p:nvSpPr>
-          <p:cNvPr id="12" name="TextBox 11"/>
-          <p:cNvSpPr txBox="1"/>
-          <p:nvPr/>
-        </p:nvSpPr>
-        <p:spPr>
-          <a:xfrm>
-            <a:off x="3639312" y="1865376"/>
-            <a:ext cx="2231136" cy="393192"/>
-          </a:xfrm>
-          <a:prstGeom prst="rect">
-            <a:avLst/>
-          </a:prstGeom>
-          <a:noFill/>
-        </p:spPr>
-        <p:txBody>
-          <a:bodyPr wrap="square" anchor="t">
-            <a:spAutoFit/>
-          </a:bodyPr>
-          <a:lstStyle/>
-          <a:p>
-            <a:pPr algn="l"/>
-            <a:r>
-              <a:rPr sz="2200" b="1">
-                <a:solidFill>
-                  <a:srgbClr val="141F31"/>
-                </a:solidFill>
-                <a:latin typeface="Aptos"/>
-              </a:rPr>
-              <a:t>£75,191</a:t>
-            </a:r>
-          </a:p>
-        </p:txBody>
-      </p:sp>
-      <p:sp>
-        <p:nvSpPr>
-          <p:cNvPr id="13" name="Rectangle 12"/>
-          <p:cNvSpPr/>
-          <p:nvPr/>
-        </p:nvSpPr>
-        <p:spPr>
-          <a:xfrm>
-            <a:off x="3474720" y="1508760"/>
-            <a:ext cx="50292" cy="1078992"/>
-          </a:xfrm>
-          <a:prstGeom prst="rect">
-            <a:avLst/>
-          </a:prstGeom>
-          <a:solidFill>
-            <a:srgbClr val="1F8584"/>
-          </a:solidFill>
-          <a:ln>
-            <a:noFill/>
-          </a:ln>
-        </p:spPr>
-        <p:style>
-          <a:lnRef idx="1">
-            <a:schemeClr val="accent1"/>
-          </a:lnRef>
-          <a:fillRef idx="3">
-            <a:schemeClr val="accent1"/>
-          </a:fillRef>
-          <a:effectRef idx="2">
-            <a:schemeClr val="accent1"/>
-          </a:effectRef>
-          <a:fontRef idx="minor">
-            <a:schemeClr val="lt1"/>
-          </a:fontRef>
-        </p:style>
-        <p:txBody>
-          <a:bodyPr rtlCol="0" anchor="ctr"/>
-          <a:lstStyle/>
-          <a:p>
-            <a:pPr algn="ctr"/>
-            <a:endParaRPr/>
-          </a:p>
-        </p:txBody>
-      </p:sp>
-      <p:sp>
-        <p:nvSpPr>
-          <p:cNvPr id="14" name="Rounded Rectangle 13"/>
-          <p:cNvSpPr/>
-          <p:nvPr/>
-        </p:nvSpPr>
-        <p:spPr>
-          <a:xfrm>
-            <a:off x="6217920" y="1508760"/>
-            <a:ext cx="2560320" cy="1078992"/>
-          </a:xfrm>
-          <a:prstGeom prst="roundRect">
-            <a:avLst/>
-          </a:prstGeom>
-          <a:solidFill>
-            <a:srgbClr val="FFFFFF"/>
-          </a:solidFill>
-          <a:ln w="8890">
-            <a:solidFill>
-              <a:srgbClr val="E1E7EF"/>
-            </a:solidFill>
-          </a:ln>
-        </p:spPr>
-        <p:style>
-          <a:lnRef idx="1">
-            <a:schemeClr val="accent1"/>
-          </a:lnRef>
-          <a:fillRef idx="3">
-            <a:schemeClr val="accent1"/>
-          </a:fillRef>
-          <a:effectRef idx="2">
-            <a:schemeClr val="accent1"/>
-          </a:effectRef>
-          <a:fontRef idx="minor">
-            <a:schemeClr val="lt1"/>
-          </a:fontRef>
-        </p:style>
-        <p:txBody>
-          <a:bodyPr rtlCol="0" anchor="ctr"/>
-          <a:lstStyle/>
-          <a:p>
-            <a:pPr algn="ctr"/>
-            <a:endParaRPr/>
-          </a:p>
-        </p:txBody>
-      </p:sp>
-      <p:sp>
-        <p:nvSpPr>
-          <p:cNvPr id="15" name="TextBox 14"/>
-          <p:cNvSpPr txBox="1"/>
-          <p:nvPr/>
-        </p:nvSpPr>
-        <p:spPr>
-          <a:xfrm>
-            <a:off x="6382512" y="1645919"/>
-            <a:ext cx="2231136" cy="182880"/>
-          </a:xfrm>
-          <a:prstGeom prst="rect">
-            <a:avLst/>
-          </a:prstGeom>
-          <a:noFill/>
-        </p:spPr>
-        <p:txBody>
-          <a:bodyPr wrap="square" anchor="t">
-            <a:spAutoFit/>
-          </a:bodyPr>
-          <a:lstStyle/>
-          <a:p>
-            <a:pPr algn="l"/>
-            <a:r>
-              <a:rPr sz="850" b="1">
-                <a:solidFill>
-                  <a:srgbClr val="64748B"/>
-                </a:solidFill>
-                <a:latin typeface="Aptos"/>
-              </a:rPr>
-              <a:t>TOTAL REVENUE</a:t>
-            </a:r>
-          </a:p>
-        </p:txBody>
-      </p:sp>
-      <p:sp>
-        <p:nvSpPr>
-          <p:cNvPr id="16" name="TextBox 15"/>
-          <p:cNvSpPr txBox="1"/>
-          <p:nvPr/>
-        </p:nvSpPr>
-        <p:spPr>
-          <a:xfrm>
-            <a:off x="6382512" y="1865376"/>
-            <a:ext cx="2231136" cy="393192"/>
-          </a:xfrm>
-          <a:prstGeom prst="rect">
-            <a:avLst/>
-          </a:prstGeom>
-          <a:noFill/>
-        </p:spPr>
-        <p:txBody>
-          <a:bodyPr wrap="square" anchor="t">
-            <a:spAutoFit/>
-          </a:bodyPr>
-          <a:lstStyle/>
-          <a:p>
-            <a:pPr algn="l"/>
-            <a:r>
-              <a:rPr sz="2200" b="1">
-                <a:solidFill>
-                  <a:srgbClr val="141F31"/>
-                </a:solidFill>
-                <a:latin typeface="Aptos"/>
-              </a:rPr>
-              <a:t>£233,081</a:t>
-            </a:r>
-          </a:p>
-        </p:txBody>
-      </p:sp>
-      <p:sp>
-        <p:nvSpPr>
-          <p:cNvPr id="17" name="Rectangle 16"/>
-          <p:cNvSpPr/>
-          <p:nvPr/>
-        </p:nvSpPr>
-        <p:spPr>
-          <a:xfrm>
-            <a:off x="6217920" y="1508760"/>
-            <a:ext cx="50292" cy="1078992"/>
-          </a:xfrm>
-          <a:prstGeom prst="rect">
-            <a:avLst/>
-          </a:prstGeom>
-          <a:solidFill>
-            <a:srgbClr val="141F31"/>
-          </a:solidFill>
-          <a:ln>
-            <a:noFill/>
-          </a:ln>
-        </p:spPr>
-        <p:style>
-          <a:lnRef idx="1">
-            <a:schemeClr val="accent1"/>
-          </a:lnRef>
-          <a:fillRef idx="3">
-            <a:schemeClr val="accent1"/>
-          </a:fillRef>
-          <a:effectRef idx="2">
-            <a:schemeClr val="accent1"/>
-          </a:effectRef>
-          <a:fontRef idx="minor">
-            <a:schemeClr val="lt1"/>
-          </a:fontRef>
-        </p:style>
-        <p:txBody>
-          <a:bodyPr rtlCol="0" anchor="ctr"/>
-          <a:lstStyle/>
-          <a:p>
-            <a:pPr algn="ctr"/>
-            <a:endParaRPr/>
-          </a:p>
-        </p:txBody>
-      </p:sp>
-      <p:graphicFrame>
-        <p:nvGraphicFramePr>
-          <p:cNvPr id="18" name="Chart 17"/>
-          <p:cNvGraphicFramePr>
-            <a:graphicFrameLocks noGrp="1"/>
-          </p:cNvGraphicFramePr>
-          <p:nvPr/>
-        </p:nvGraphicFramePr>
-        <p:xfrm>
-          <a:off x="777240" y="2880360"/>
-          <a:ext cx="5669280" cy="2971800"/>
-        </p:xfrm>
-        <a:graphic>
-          <a:graphicData uri="http://schemas.openxmlformats.org/drawingml/2006/chart">
-            <c:chart xmlns:c="http://schemas.openxmlformats.org/drawingml/2006/chart" xmlns:r="http://schemas.openxmlformats.org/officeDocument/2006/relationships" r:id="rId2"/>
-          </a:graphicData>
-        </a:graphic>
-      </p:graphicFrame>
-      <p:sp>
-        <p:nvSpPr>
           <p:cNvPr id="19" name="Rounded Rectangle 18"/>
           <p:cNvSpPr/>
           <p:nvPr/>
         </p:nvSpPr>
         <p:spPr>
           <a:xfrm>
-            <a:off x="6812280" y="2880360"/>
-            <a:ext cx="4572000" cy="2971800"/>
+            <a:off x="2749099" y="3383909"/>
+            <a:ext cx="8583562" cy="2714126"/>
           </a:xfrm>
           <a:prstGeom prst="roundRect">
             <a:avLst/>
@@ -12132,8 +12277,8 @@
         </p:nvSpPr>
         <p:spPr>
           <a:xfrm>
-            <a:off x="7114032" y="3182112"/>
-            <a:ext cx="1828800" cy="228600"/>
+            <a:off x="3048984" y="3696083"/>
+            <a:ext cx="1828800" cy="292388"/>
           </a:xfrm>
           <a:prstGeom prst="rect">
             <a:avLst/>
@@ -12148,7 +12293,7 @@
           <a:p>
             <a:pPr algn="l"/>
             <a:r>
-              <a:rPr sz="900" b="1">
+              <a:rPr sz="1300" b="1" dirty="0">
                 <a:solidFill>
                   <a:srgbClr val="2A64AA"/>
                 </a:solidFill>
@@ -12161,49 +12306,14 @@
       </p:sp>
       <p:sp>
         <p:nvSpPr>
-          <p:cNvPr id="21" name="TextBox 20"/>
-          <p:cNvSpPr txBox="1"/>
-          <p:nvPr/>
-        </p:nvSpPr>
-        <p:spPr>
-          <a:xfrm>
-            <a:off x="7114032" y="3547872"/>
-            <a:ext cx="3840480" cy="548640"/>
-          </a:xfrm>
-          <a:prstGeom prst="rect">
-            <a:avLst/>
-          </a:prstGeom>
-          <a:noFill/>
-        </p:spPr>
-        <p:txBody>
-          <a:bodyPr wrap="square" anchor="t">
-            <a:spAutoFit/>
-          </a:bodyPr>
-          <a:lstStyle/>
-          <a:p>
-            <a:pPr algn="l"/>
-            <a:r>
-              <a:rPr sz="1900" b="1">
-                <a:solidFill>
-                  <a:srgbClr val="141F31"/>
-                </a:solidFill>
-                <a:latin typeface="Aptos"/>
-              </a:rPr>
-              <a:t>A material gender revenue gap exists.</a:t>
-            </a:r>
-          </a:p>
-        </p:txBody>
-      </p:sp>
-      <p:sp>
-        <p:nvSpPr>
           <p:cNvPr id="22" name="TextBox 21"/>
           <p:cNvSpPr txBox="1"/>
           <p:nvPr/>
         </p:nvSpPr>
         <p:spPr>
           <a:xfrm>
-            <a:off x="7114032" y="4251960"/>
-            <a:ext cx="3749039" cy="1234440"/>
+            <a:off x="3048984" y="4040091"/>
+            <a:ext cx="7811728" cy="1774845"/>
           </a:xfrm>
           <a:prstGeom prst="rect">
             <a:avLst/>
@@ -12216,10 +12326,12 @@
           </a:bodyPr>
           <a:lstStyle/>
           <a:p>
-            <a:pPr>
+            <a:pPr marL="285750" indent="-285750">
               <a:spcAft>
                 <a:spcPts val="800"/>
               </a:spcAft>
+              <a:buFont typeface="Arial" panose="020B0604020202020204" pitchFamily="34" charset="0"/>
+              <a:buChar char="•"/>
               <a:defRPr sz="1050">
                 <a:solidFill>
                   <a:srgbClr val="1F2937"/>
@@ -12228,14 +12340,17 @@
               </a:defRPr>
             </a:pPr>
             <a:r>
-              <a:t>• Break the gap down by purchase frequency, basket size and category mix.</a:t>
-            </a:r>
-          </a:p>
-          <a:p>
-            <a:pPr>
+              <a:rPr lang="en-US" sz="1600" dirty="0"/>
+              <a:t>The revenue distribution is almost exactly proportional to the customer distribution, so gender does not appear to be a major differentiator in customer value</a:t>
+            </a:r>
+          </a:p>
+          <a:p>
+            <a:pPr marL="285750" indent="-285750">
               <a:spcAft>
                 <a:spcPts val="800"/>
               </a:spcAft>
+              <a:buFont typeface="Arial" panose="020B0604020202020204" pitchFamily="34" charset="0"/>
+              <a:buChar char="•"/>
               <a:defRPr sz="1050">
                 <a:solidFill>
                   <a:srgbClr val="1F2937"/>
@@ -12244,14 +12359,22 @@
               </a:defRPr>
             </a:pPr>
             <a:r>
-              <a:t>• Avoid assuming gender alone drives value; test the underlying behaviours.</a:t>
-            </a:r>
-          </a:p>
-          <a:p>
-            <a:pPr>
+              <a:rPr lang="en-GB" sz="1600" dirty="0"/>
+              <a:t>Both genders have similar average purchase amounts </a:t>
+            </a:r>
+            <a:r>
+              <a:rPr lang="en-US" sz="1600" dirty="0"/>
+              <a:t>which suggests that the revenue difference is primarily driven by customer volume rather than substantially different spending levels.</a:t>
+            </a:r>
+            <a:endParaRPr lang="en-GB" sz="1600" dirty="0"/>
+          </a:p>
+          <a:p>
+            <a:pPr marL="285750" indent="-285750">
               <a:spcAft>
                 <a:spcPts val="800"/>
               </a:spcAft>
+              <a:buFont typeface="Arial" panose="020B0604020202020204" pitchFamily="34" charset="0"/>
+              <a:buChar char="•"/>
               <a:defRPr sz="1050">
                 <a:solidFill>
                   <a:srgbClr val="1F2937"/>
@@ -12260,8 +12383,10 @@
               </a:defRPr>
             </a:pPr>
             <a:r>
-              <a:t>• Use the result as a segmentation signal for deeper analysis.</a:t>
-            </a:r>
+              <a:rPr lang="en-GB" sz="1600" dirty="0"/>
+              <a:t>Prioritise behavioural segmentation over gender-based targeting</a:t>
+            </a:r>
+            <a:endParaRPr sz="1600" dirty="0"/>
           </a:p>
         </p:txBody>
       </p:sp>
@@ -12300,6 +12425,425 @@
           </a:p>
         </p:txBody>
       </p:sp>
+      <p:graphicFrame>
+        <p:nvGraphicFramePr>
+          <p:cNvPr id="25" name="Table 24">
+            <a:extLst>
+              <a:ext uri="{FF2B5EF4-FFF2-40B4-BE49-F238E27FC236}">
+                <a16:creationId xmlns:a16="http://schemas.microsoft.com/office/drawing/2014/main" id="{3740724E-B60F-5BF5-BF1A-1EF93E1A4CA8}"/>
+              </a:ext>
+            </a:extLst>
+          </p:cNvPr>
+          <p:cNvGraphicFramePr>
+            <a:graphicFrameLocks noGrp="1"/>
+          </p:cNvGraphicFramePr>
+          <p:nvPr>
+            <p:extLst>
+              <p:ext uri="{D42A27DB-BD31-4B8C-83A1-F6EECF244321}">
+                <p14:modId xmlns:p14="http://schemas.microsoft.com/office/powerpoint/2010/main" val="542827235"/>
+              </p:ext>
+            </p:extLst>
+          </p:nvPr>
+        </p:nvGraphicFramePr>
+        <p:xfrm>
+          <a:off x="640080" y="1151472"/>
+          <a:ext cx="6400800" cy="1737360"/>
+        </p:xfrm>
+        <a:graphic>
+          <a:graphicData uri="http://schemas.openxmlformats.org/drawingml/2006/table">
+            <a:tbl>
+              <a:tblPr>
+                <a:tableStyleId>{5C22544A-7EE6-4342-B048-85BDC9FD1C3A}</a:tableStyleId>
+              </a:tblPr>
+              <a:tblGrid>
+                <a:gridCol w="1280160">
+                  <a:extLst>
+                    <a:ext uri="{9D8B030D-6E8A-4147-A177-3AD203B41FA5}">
+                      <a16:colId xmlns:a16="http://schemas.microsoft.com/office/drawing/2014/main" val="2349036034"/>
+                    </a:ext>
+                  </a:extLst>
+                </a:gridCol>
+                <a:gridCol w="1280160">
+                  <a:extLst>
+                    <a:ext uri="{9D8B030D-6E8A-4147-A177-3AD203B41FA5}">
+                      <a16:colId xmlns:a16="http://schemas.microsoft.com/office/drawing/2014/main" val="2935728688"/>
+                    </a:ext>
+                  </a:extLst>
+                </a:gridCol>
+                <a:gridCol w="1280160">
+                  <a:extLst>
+                    <a:ext uri="{9D8B030D-6E8A-4147-A177-3AD203B41FA5}">
+                      <a16:colId xmlns:a16="http://schemas.microsoft.com/office/drawing/2014/main" val="1869970035"/>
+                    </a:ext>
+                  </a:extLst>
+                </a:gridCol>
+                <a:gridCol w="1280160">
+                  <a:extLst>
+                    <a:ext uri="{9D8B030D-6E8A-4147-A177-3AD203B41FA5}">
+                      <a16:colId xmlns:a16="http://schemas.microsoft.com/office/drawing/2014/main" val="2222112530"/>
+                    </a:ext>
+                  </a:extLst>
+                </a:gridCol>
+                <a:gridCol w="1280160">
+                  <a:extLst>
+                    <a:ext uri="{9D8B030D-6E8A-4147-A177-3AD203B41FA5}">
+                      <a16:colId xmlns:a16="http://schemas.microsoft.com/office/drawing/2014/main" val="997792685"/>
+                    </a:ext>
+                  </a:extLst>
+                </a:gridCol>
+              </a:tblGrid>
+              <a:tr h="321143">
+                <a:tc>
+                  <a:txBody>
+                    <a:bodyPr/>
+                    <a:lstStyle/>
+                    <a:p>
+                      <a:pPr>
+                        <a:buNone/>
+                      </a:pPr>
+                      <a:r>
+                        <a:rPr lang="en-GB"/>
+                        <a:t>Gender</a:t>
+                      </a:r>
+                    </a:p>
+                  </a:txBody>
+                  <a:tcPr anchor="ctr"/>
+                </a:tc>
+                <a:tc>
+                  <a:txBody>
+                    <a:bodyPr/>
+                    <a:lstStyle/>
+                    <a:p>
+                      <a:pPr algn="r">
+                        <a:buNone/>
+                      </a:pPr>
+                      <a:r>
+                        <a:rPr lang="en-GB" dirty="0"/>
+                        <a:t>Customers</a:t>
+                      </a:r>
+                    </a:p>
+                  </a:txBody>
+                  <a:tcPr anchor="ctr"/>
+                </a:tc>
+                <a:tc>
+                  <a:txBody>
+                    <a:bodyPr/>
+                    <a:lstStyle/>
+                    <a:p>
+                      <a:pPr algn="r">
+                        <a:buNone/>
+                      </a:pPr>
+                      <a:r>
+                        <a:rPr lang="en-GB" dirty="0"/>
+                        <a:t>% of Customers</a:t>
+                      </a:r>
+                    </a:p>
+                  </a:txBody>
+                  <a:tcPr anchor="ctr"/>
+                </a:tc>
+                <a:tc>
+                  <a:txBody>
+                    <a:bodyPr/>
+                    <a:lstStyle/>
+                    <a:p>
+                      <a:pPr algn="r">
+                        <a:buNone/>
+                      </a:pPr>
+                      <a:r>
+                        <a:rPr lang="en-GB" dirty="0"/>
+                        <a:t>Revenue</a:t>
+                      </a:r>
+                    </a:p>
+                  </a:txBody>
+                  <a:tcPr anchor="ctr"/>
+                </a:tc>
+                <a:tc>
+                  <a:txBody>
+                    <a:bodyPr/>
+                    <a:lstStyle/>
+                    <a:p>
+                      <a:pPr algn="r">
+                        <a:buNone/>
+                      </a:pPr>
+                      <a:r>
+                        <a:rPr lang="en-GB" dirty="0"/>
+                        <a:t>% of Revenue</a:t>
+                      </a:r>
+                    </a:p>
+                  </a:txBody>
+                  <a:tcPr anchor="ctr"/>
+                </a:tc>
+                <a:extLst>
+                  <a:ext uri="{0D108BD9-81ED-4DB2-BD59-A6C34878D82A}">
+                    <a16:rowId xmlns:a16="http://schemas.microsoft.com/office/drawing/2014/main" val="960208877"/>
+                  </a:ext>
+                </a:extLst>
+              </a:tr>
+              <a:tr h="321143">
+                <a:tc>
+                  <a:txBody>
+                    <a:bodyPr/>
+                    <a:lstStyle/>
+                    <a:p>
+                      <a:pPr>
+                        <a:buNone/>
+                      </a:pPr>
+                      <a:r>
+                        <a:rPr lang="en-GB"/>
+                        <a:t>Male</a:t>
+                      </a:r>
+                    </a:p>
+                  </a:txBody>
+                  <a:tcPr anchor="ctr"/>
+                </a:tc>
+                <a:tc>
+                  <a:txBody>
+                    <a:bodyPr/>
+                    <a:lstStyle/>
+                    <a:p>
+                      <a:pPr algn="r">
+                        <a:buNone/>
+                      </a:pPr>
+                      <a:r>
+                        <a:rPr lang="en-GB"/>
+                        <a:t>2,652</a:t>
+                      </a:r>
+                    </a:p>
+                  </a:txBody>
+                  <a:tcPr anchor="ctr"/>
+                </a:tc>
+                <a:tc>
+                  <a:txBody>
+                    <a:bodyPr/>
+                    <a:lstStyle/>
+                    <a:p>
+                      <a:pPr algn="r">
+                        <a:buNone/>
+                      </a:pPr>
+                      <a:r>
+                        <a:rPr lang="en-GB" dirty="0"/>
+                        <a:t>68.0%</a:t>
+                      </a:r>
+                    </a:p>
+                  </a:txBody>
+                  <a:tcPr anchor="ctr"/>
+                </a:tc>
+                <a:tc>
+                  <a:txBody>
+                    <a:bodyPr/>
+                    <a:lstStyle/>
+                    <a:p>
+                      <a:pPr algn="r">
+                        <a:buNone/>
+                      </a:pPr>
+                      <a:r>
+                        <a:rPr lang="en-GB"/>
+                        <a:t>£157,890</a:t>
+                      </a:r>
+                    </a:p>
+                  </a:txBody>
+                  <a:tcPr anchor="ctr"/>
+                </a:tc>
+                <a:tc>
+                  <a:txBody>
+                    <a:bodyPr/>
+                    <a:lstStyle/>
+                    <a:p>
+                      <a:pPr algn="r">
+                        <a:buNone/>
+                      </a:pPr>
+                      <a:r>
+                        <a:rPr lang="en-GB"/>
+                        <a:t>67.7%</a:t>
+                      </a:r>
+                    </a:p>
+                  </a:txBody>
+                  <a:tcPr anchor="ctr"/>
+                </a:tc>
+                <a:extLst>
+                  <a:ext uri="{0D108BD9-81ED-4DB2-BD59-A6C34878D82A}">
+                    <a16:rowId xmlns:a16="http://schemas.microsoft.com/office/drawing/2014/main" val="2097662950"/>
+                  </a:ext>
+                </a:extLst>
+              </a:tr>
+              <a:tr h="321143">
+                <a:tc>
+                  <a:txBody>
+                    <a:bodyPr/>
+                    <a:lstStyle/>
+                    <a:p>
+                      <a:pPr>
+                        <a:buNone/>
+                      </a:pPr>
+                      <a:r>
+                        <a:rPr lang="en-GB"/>
+                        <a:t>Female</a:t>
+                      </a:r>
+                    </a:p>
+                  </a:txBody>
+                  <a:tcPr anchor="ctr"/>
+                </a:tc>
+                <a:tc>
+                  <a:txBody>
+                    <a:bodyPr/>
+                    <a:lstStyle/>
+                    <a:p>
+                      <a:pPr algn="r">
+                        <a:buNone/>
+                      </a:pPr>
+                      <a:r>
+                        <a:rPr lang="en-GB"/>
+                        <a:t>1,248</a:t>
+                      </a:r>
+                    </a:p>
+                  </a:txBody>
+                  <a:tcPr anchor="ctr"/>
+                </a:tc>
+                <a:tc>
+                  <a:txBody>
+                    <a:bodyPr/>
+                    <a:lstStyle/>
+                    <a:p>
+                      <a:pPr algn="r">
+                        <a:buNone/>
+                      </a:pPr>
+                      <a:r>
+                        <a:rPr lang="en-GB" dirty="0"/>
+                        <a:t>32.0%</a:t>
+                      </a:r>
+                    </a:p>
+                  </a:txBody>
+                  <a:tcPr anchor="ctr"/>
+                </a:tc>
+                <a:tc>
+                  <a:txBody>
+                    <a:bodyPr/>
+                    <a:lstStyle/>
+                    <a:p>
+                      <a:pPr algn="r">
+                        <a:buNone/>
+                      </a:pPr>
+                      <a:r>
+                        <a:rPr lang="en-GB"/>
+                        <a:t>£75,191</a:t>
+                      </a:r>
+                    </a:p>
+                  </a:txBody>
+                  <a:tcPr anchor="ctr"/>
+                </a:tc>
+                <a:tc>
+                  <a:txBody>
+                    <a:bodyPr/>
+                    <a:lstStyle/>
+                    <a:p>
+                      <a:pPr algn="r">
+                        <a:buNone/>
+                      </a:pPr>
+                      <a:r>
+                        <a:rPr lang="en-GB"/>
+                        <a:t>32.3%</a:t>
+                      </a:r>
+                    </a:p>
+                  </a:txBody>
+                  <a:tcPr anchor="ctr"/>
+                </a:tc>
+                <a:extLst>
+                  <a:ext uri="{0D108BD9-81ED-4DB2-BD59-A6C34878D82A}">
+                    <a16:rowId xmlns:a16="http://schemas.microsoft.com/office/drawing/2014/main" val="661155143"/>
+                  </a:ext>
+                </a:extLst>
+              </a:tr>
+              <a:tr h="321143">
+                <a:tc>
+                  <a:txBody>
+                    <a:bodyPr/>
+                    <a:lstStyle/>
+                    <a:p>
+                      <a:pPr>
+                        <a:buNone/>
+                      </a:pPr>
+                      <a:r>
+                        <a:rPr lang="en-GB"/>
+                        <a:t>Total</a:t>
+                      </a:r>
+                    </a:p>
+                  </a:txBody>
+                  <a:tcPr anchor="ctr"/>
+                </a:tc>
+                <a:tc>
+                  <a:txBody>
+                    <a:bodyPr/>
+                    <a:lstStyle/>
+                    <a:p>
+                      <a:pPr algn="r">
+                        <a:buNone/>
+                      </a:pPr>
+                      <a:r>
+                        <a:rPr lang="en-GB"/>
+                        <a:t>3,900</a:t>
+                      </a:r>
+                    </a:p>
+                  </a:txBody>
+                  <a:tcPr anchor="ctr"/>
+                </a:tc>
+                <a:tc>
+                  <a:txBody>
+                    <a:bodyPr/>
+                    <a:lstStyle/>
+                    <a:p>
+                      <a:pPr algn="r">
+                        <a:buNone/>
+                      </a:pPr>
+                      <a:r>
+                        <a:rPr lang="en-GB"/>
+                        <a:t>100%</a:t>
+                      </a:r>
+                    </a:p>
+                  </a:txBody>
+                  <a:tcPr anchor="ctr"/>
+                </a:tc>
+                <a:tc>
+                  <a:txBody>
+                    <a:bodyPr/>
+                    <a:lstStyle/>
+                    <a:p>
+                      <a:pPr algn="r">
+                        <a:buNone/>
+                      </a:pPr>
+                      <a:r>
+                        <a:rPr lang="en-GB"/>
+                        <a:t>£233,081</a:t>
+                      </a:r>
+                    </a:p>
+                  </a:txBody>
+                  <a:tcPr anchor="ctr"/>
+                </a:tc>
+                <a:tc>
+                  <a:txBody>
+                    <a:bodyPr/>
+                    <a:lstStyle/>
+                    <a:p>
+                      <a:pPr algn="r">
+                        <a:buNone/>
+                      </a:pPr>
+                      <a:r>
+                        <a:rPr lang="en-GB" dirty="0"/>
+                        <a:t>100%</a:t>
+                      </a:r>
+                    </a:p>
+                  </a:txBody>
+                  <a:tcPr anchor="ctr"/>
+                </a:tc>
+                <a:extLst>
+                  <a:ext uri="{0D108BD9-81ED-4DB2-BD59-A6C34878D82A}">
+                    <a16:rowId xmlns:a16="http://schemas.microsoft.com/office/drawing/2014/main" val="2796850579"/>
+                  </a:ext>
+                </a:extLst>
+              </a:tr>
+            </a:tbl>
+          </a:graphicData>
+        </a:graphic>
+      </p:graphicFrame>
     </p:spTree>
   </p:cSld>
   <p:clrMapOvr>
@@ -12393,7 +12937,7 @@
           <a:p>
             <a:pPr algn="l"/>
             <a:r>
-              <a:rPr sz="2800" b="1">
+              <a:rPr lang="en-US" sz="2800" b="1" dirty="0">
                 <a:solidFill>
                   <a:srgbClr val="141F31"/>
                 </a:solidFill>
@@ -12401,6 +12945,12 @@
               </a:rPr>
               <a:t>Discounts do not automatically mean low-value baskets</a:t>
             </a:r>
+            <a:endParaRPr sz="2800" b="1" dirty="0">
+              <a:solidFill>
+                <a:srgbClr val="141F31"/>
+              </a:solidFill>
+              <a:latin typeface="Aptos"/>
+            </a:endParaRPr>
           </a:p>
         </p:txBody>
       </p:sp>
@@ -12412,7 +12962,7 @@
         </p:nvSpPr>
         <p:spPr>
           <a:xfrm>
-            <a:off x="658368" y="1033271"/>
+            <a:off x="658368" y="1356085"/>
             <a:ext cx="10424160" cy="384048"/>
           </a:xfrm>
           <a:prstGeom prst="rect">
@@ -12482,7 +13032,7 @@
         </p:nvSpPr>
         <p:spPr>
           <a:xfrm>
-            <a:off x="731520" y="1554480"/>
+            <a:off x="731520" y="1877294"/>
             <a:ext cx="2423160" cy="1078992"/>
           </a:xfrm>
           <a:prstGeom prst="roundRect">
@@ -12528,7 +13078,7 @@
         </p:nvSpPr>
         <p:spPr>
           <a:xfrm>
-            <a:off x="896112" y="1691639"/>
+            <a:off x="896112" y="2014453"/>
             <a:ext cx="2093976" cy="182880"/>
           </a:xfrm>
           <a:prstGeom prst="rect">
@@ -12563,7 +13113,7 @@
         </p:nvSpPr>
         <p:spPr>
           <a:xfrm>
-            <a:off x="896112" y="1911095"/>
+            <a:off x="896112" y="2233909"/>
             <a:ext cx="2093976" cy="393192"/>
           </a:xfrm>
           <a:prstGeom prst="rect">
@@ -12579,7 +13129,7 @@
           <a:p>
             <a:pPr algn="l"/>
             <a:r>
-              <a:rPr sz="2200" b="1">
+              <a:rPr sz="2200" b="1" dirty="0">
                 <a:solidFill>
                   <a:srgbClr val="141F31"/>
                 </a:solidFill>
@@ -12598,7 +13148,7 @@
         </p:nvSpPr>
         <p:spPr>
           <a:xfrm>
-            <a:off x="896112" y="2350008"/>
+            <a:off x="896112" y="2672822"/>
             <a:ext cx="2093976" cy="182880"/>
           </a:xfrm>
           <a:prstGeom prst="rect">
@@ -12633,7 +13183,7 @@
         </p:nvSpPr>
         <p:spPr>
           <a:xfrm>
-            <a:off x="731520" y="1554480"/>
+            <a:off x="731520" y="1877294"/>
             <a:ext cx="50292" cy="1078992"/>
           </a:xfrm>
           <a:prstGeom prst="rect">
@@ -12671,13 +13221,13 @@
       </p:sp>
       <p:sp>
         <p:nvSpPr>
-          <p:cNvPr id="11" name="Rounded Rectangle 10"/>
+          <p:cNvPr id="15" name="Rounded Rectangle 14"/>
           <p:cNvSpPr/>
           <p:nvPr/>
         </p:nvSpPr>
         <p:spPr>
           <a:xfrm>
-            <a:off x="3337560" y="1554480"/>
+            <a:off x="3447288" y="1877294"/>
             <a:ext cx="2423160" cy="1078992"/>
           </a:xfrm>
           <a:prstGeom prst="roundRect">
@@ -12717,13 +13267,13 @@
       </p:sp>
       <p:sp>
         <p:nvSpPr>
-          <p:cNvPr id="12" name="TextBox 11"/>
-          <p:cNvSpPr txBox="1"/>
-          <p:nvPr/>
-        </p:nvSpPr>
-        <p:spPr>
-          <a:xfrm>
-            <a:off x="3502152" y="1691639"/>
+          <p:cNvPr id="16" name="TextBox 15"/>
+          <p:cNvSpPr txBox="1"/>
+          <p:nvPr/>
+        </p:nvSpPr>
+        <p:spPr>
+          <a:xfrm>
+            <a:off x="3611880" y="2014453"/>
             <a:ext cx="2093976" cy="182880"/>
           </a:xfrm>
           <a:prstGeom prst="rect">
@@ -12745,20 +13295,20 @@
                 </a:solidFill>
                 <a:latin typeface="Aptos"/>
               </a:rPr>
-              <a:t>CUSTOMER BASE</a:t>
-            </a:r>
-          </a:p>
-        </p:txBody>
-      </p:sp>
-      <p:sp>
-        <p:nvSpPr>
-          <p:cNvPr id="13" name="TextBox 12"/>
-          <p:cNvSpPr txBox="1"/>
-          <p:nvPr/>
-        </p:nvSpPr>
-        <p:spPr>
-          <a:xfrm>
-            <a:off x="3502152" y="1911095"/>
+              <a:t>SHARE OF CUSTOMERS</a:t>
+            </a:r>
+          </a:p>
+        </p:txBody>
+      </p:sp>
+      <p:sp>
+        <p:nvSpPr>
+          <p:cNvPr id="17" name="TextBox 16"/>
+          <p:cNvSpPr txBox="1"/>
+          <p:nvPr/>
+        </p:nvSpPr>
+        <p:spPr>
+          <a:xfrm>
+            <a:off x="3611880" y="2233909"/>
             <a:ext cx="2093976" cy="393192"/>
           </a:xfrm>
           <a:prstGeom prst="rect">
@@ -12780,27 +13330,62 @@
                 </a:solidFill>
                 <a:latin typeface="Aptos"/>
               </a:rPr>
-              <a:t>3,900</a:t>
-            </a:r>
-          </a:p>
-        </p:txBody>
-      </p:sp>
-      <p:sp>
-        <p:nvSpPr>
-          <p:cNvPr id="14" name="Rectangle 13"/>
+              <a:t>21.5%</a:t>
+            </a:r>
+          </a:p>
+        </p:txBody>
+      </p:sp>
+      <p:sp>
+        <p:nvSpPr>
+          <p:cNvPr id="18" name="TextBox 17"/>
+          <p:cNvSpPr txBox="1"/>
+          <p:nvPr/>
+        </p:nvSpPr>
+        <p:spPr>
+          <a:xfrm>
+            <a:off x="3611880" y="2672822"/>
+            <a:ext cx="2093976" cy="182880"/>
+          </a:xfrm>
+          <a:prstGeom prst="rect">
+            <a:avLst/>
+          </a:prstGeom>
+          <a:noFill/>
+        </p:spPr>
+        <p:txBody>
+          <a:bodyPr wrap="square" anchor="t">
+            <a:spAutoFit/>
+          </a:bodyPr>
+          <a:lstStyle/>
+          <a:p>
+            <a:pPr algn="l"/>
+            <a:r>
+              <a:rPr sz="850" b="0">
+                <a:solidFill>
+                  <a:srgbClr val="64748B"/>
+                </a:solidFill>
+                <a:latin typeface="Aptos"/>
+              </a:rPr>
+              <a:t>of customer base</a:t>
+            </a:r>
+          </a:p>
+        </p:txBody>
+      </p:sp>
+      <p:sp>
+        <p:nvSpPr>
+          <p:cNvPr id="19" name="Rectangle 18"/>
           <p:cNvSpPr/>
           <p:nvPr/>
         </p:nvSpPr>
         <p:spPr>
           <a:xfrm>
-            <a:off x="3337560" y="1554480"/>
+            <a:off x="3447288" y="1877294"/>
             <a:ext cx="50292" cy="1078992"/>
           </a:xfrm>
           <a:prstGeom prst="rect">
             <a:avLst/>
           </a:prstGeom>
           <a:solidFill>
-            <a:srgbClr val="141F31"/>
+            <a:srgbClr val="1F8584"/>
           </a:solidFill>
           <a:ln>
             <a:noFill/>
@@ -12831,14 +13416,14 @@
       </p:sp>
       <p:sp>
         <p:nvSpPr>
-          <p:cNvPr id="15" name="Rounded Rectangle 14"/>
+          <p:cNvPr id="25" name="Rounded Rectangle 24"/>
           <p:cNvSpPr/>
           <p:nvPr/>
         </p:nvSpPr>
         <p:spPr>
           <a:xfrm>
-            <a:off x="5943600" y="1554480"/>
-            <a:ext cx="2423160" cy="1078992"/>
+            <a:off x="6910407" y="3856661"/>
+            <a:ext cx="4550074" cy="2148840"/>
           </a:xfrm>
           <a:prstGeom prst="roundRect">
             <a:avLst/>
@@ -12877,14 +13462,14 @@
       </p:sp>
       <p:sp>
         <p:nvSpPr>
-          <p:cNvPr id="16" name="TextBox 15"/>
-          <p:cNvSpPr txBox="1"/>
-          <p:nvPr/>
-        </p:nvSpPr>
-        <p:spPr>
-          <a:xfrm>
-            <a:off x="6108192" y="1691639"/>
-            <a:ext cx="2093976" cy="182880"/>
+          <p:cNvPr id="26" name="TextBox 25"/>
+          <p:cNvSpPr txBox="1"/>
+          <p:nvPr/>
+        </p:nvSpPr>
+        <p:spPr>
+          <a:xfrm>
+            <a:off x="7076867" y="4089276"/>
+            <a:ext cx="2520499" cy="369332"/>
           </a:xfrm>
           <a:prstGeom prst="rect">
             <a:avLst/>
@@ -12899,147 +13484,154 @@
           <a:p>
             <a:pPr algn="l"/>
             <a:r>
+              <a:rPr lang="en-GB" b="1" dirty="0">
+                <a:solidFill>
+                  <a:srgbClr val="1F8584"/>
+                </a:solidFill>
+                <a:latin typeface="Aptos"/>
+              </a:rPr>
+              <a:t>Recommendation</a:t>
+            </a:r>
+            <a:endParaRPr b="1" dirty="0">
+              <a:solidFill>
+                <a:srgbClr val="1F8584"/>
+              </a:solidFill>
+              <a:latin typeface="Aptos"/>
+            </a:endParaRPr>
+          </a:p>
+        </p:txBody>
+      </p:sp>
+      <p:sp>
+        <p:nvSpPr>
+          <p:cNvPr id="27" name="TextBox 26"/>
+          <p:cNvSpPr txBox="1"/>
+          <p:nvPr/>
+        </p:nvSpPr>
+        <p:spPr>
+          <a:xfrm>
+            <a:off x="7076868" y="4524173"/>
+            <a:ext cx="4265626" cy="1169551"/>
+          </a:xfrm>
+          <a:prstGeom prst="rect">
+            <a:avLst/>
+          </a:prstGeom>
+          <a:noFill/>
+        </p:spPr>
+        <p:txBody>
+          <a:bodyPr wrap="square" anchor="t">
+            <a:spAutoFit/>
+          </a:bodyPr>
+          <a:lstStyle/>
+          <a:p>
+            <a:pPr marL="285750" indent="-285750">
+              <a:buFont typeface="Arial" panose="020B0604020202020204" pitchFamily="34" charset="0"/>
+              <a:buChar char="•"/>
+            </a:pPr>
+            <a:r>
+              <a:rPr lang="en-US" sz="1400" b="1" dirty="0">
+                <a:solidFill>
+                  <a:srgbClr val="141F31"/>
+                </a:solidFill>
+                <a:latin typeface="Aptos"/>
+              </a:rPr>
+              <a:t>Use targeted discounts to encourage higher-value purchases and customer conversion, rather than relying on blanket discounts.</a:t>
+            </a:r>
+          </a:p>
+          <a:p>
+            <a:pPr marL="285750" indent="-285750">
+              <a:buFont typeface="Arial" panose="020B0604020202020204" pitchFamily="34" charset="0"/>
+              <a:buChar char="•"/>
+            </a:pPr>
+            <a:r>
+              <a:rPr lang="en-US" sz="1400" b="1" dirty="0">
+                <a:solidFill>
+                  <a:srgbClr val="141F31"/>
+                </a:solidFill>
+                <a:latin typeface="Aptos"/>
+              </a:rPr>
+              <a:t>Test minimum-spend thresholds bundles.</a:t>
+            </a:r>
+          </a:p>
+          <a:p>
+            <a:pPr marL="285750" indent="-285750">
+              <a:buFont typeface="Arial" panose="020B0604020202020204" pitchFamily="34" charset="0"/>
+              <a:buChar char="•"/>
+            </a:pPr>
+            <a:r>
+              <a:rPr lang="en-US" sz="1400" b="1" dirty="0">
+                <a:solidFill>
+                  <a:srgbClr val="141F31"/>
+                </a:solidFill>
+                <a:latin typeface="Aptos"/>
+              </a:rPr>
+              <a:t>Incorporate discounts into subscription model</a:t>
+            </a:r>
+            <a:endParaRPr sz="1400" b="1" dirty="0">
+              <a:solidFill>
+                <a:srgbClr val="141F31"/>
+              </a:solidFill>
+              <a:latin typeface="Aptos"/>
+            </a:endParaRPr>
+          </a:p>
+        </p:txBody>
+      </p:sp>
+      <p:sp>
+        <p:nvSpPr>
+          <p:cNvPr id="29" name="TextBox 28"/>
+          <p:cNvSpPr txBox="1"/>
+          <p:nvPr/>
+        </p:nvSpPr>
+        <p:spPr>
+          <a:xfrm>
+            <a:off x="10972800" y="6473952"/>
+            <a:ext cx="502920" cy="228600"/>
+          </a:xfrm>
+          <a:prstGeom prst="rect">
+            <a:avLst/>
+          </a:prstGeom>
+          <a:noFill/>
+        </p:spPr>
+        <p:txBody>
+          <a:bodyPr wrap="square" anchor="t">
+            <a:spAutoFit/>
+          </a:bodyPr>
+          <a:lstStyle/>
+          <a:p>
+            <a:pPr algn="r"/>
+            <a:r>
               <a:rPr sz="850" b="1">
                 <a:solidFill>
                   <a:srgbClr val="64748B"/>
                 </a:solidFill>
                 <a:latin typeface="Aptos"/>
               </a:rPr>
-              <a:t>SHARE OF CUSTOMERS</a:t>
-            </a:r>
-          </a:p>
-        </p:txBody>
-      </p:sp>
-      <p:sp>
-        <p:nvSpPr>
-          <p:cNvPr id="17" name="TextBox 16"/>
-          <p:cNvSpPr txBox="1"/>
-          <p:nvPr/>
-        </p:nvSpPr>
-        <p:spPr>
-          <a:xfrm>
-            <a:off x="6108192" y="1911095"/>
-            <a:ext cx="2093976" cy="393192"/>
-          </a:xfrm>
-          <a:prstGeom prst="rect">
-            <a:avLst/>
-          </a:prstGeom>
-          <a:noFill/>
-        </p:spPr>
-        <p:txBody>
-          <a:bodyPr wrap="square" anchor="t">
-            <a:spAutoFit/>
-          </a:bodyPr>
-          <a:lstStyle/>
-          <a:p>
-            <a:pPr algn="l"/>
-            <a:r>
-              <a:rPr sz="2200" b="1">
-                <a:solidFill>
-                  <a:srgbClr val="141F31"/>
-                </a:solidFill>
-                <a:latin typeface="Aptos"/>
-              </a:rPr>
-              <a:t>21.5%</a:t>
-            </a:r>
-          </a:p>
-        </p:txBody>
-      </p:sp>
-      <p:sp>
-        <p:nvSpPr>
-          <p:cNvPr id="18" name="TextBox 17"/>
-          <p:cNvSpPr txBox="1"/>
-          <p:nvPr/>
-        </p:nvSpPr>
-        <p:spPr>
-          <a:xfrm>
-            <a:off x="6108192" y="2350008"/>
-            <a:ext cx="2093976" cy="182880"/>
-          </a:xfrm>
-          <a:prstGeom prst="rect">
-            <a:avLst/>
-          </a:prstGeom>
-          <a:noFill/>
-        </p:spPr>
-        <p:txBody>
-          <a:bodyPr wrap="square" anchor="t">
-            <a:spAutoFit/>
-          </a:bodyPr>
-          <a:lstStyle/>
-          <a:p>
-            <a:pPr algn="l"/>
-            <a:r>
-              <a:rPr sz="850" b="0">
-                <a:solidFill>
-                  <a:srgbClr val="64748B"/>
-                </a:solidFill>
-                <a:latin typeface="Aptos"/>
-              </a:rPr>
-              <a:t>of customer base</a:t>
-            </a:r>
-          </a:p>
-        </p:txBody>
-      </p:sp>
-      <p:sp>
-        <p:nvSpPr>
-          <p:cNvPr id="19" name="Rectangle 18"/>
+              <a:t>05</a:t>
+            </a:r>
+          </a:p>
+        </p:txBody>
+      </p:sp>
+      <p:sp>
+        <p:nvSpPr>
+          <p:cNvPr id="44" name="Rounded Rectangle 18">
+            <a:extLst>
+              <a:ext uri="{FF2B5EF4-FFF2-40B4-BE49-F238E27FC236}">
+                <a16:creationId xmlns:a16="http://schemas.microsoft.com/office/drawing/2014/main" id="{A1C08F83-E3E9-FF19-1082-8BEB93CAF919}"/>
+              </a:ext>
+            </a:extLst>
+          </p:cNvPr>
           <p:cNvSpPr/>
           <p:nvPr/>
         </p:nvSpPr>
         <p:spPr>
           <a:xfrm>
-            <a:off x="5943600" y="1554480"/>
-            <a:ext cx="50292" cy="1078992"/>
-          </a:xfrm>
-          <a:prstGeom prst="rect">
+            <a:off x="658368" y="3856661"/>
+            <a:ext cx="5905648" cy="2148840"/>
+          </a:xfrm>
+          <a:prstGeom prst="roundRect">
             <a:avLst/>
           </a:prstGeom>
           <a:solidFill>
-            <a:srgbClr val="1F8584"/>
-          </a:solidFill>
-          <a:ln>
-            <a:noFill/>
-          </a:ln>
-        </p:spPr>
-        <p:style>
-          <a:lnRef idx="1">
-            <a:schemeClr val="accent1"/>
-          </a:lnRef>
-          <a:fillRef idx="3">
-            <a:schemeClr val="accent1"/>
-          </a:fillRef>
-          <a:effectRef idx="2">
-            <a:schemeClr val="accent1"/>
-          </a:effectRef>
-          <a:fontRef idx="minor">
-            <a:schemeClr val="lt1"/>
-          </a:fontRef>
-        </p:style>
-        <p:txBody>
-          <a:bodyPr rtlCol="0" anchor="ctr"/>
-          <a:lstStyle/>
-          <a:p>
-            <a:pPr algn="ctr"/>
-            <a:endParaRPr/>
-          </a:p>
-        </p:txBody>
-      </p:sp>
-      <p:sp>
-        <p:nvSpPr>
-          <p:cNvPr id="20" name="Rounded Rectangle 19"/>
-          <p:cNvSpPr/>
-          <p:nvPr/>
-        </p:nvSpPr>
-        <p:spPr>
-          <a:xfrm>
-            <a:off x="8549640" y="1554480"/>
-            <a:ext cx="2788920" cy="1078992"/>
-          </a:xfrm>
-          <a:prstGeom prst="roundRect">
-            <a:avLst/>
-          </a:prstGeom>
-          <a:solidFill>
-            <a:srgbClr val="FAEDDC"/>
+            <a:srgbClr val="E2ECF9"/>
           </a:solidFill>
           <a:ln w="8890">
             <a:solidFill>
@@ -13072,14 +13664,20 @@
       </p:sp>
       <p:sp>
         <p:nvSpPr>
-          <p:cNvPr id="21" name="TextBox 20"/>
-          <p:cNvSpPr txBox="1"/>
-          <p:nvPr/>
-        </p:nvSpPr>
-        <p:spPr>
-          <a:xfrm>
-            <a:off x="8778240" y="1746504"/>
-            <a:ext cx="731520" cy="182880"/>
+          <p:cNvPr id="46" name="TextBox 45">
+            <a:extLst>
+              <a:ext uri="{FF2B5EF4-FFF2-40B4-BE49-F238E27FC236}">
+                <a16:creationId xmlns:a16="http://schemas.microsoft.com/office/drawing/2014/main" id="{CB71B0D4-C528-8414-9405-758C26E9BDE7}"/>
+              </a:ext>
+            </a:extLst>
+          </p:cNvPr>
+          <p:cNvSpPr txBox="1"/>
+          <p:nvPr/>
+        </p:nvSpPr>
+        <p:spPr>
+          <a:xfrm>
+            <a:off x="896112" y="4021472"/>
+            <a:ext cx="1828800" cy="292388"/>
           </a:xfrm>
           <a:prstGeom prst="rect">
             <a:avLst/>
@@ -13094,97 +13692,33 @@
           <a:p>
             <a:pPr algn="l"/>
             <a:r>
-              <a:rPr sz="850" b="1">
-                <a:solidFill>
-                  <a:srgbClr val="E1822D"/>
-                </a:solidFill>
-                <a:latin typeface="Aptos"/>
-              </a:rPr>
-              <a:t>SIGNAL</a:t>
-            </a:r>
-          </a:p>
-        </p:txBody>
-      </p:sp>
-      <p:sp>
-        <p:nvSpPr>
-          <p:cNvPr id="22" name="TextBox 21"/>
-          <p:cNvSpPr txBox="1"/>
-          <p:nvPr/>
-        </p:nvSpPr>
-        <p:spPr>
-          <a:xfrm>
-            <a:off x="8778240" y="2057400"/>
-            <a:ext cx="2331720" cy="438912"/>
-          </a:xfrm>
-          <a:prstGeom prst="rect">
-            <a:avLst/>
-          </a:prstGeom>
-          <a:noFill/>
-        </p:spPr>
-        <p:txBody>
-          <a:bodyPr wrap="square" anchor="t">
-            <a:spAutoFit/>
-          </a:bodyPr>
-          <a:lstStyle/>
-          <a:p>
-            <a:pPr algn="l"/>
-            <a:r>
-              <a:rPr sz="1100" b="1">
-                <a:solidFill>
-                  <a:srgbClr val="141F31"/>
-                </a:solidFill>
-                <a:latin typeface="Aptos"/>
-              </a:rPr>
-              <a:t>Promotions may be helping unlock larger baskets.</a:t>
-            </a:r>
-          </a:p>
-        </p:txBody>
-      </p:sp>
-      <p:sp>
-        <p:nvSpPr>
-          <p:cNvPr id="23" name="TextBox 22"/>
-          <p:cNvSpPr txBox="1"/>
-          <p:nvPr/>
-        </p:nvSpPr>
-        <p:spPr>
-          <a:xfrm>
-            <a:off x="777240" y="3063240"/>
-            <a:ext cx="2743200" cy="274320"/>
-          </a:xfrm>
-          <a:prstGeom prst="rect">
-            <a:avLst/>
-          </a:prstGeom>
-          <a:noFill/>
-        </p:spPr>
-        <p:txBody>
-          <a:bodyPr wrap="square" anchor="t">
-            <a:spAutoFit/>
-          </a:bodyPr>
-          <a:lstStyle/>
-          <a:p>
-            <a:pPr algn="l"/>
-            <a:r>
-              <a:rPr sz="1200" b="1">
+              <a:rPr sz="1300" b="1" dirty="0">
                 <a:solidFill>
                   <a:srgbClr val="2A64AA"/>
                 </a:solidFill>
                 <a:latin typeface="Aptos"/>
               </a:rPr>
-              <a:t>Commercial implication</a:t>
-            </a:r>
-          </a:p>
-        </p:txBody>
-      </p:sp>
-      <p:sp>
-        <p:nvSpPr>
-          <p:cNvPr id="24" name="TextBox 23"/>
-          <p:cNvSpPr txBox="1"/>
-          <p:nvPr/>
-        </p:nvSpPr>
-        <p:spPr>
-          <a:xfrm>
-            <a:off x="777240" y="3456432"/>
-            <a:ext cx="4937760" cy="1554480"/>
+              <a:t>WHAT IT MEANS</a:t>
+            </a:r>
+          </a:p>
+        </p:txBody>
+      </p:sp>
+      <p:sp>
+        <p:nvSpPr>
+          <p:cNvPr id="48" name="TextBox 47">
+            <a:extLst>
+              <a:ext uri="{FF2B5EF4-FFF2-40B4-BE49-F238E27FC236}">
+                <a16:creationId xmlns:a16="http://schemas.microsoft.com/office/drawing/2014/main" id="{701C47C8-E8F6-08D6-9DEC-283511F439FD}"/>
+              </a:ext>
+            </a:extLst>
+          </p:cNvPr>
+          <p:cNvSpPr txBox="1"/>
+          <p:nvPr/>
+        </p:nvSpPr>
+        <p:spPr>
+          <a:xfrm>
+            <a:off x="896112" y="4458607"/>
+            <a:ext cx="5475191" cy="1056700"/>
           </a:xfrm>
           <a:prstGeom prst="rect">
             <a:avLst/>
@@ -13197,11 +13731,13 @@
           </a:bodyPr>
           <a:lstStyle/>
           <a:p>
-            <a:pPr>
+            <a:pPr marL="285750" indent="-285750">
               <a:spcAft>
                 <a:spcPts val="800"/>
               </a:spcAft>
-              <a:defRPr sz="1200">
+              <a:buFont typeface="Arial" panose="020B0604020202020204" pitchFamily="34" charset="0"/>
+              <a:buChar char="•"/>
+              <a:defRPr sz="1050">
                 <a:solidFill>
                   <a:srgbClr val="1F2937"/>
                 </a:solidFill>
@@ -13209,15 +13745,18 @@
               </a:defRPr>
             </a:pPr>
             <a:r>
-              <a:t>• Prioritise targeted discounts over universal markdowns.</a:t>
-            </a:r>
-          </a:p>
-          <a:p>
-            <a:pPr>
+              <a:rPr lang="en-US" sz="1400" dirty="0"/>
+              <a:t>Discounts may motivate customers to make larger purchases (e.g., adding more products to reach a higher spending threshold)</a:t>
+            </a:r>
+          </a:p>
+          <a:p>
+            <a:pPr marL="285750" indent="-285750">
               <a:spcAft>
                 <a:spcPts val="800"/>
               </a:spcAft>
-              <a:defRPr sz="1200">
+              <a:buFont typeface="Arial" panose="020B0604020202020204" pitchFamily="34" charset="0"/>
+              <a:buChar char="•"/>
+              <a:defRPr sz="1050">
                 <a:solidFill>
                   <a:srgbClr val="1F2937"/>
                 </a:solidFill>
@@ -13225,175 +13764,8 @@
               </a:defRPr>
             </a:pPr>
             <a:r>
-              <a:t>• Test minimum-spend thresholds and bundles.</a:t>
-            </a:r>
-          </a:p>
-          <a:p>
-            <a:pPr>
-              <a:spcAft>
-                <a:spcPts val="800"/>
-              </a:spcAft>
-              <a:defRPr sz="1200">
-                <a:solidFill>
-                  <a:srgbClr val="1F2937"/>
-                </a:solidFill>
-                <a:latin typeface="Aptos"/>
-              </a:defRPr>
-            </a:pPr>
-            <a:r>
-              <a:t>• Measure incremental revenue and margin—not just conversion.</a:t>
-            </a:r>
-          </a:p>
-        </p:txBody>
-      </p:sp>
-      <p:sp>
-        <p:nvSpPr>
-          <p:cNvPr id="25" name="Rounded Rectangle 24"/>
-          <p:cNvSpPr/>
-          <p:nvPr/>
-        </p:nvSpPr>
-        <p:spPr>
-          <a:xfrm>
-            <a:off x="6172200" y="3063240"/>
-            <a:ext cx="5166360" cy="2148840"/>
-          </a:xfrm>
-          <a:prstGeom prst="roundRect">
-            <a:avLst/>
-          </a:prstGeom>
-          <a:solidFill>
-            <a:srgbClr val="FFFFFF"/>
-          </a:solidFill>
-          <a:ln w="8890">
-            <a:solidFill>
-              <a:srgbClr val="E1E7EF"/>
-            </a:solidFill>
-          </a:ln>
-        </p:spPr>
-        <p:style>
-          <a:lnRef idx="1">
-            <a:schemeClr val="accent1"/>
-          </a:lnRef>
-          <a:fillRef idx="3">
-            <a:schemeClr val="accent1"/>
-          </a:fillRef>
-          <a:effectRef idx="2">
-            <a:schemeClr val="accent1"/>
-          </a:effectRef>
-          <a:fontRef idx="minor">
-            <a:schemeClr val="lt1"/>
-          </a:fontRef>
-        </p:style>
-        <p:txBody>
-          <a:bodyPr rtlCol="0" anchor="ctr"/>
-          <a:lstStyle/>
-          <a:p>
-            <a:pPr algn="ctr"/>
-            <a:endParaRPr/>
-          </a:p>
-        </p:txBody>
-      </p:sp>
-      <p:sp>
-        <p:nvSpPr>
-          <p:cNvPr id="26" name="TextBox 25"/>
-          <p:cNvSpPr txBox="1"/>
-          <p:nvPr/>
-        </p:nvSpPr>
-        <p:spPr>
-          <a:xfrm>
-            <a:off x="6446520" y="3337560"/>
-            <a:ext cx="1828800" cy="228600"/>
-          </a:xfrm>
-          <a:prstGeom prst="rect">
-            <a:avLst/>
-          </a:prstGeom>
-          <a:noFill/>
-        </p:spPr>
-        <p:txBody>
-          <a:bodyPr wrap="square" anchor="t">
-            <a:spAutoFit/>
-          </a:bodyPr>
-          <a:lstStyle/>
-          <a:p>
-            <a:pPr algn="l"/>
-            <a:r>
-              <a:rPr sz="900" b="1">
-                <a:solidFill>
-                  <a:srgbClr val="1F8584"/>
-                </a:solidFill>
-                <a:latin typeface="Aptos"/>
-              </a:rPr>
-              <a:t>Decision question</a:t>
-            </a:r>
-          </a:p>
-        </p:txBody>
-      </p:sp>
-      <p:sp>
-        <p:nvSpPr>
-          <p:cNvPr id="27" name="TextBox 26"/>
-          <p:cNvSpPr txBox="1"/>
-          <p:nvPr/>
-        </p:nvSpPr>
-        <p:spPr>
-          <a:xfrm>
-            <a:off x="6446520" y="3730752"/>
-            <a:ext cx="4480560" cy="685800"/>
-          </a:xfrm>
-          <a:prstGeom prst="rect">
-            <a:avLst/>
-          </a:prstGeom>
-          <a:noFill/>
-        </p:spPr>
-        <p:txBody>
-          <a:bodyPr wrap="square" anchor="t">
-            <a:spAutoFit/>
-          </a:bodyPr>
-          <a:lstStyle/>
-          <a:p>
-            <a:pPr algn="l"/>
-            <a:r>
-              <a:rPr sz="1800" b="1">
-                <a:solidFill>
-                  <a:srgbClr val="141F31"/>
-                </a:solidFill>
-                <a:latin typeface="Aptos"/>
-              </a:rPr>
-              <a:t>Which discount mechanics create
-incremental spend without eroding margin?</a:t>
-            </a:r>
-          </a:p>
-        </p:txBody>
-      </p:sp>
-      <p:sp>
-        <p:nvSpPr>
-          <p:cNvPr id="29" name="TextBox 28"/>
-          <p:cNvSpPr txBox="1"/>
-          <p:nvPr/>
-        </p:nvSpPr>
-        <p:spPr>
-          <a:xfrm>
-            <a:off x="10972800" y="6473952"/>
-            <a:ext cx="502920" cy="228600"/>
-          </a:xfrm>
-          <a:prstGeom prst="rect">
-            <a:avLst/>
-          </a:prstGeom>
-          <a:noFill/>
-        </p:spPr>
-        <p:txBody>
-          <a:bodyPr wrap="square" anchor="t">
-            <a:spAutoFit/>
-          </a:bodyPr>
-          <a:lstStyle/>
-          <a:p>
-            <a:pPr algn="r"/>
-            <a:r>
-              <a:rPr sz="850" b="1">
-                <a:solidFill>
-                  <a:srgbClr val="64748B"/>
-                </a:solidFill>
-                <a:latin typeface="Aptos"/>
-              </a:rPr>
-              <a:t>05</a:t>
+              <a:rPr lang="en-US" sz="1400" dirty="0"/>
+              <a:t>We can research shopping habits of these 839 customers to create more targeted campaigns</a:t>
             </a:r>
           </a:p>
         </p:txBody>
@@ -13476,7 +13848,7 @@
         <p:spPr>
           <a:xfrm>
             <a:off x="640080" y="438912"/>
-            <a:ext cx="10698480" cy="566928"/>
+            <a:ext cx="10698480" cy="523220"/>
           </a:xfrm>
           <a:prstGeom prst="rect">
             <a:avLst/>
@@ -13491,49 +13863,20 @@
           <a:p>
             <a:pPr algn="l"/>
             <a:r>
-              <a:rPr sz="2800" b="1">
+              <a:rPr lang="en-GB" sz="2800" b="1" dirty="0">
                 <a:solidFill>
                   <a:srgbClr val="141F31"/>
                 </a:solidFill>
                 <a:latin typeface="Aptos"/>
               </a:rPr>
-              <a:t>A small group of products leads on review ratings</a:t>
-            </a:r>
-          </a:p>
-        </p:txBody>
-      </p:sp>
-      <p:sp>
-        <p:nvSpPr>
-          <p:cNvPr id="4" name="TextBox 3"/>
-          <p:cNvSpPr txBox="1"/>
-          <p:nvPr/>
-        </p:nvSpPr>
-        <p:spPr>
-          <a:xfrm>
-            <a:off x="658368" y="1033271"/>
-            <a:ext cx="10424160" cy="384048"/>
-          </a:xfrm>
-          <a:prstGeom prst="rect">
-            <a:avLst/>
-          </a:prstGeom>
-          <a:noFill/>
-        </p:spPr>
-        <p:txBody>
-          <a:bodyPr wrap="square" anchor="t">
-            <a:spAutoFit/>
-          </a:bodyPr>
-          <a:lstStyle/>
-          <a:p>
-            <a:pPr algn="l"/>
-            <a:r>
-              <a:rPr sz="1250" b="0">
-                <a:solidFill>
-                  <a:srgbClr val="64748B"/>
-                </a:solidFill>
-                <a:latin typeface="Aptos"/>
-              </a:rPr>
-              <a:t>The top five rated products are useful candidates for trust-led merchandising.</a:t>
-            </a:r>
+              <a:t>Top 5 products with highest average ratings</a:t>
+            </a:r>
+            <a:endParaRPr sz="2800" b="1" dirty="0">
+              <a:solidFill>
+                <a:srgbClr val="141F31"/>
+              </a:solidFill>
+              <a:latin typeface="Aptos"/>
+            </a:endParaRPr>
           </a:p>
         </p:txBody>
       </p:sp>
@@ -13572,24 +13915,6 @@
           </a:p>
         </p:txBody>
       </p:sp>
-      <p:graphicFrame>
-        <p:nvGraphicFramePr>
-          <p:cNvPr id="6" name="Chart 5"/>
-          <p:cNvGraphicFramePr>
-            <a:graphicFrameLocks noGrp="1"/>
-          </p:cNvGraphicFramePr>
-          <p:nvPr/>
-        </p:nvGraphicFramePr>
-        <p:xfrm>
-          <a:off x="731520" y="1600200"/>
-          <a:ext cx="5943600" cy="4389120"/>
-        </p:xfrm>
-        <a:graphic>
-          <a:graphicData uri="http://schemas.openxmlformats.org/drawingml/2006/chart">
-            <c:chart xmlns:c="http://schemas.openxmlformats.org/drawingml/2006/chart" xmlns:r="http://schemas.openxmlformats.org/officeDocument/2006/relationships" r:id="rId2"/>
-          </a:graphicData>
-        </a:graphic>
-      </p:graphicFrame>
       <p:sp>
         <p:nvSpPr>
           <p:cNvPr id="7" name="Rounded Rectangle 6"/>
@@ -13598,8 +13923,8 @@
         </p:nvSpPr>
         <p:spPr>
           <a:xfrm>
-            <a:off x="6949440" y="1600200"/>
-            <a:ext cx="4389120" cy="4389120"/>
+            <a:off x="640080" y="1330304"/>
+            <a:ext cx="4389120" cy="3333136"/>
           </a:xfrm>
           <a:prstGeom prst="roundRect">
             <a:avLst/>
@@ -13638,14 +13963,14 @@
       </p:sp>
       <p:sp>
         <p:nvSpPr>
-          <p:cNvPr id="8" name="TextBox 7"/>
-          <p:cNvSpPr txBox="1"/>
-          <p:nvPr/>
-        </p:nvSpPr>
-        <p:spPr>
-          <a:xfrm>
-            <a:off x="7223760" y="1874519"/>
-            <a:ext cx="914400" cy="228600"/>
+          <p:cNvPr id="9" name="TextBox 8"/>
+          <p:cNvSpPr txBox="1"/>
+          <p:nvPr/>
+        </p:nvSpPr>
+        <p:spPr>
+          <a:xfrm>
+            <a:off x="914400" y="1742669"/>
+            <a:ext cx="411480" cy="274320"/>
           </a:xfrm>
           <a:prstGeom prst="rect">
             <a:avLst/>
@@ -13660,26 +13985,96 @@
           <a:p>
             <a:pPr algn="l"/>
             <a:r>
-              <a:rPr sz="900" b="1">
+              <a:rPr sz="1200" b="1">
                 <a:solidFill>
                   <a:srgbClr val="1F8584"/>
                 </a:solidFill>
                 <a:latin typeface="Aptos"/>
               </a:rPr>
-              <a:t>TOP 5</a:t>
-            </a:r>
-          </a:p>
-        </p:txBody>
-      </p:sp>
-      <p:sp>
-        <p:nvSpPr>
-          <p:cNvPr id="9" name="TextBox 8"/>
-          <p:cNvSpPr txBox="1"/>
-          <p:nvPr/>
-        </p:nvSpPr>
-        <p:spPr>
-          <a:xfrm>
-            <a:off x="7223760" y="2359152"/>
+              <a:t>01</a:t>
+            </a:r>
+          </a:p>
+        </p:txBody>
+      </p:sp>
+      <p:sp>
+        <p:nvSpPr>
+          <p:cNvPr id="10" name="TextBox 9"/>
+          <p:cNvSpPr txBox="1"/>
+          <p:nvPr/>
+        </p:nvSpPr>
+        <p:spPr>
+          <a:xfrm>
+            <a:off x="1463040" y="1742669"/>
+            <a:ext cx="2468880" cy="274320"/>
+          </a:xfrm>
+          <a:prstGeom prst="rect">
+            <a:avLst/>
+          </a:prstGeom>
+          <a:noFill/>
+        </p:spPr>
+        <p:txBody>
+          <a:bodyPr wrap="square" anchor="t">
+            <a:spAutoFit/>
+          </a:bodyPr>
+          <a:lstStyle/>
+          <a:p>
+            <a:pPr algn="l"/>
+            <a:r>
+              <a:rPr sz="1400" b="1">
+                <a:solidFill>
+                  <a:srgbClr val="141F31"/>
+                </a:solidFill>
+                <a:latin typeface="Aptos"/>
+              </a:rPr>
+              <a:t>Gloves</a:t>
+            </a:r>
+          </a:p>
+        </p:txBody>
+      </p:sp>
+      <p:sp>
+        <p:nvSpPr>
+          <p:cNvPr id="11" name="TextBox 10"/>
+          <p:cNvSpPr txBox="1"/>
+          <p:nvPr/>
+        </p:nvSpPr>
+        <p:spPr>
+          <a:xfrm>
+            <a:off x="4023360" y="1742669"/>
+            <a:ext cx="594360" cy="274320"/>
+          </a:xfrm>
+          <a:prstGeom prst="rect">
+            <a:avLst/>
+          </a:prstGeom>
+          <a:noFill/>
+        </p:spPr>
+        <p:txBody>
+          <a:bodyPr wrap="square" anchor="t">
+            <a:spAutoFit/>
+          </a:bodyPr>
+          <a:lstStyle/>
+          <a:p>
+            <a:pPr algn="r"/>
+            <a:r>
+              <a:rPr sz="1200" b="1">
+                <a:solidFill>
+                  <a:srgbClr val="1F2937"/>
+                </a:solidFill>
+                <a:latin typeface="Aptos"/>
+              </a:rPr>
+              <a:t>3.86</a:t>
+            </a:r>
+          </a:p>
+        </p:txBody>
+      </p:sp>
+      <p:sp>
+        <p:nvSpPr>
+          <p:cNvPr id="12" name="TextBox 11"/>
+          <p:cNvSpPr txBox="1"/>
+          <p:nvPr/>
+        </p:nvSpPr>
+        <p:spPr>
+          <a:xfrm>
+            <a:off x="914400" y="2318741"/>
             <a:ext cx="411480" cy="274320"/>
           </a:xfrm>
           <a:prstGeom prst="rect">
@@ -13701,20 +14096,20 @@
                 </a:solidFill>
                 <a:latin typeface="Aptos"/>
               </a:rPr>
-              <a:t>01</a:t>
-            </a:r>
-          </a:p>
-        </p:txBody>
-      </p:sp>
-      <p:sp>
-        <p:nvSpPr>
-          <p:cNvPr id="10" name="TextBox 9"/>
-          <p:cNvSpPr txBox="1"/>
-          <p:nvPr/>
-        </p:nvSpPr>
-        <p:spPr>
-          <a:xfrm>
-            <a:off x="7772400" y="2359152"/>
+              <a:t>02</a:t>
+            </a:r>
+          </a:p>
+        </p:txBody>
+      </p:sp>
+      <p:sp>
+        <p:nvSpPr>
+          <p:cNvPr id="13" name="TextBox 12"/>
+          <p:cNvSpPr txBox="1"/>
+          <p:nvPr/>
+        </p:nvSpPr>
+        <p:spPr>
+          <a:xfrm>
+            <a:off x="1463040" y="2318741"/>
             <a:ext cx="2468880" cy="274320"/>
           </a:xfrm>
           <a:prstGeom prst="rect">
@@ -13736,20 +14131,20 @@
                 </a:solidFill>
                 <a:latin typeface="Aptos"/>
               </a:rPr>
-              <a:t>Gloves</a:t>
-            </a:r>
-          </a:p>
-        </p:txBody>
-      </p:sp>
-      <p:sp>
-        <p:nvSpPr>
-          <p:cNvPr id="11" name="TextBox 10"/>
-          <p:cNvSpPr txBox="1"/>
-          <p:nvPr/>
-        </p:nvSpPr>
-        <p:spPr>
-          <a:xfrm>
-            <a:off x="10332720" y="2359152"/>
+              <a:t>Sandals</a:t>
+            </a:r>
+          </a:p>
+        </p:txBody>
+      </p:sp>
+      <p:sp>
+        <p:nvSpPr>
+          <p:cNvPr id="14" name="TextBox 13"/>
+          <p:cNvSpPr txBox="1"/>
+          <p:nvPr/>
+        </p:nvSpPr>
+        <p:spPr>
+          <a:xfrm>
+            <a:off x="4023360" y="2318741"/>
             <a:ext cx="594360" cy="274320"/>
           </a:xfrm>
           <a:prstGeom prst="rect">
@@ -13771,20 +14166,20 @@
                 </a:solidFill>
                 <a:latin typeface="Aptos"/>
               </a:rPr>
-              <a:t>3.86</a:t>
-            </a:r>
-          </a:p>
-        </p:txBody>
-      </p:sp>
-      <p:sp>
-        <p:nvSpPr>
-          <p:cNvPr id="12" name="TextBox 11"/>
-          <p:cNvSpPr txBox="1"/>
-          <p:nvPr/>
-        </p:nvSpPr>
-        <p:spPr>
-          <a:xfrm>
-            <a:off x="7223760" y="2935224"/>
+              <a:t>3.84</a:t>
+            </a:r>
+          </a:p>
+        </p:txBody>
+      </p:sp>
+      <p:sp>
+        <p:nvSpPr>
+          <p:cNvPr id="15" name="TextBox 14"/>
+          <p:cNvSpPr txBox="1"/>
+          <p:nvPr/>
+        </p:nvSpPr>
+        <p:spPr>
+          <a:xfrm>
+            <a:off x="914400" y="2894813"/>
             <a:ext cx="411480" cy="274320"/>
           </a:xfrm>
           <a:prstGeom prst="rect">
@@ -13806,20 +14201,20 @@
                 </a:solidFill>
                 <a:latin typeface="Aptos"/>
               </a:rPr>
-              <a:t>02</a:t>
-            </a:r>
-          </a:p>
-        </p:txBody>
-      </p:sp>
-      <p:sp>
-        <p:nvSpPr>
-          <p:cNvPr id="13" name="TextBox 12"/>
-          <p:cNvSpPr txBox="1"/>
-          <p:nvPr/>
-        </p:nvSpPr>
-        <p:spPr>
-          <a:xfrm>
-            <a:off x="7772400" y="2935224"/>
+              <a:t>03</a:t>
+            </a:r>
+          </a:p>
+        </p:txBody>
+      </p:sp>
+      <p:sp>
+        <p:nvSpPr>
+          <p:cNvPr id="16" name="TextBox 15"/>
+          <p:cNvSpPr txBox="1"/>
+          <p:nvPr/>
+        </p:nvSpPr>
+        <p:spPr>
+          <a:xfrm>
+            <a:off x="1463040" y="2894813"/>
             <a:ext cx="2468880" cy="274320"/>
           </a:xfrm>
           <a:prstGeom prst="rect">
@@ -13841,20 +14236,20 @@
                 </a:solidFill>
                 <a:latin typeface="Aptos"/>
               </a:rPr>
-              <a:t>Sandals</a:t>
-            </a:r>
-          </a:p>
-        </p:txBody>
-      </p:sp>
-      <p:sp>
-        <p:nvSpPr>
-          <p:cNvPr id="14" name="TextBox 13"/>
-          <p:cNvSpPr txBox="1"/>
-          <p:nvPr/>
-        </p:nvSpPr>
-        <p:spPr>
-          <a:xfrm>
-            <a:off x="10332720" y="2935224"/>
+              <a:t>Boots</a:t>
+            </a:r>
+          </a:p>
+        </p:txBody>
+      </p:sp>
+      <p:sp>
+        <p:nvSpPr>
+          <p:cNvPr id="17" name="TextBox 16"/>
+          <p:cNvSpPr txBox="1"/>
+          <p:nvPr/>
+        </p:nvSpPr>
+        <p:spPr>
+          <a:xfrm>
+            <a:off x="4023360" y="2894813"/>
             <a:ext cx="594360" cy="274320"/>
           </a:xfrm>
           <a:prstGeom prst="rect">
@@ -13876,20 +14271,20 @@
                 </a:solidFill>
                 <a:latin typeface="Aptos"/>
               </a:rPr>
-              <a:t>3.84</a:t>
-            </a:r>
-          </a:p>
-        </p:txBody>
-      </p:sp>
-      <p:sp>
-        <p:nvSpPr>
-          <p:cNvPr id="15" name="TextBox 14"/>
-          <p:cNvSpPr txBox="1"/>
-          <p:nvPr/>
-        </p:nvSpPr>
-        <p:spPr>
-          <a:xfrm>
-            <a:off x="7223760" y="3511296"/>
+              <a:t>3.82</a:t>
+            </a:r>
+          </a:p>
+        </p:txBody>
+      </p:sp>
+      <p:sp>
+        <p:nvSpPr>
+          <p:cNvPr id="18" name="TextBox 17"/>
+          <p:cNvSpPr txBox="1"/>
+          <p:nvPr/>
+        </p:nvSpPr>
+        <p:spPr>
+          <a:xfrm>
+            <a:off x="914400" y="3470885"/>
             <a:ext cx="411480" cy="274320"/>
           </a:xfrm>
           <a:prstGeom prst="rect">
@@ -13911,20 +14306,20 @@
                 </a:solidFill>
                 <a:latin typeface="Aptos"/>
               </a:rPr>
-              <a:t>03</a:t>
-            </a:r>
-          </a:p>
-        </p:txBody>
-      </p:sp>
-      <p:sp>
-        <p:nvSpPr>
-          <p:cNvPr id="16" name="TextBox 15"/>
-          <p:cNvSpPr txBox="1"/>
-          <p:nvPr/>
-        </p:nvSpPr>
-        <p:spPr>
-          <a:xfrm>
-            <a:off x="7772400" y="3511296"/>
+              <a:t>04</a:t>
+            </a:r>
+          </a:p>
+        </p:txBody>
+      </p:sp>
+      <p:sp>
+        <p:nvSpPr>
+          <p:cNvPr id="19" name="TextBox 18"/>
+          <p:cNvSpPr txBox="1"/>
+          <p:nvPr/>
+        </p:nvSpPr>
+        <p:spPr>
+          <a:xfrm>
+            <a:off x="1463040" y="3470885"/>
             <a:ext cx="2468880" cy="274320"/>
           </a:xfrm>
           <a:prstGeom prst="rect">
@@ -13946,20 +14341,20 @@
                 </a:solidFill>
                 <a:latin typeface="Aptos"/>
               </a:rPr>
-              <a:t>Boots</a:t>
-            </a:r>
-          </a:p>
-        </p:txBody>
-      </p:sp>
-      <p:sp>
-        <p:nvSpPr>
-          <p:cNvPr id="17" name="TextBox 16"/>
-          <p:cNvSpPr txBox="1"/>
-          <p:nvPr/>
-        </p:nvSpPr>
-        <p:spPr>
-          <a:xfrm>
-            <a:off x="10332720" y="3511296"/>
+              <a:t>Hat</a:t>
+            </a:r>
+          </a:p>
+        </p:txBody>
+      </p:sp>
+      <p:sp>
+        <p:nvSpPr>
+          <p:cNvPr id="20" name="TextBox 19"/>
+          <p:cNvSpPr txBox="1"/>
+          <p:nvPr/>
+        </p:nvSpPr>
+        <p:spPr>
+          <a:xfrm>
+            <a:off x="4023360" y="3470885"/>
             <a:ext cx="594360" cy="274320"/>
           </a:xfrm>
           <a:prstGeom prst="rect">
@@ -13981,20 +14376,20 @@
                 </a:solidFill>
                 <a:latin typeface="Aptos"/>
               </a:rPr>
-              <a:t>3.82</a:t>
-            </a:r>
-          </a:p>
-        </p:txBody>
-      </p:sp>
-      <p:sp>
-        <p:nvSpPr>
-          <p:cNvPr id="18" name="TextBox 17"/>
-          <p:cNvSpPr txBox="1"/>
-          <p:nvPr/>
-        </p:nvSpPr>
-        <p:spPr>
-          <a:xfrm>
-            <a:off x="7223760" y="4087368"/>
+              <a:t>3.80</a:t>
+            </a:r>
+          </a:p>
+        </p:txBody>
+      </p:sp>
+      <p:sp>
+        <p:nvSpPr>
+          <p:cNvPr id="21" name="TextBox 20"/>
+          <p:cNvSpPr txBox="1"/>
+          <p:nvPr/>
+        </p:nvSpPr>
+        <p:spPr>
+          <a:xfrm>
+            <a:off x="914400" y="4046957"/>
             <a:ext cx="411480" cy="274320"/>
           </a:xfrm>
           <a:prstGeom prst="rect">
@@ -14016,20 +14411,20 @@
                 </a:solidFill>
                 <a:latin typeface="Aptos"/>
               </a:rPr>
-              <a:t>04</a:t>
-            </a:r>
-          </a:p>
-        </p:txBody>
-      </p:sp>
-      <p:sp>
-        <p:nvSpPr>
-          <p:cNvPr id="19" name="TextBox 18"/>
-          <p:cNvSpPr txBox="1"/>
-          <p:nvPr/>
-        </p:nvSpPr>
-        <p:spPr>
-          <a:xfrm>
-            <a:off x="7772400" y="4087368"/>
+              <a:t>05</a:t>
+            </a:r>
+          </a:p>
+        </p:txBody>
+      </p:sp>
+      <p:sp>
+        <p:nvSpPr>
+          <p:cNvPr id="22" name="TextBox 21"/>
+          <p:cNvSpPr txBox="1"/>
+          <p:nvPr/>
+        </p:nvSpPr>
+        <p:spPr>
+          <a:xfrm>
+            <a:off x="1463040" y="4046957"/>
             <a:ext cx="2468880" cy="274320"/>
           </a:xfrm>
           <a:prstGeom prst="rect">
@@ -14051,20 +14446,20 @@
                 </a:solidFill>
                 <a:latin typeface="Aptos"/>
               </a:rPr>
-              <a:t>Hat</a:t>
-            </a:r>
-          </a:p>
-        </p:txBody>
-      </p:sp>
-      <p:sp>
-        <p:nvSpPr>
-          <p:cNvPr id="20" name="TextBox 19"/>
-          <p:cNvSpPr txBox="1"/>
-          <p:nvPr/>
-        </p:nvSpPr>
-        <p:spPr>
-          <a:xfrm>
-            <a:off x="10332720" y="4087368"/>
+              <a:t>Skirt</a:t>
+            </a:r>
+          </a:p>
+        </p:txBody>
+      </p:sp>
+      <p:sp>
+        <p:nvSpPr>
+          <p:cNvPr id="23" name="TextBox 22"/>
+          <p:cNvSpPr txBox="1"/>
+          <p:nvPr/>
+        </p:nvSpPr>
+        <p:spPr>
+          <a:xfrm>
+            <a:off x="4023360" y="4046957"/>
             <a:ext cx="594360" cy="274320"/>
           </a:xfrm>
           <a:prstGeom prst="rect">
@@ -14086,182 +14481,7 @@
                 </a:solidFill>
                 <a:latin typeface="Aptos"/>
               </a:rPr>
-              <a:t>3.80</a:t>
-            </a:r>
-          </a:p>
-        </p:txBody>
-      </p:sp>
-      <p:sp>
-        <p:nvSpPr>
-          <p:cNvPr id="21" name="TextBox 20"/>
-          <p:cNvSpPr txBox="1"/>
-          <p:nvPr/>
-        </p:nvSpPr>
-        <p:spPr>
-          <a:xfrm>
-            <a:off x="7223760" y="4663440"/>
-            <a:ext cx="411480" cy="274320"/>
-          </a:xfrm>
-          <a:prstGeom prst="rect">
-            <a:avLst/>
-          </a:prstGeom>
-          <a:noFill/>
-        </p:spPr>
-        <p:txBody>
-          <a:bodyPr wrap="square" anchor="t">
-            <a:spAutoFit/>
-          </a:bodyPr>
-          <a:lstStyle/>
-          <a:p>
-            <a:pPr algn="l"/>
-            <a:r>
-              <a:rPr sz="1200" b="1">
-                <a:solidFill>
-                  <a:srgbClr val="1F8584"/>
-                </a:solidFill>
-                <a:latin typeface="Aptos"/>
-              </a:rPr>
-              <a:t>05</a:t>
-            </a:r>
-          </a:p>
-        </p:txBody>
-      </p:sp>
-      <p:sp>
-        <p:nvSpPr>
-          <p:cNvPr id="22" name="TextBox 21"/>
-          <p:cNvSpPr txBox="1"/>
-          <p:nvPr/>
-        </p:nvSpPr>
-        <p:spPr>
-          <a:xfrm>
-            <a:off x="7772400" y="4663440"/>
-            <a:ext cx="2468880" cy="274320"/>
-          </a:xfrm>
-          <a:prstGeom prst="rect">
-            <a:avLst/>
-          </a:prstGeom>
-          <a:noFill/>
-        </p:spPr>
-        <p:txBody>
-          <a:bodyPr wrap="square" anchor="t">
-            <a:spAutoFit/>
-          </a:bodyPr>
-          <a:lstStyle/>
-          <a:p>
-            <a:pPr algn="l"/>
-            <a:r>
-              <a:rPr sz="1400" b="1">
-                <a:solidFill>
-                  <a:srgbClr val="141F31"/>
-                </a:solidFill>
-                <a:latin typeface="Aptos"/>
-              </a:rPr>
-              <a:t>Skirt</a:t>
-            </a:r>
-          </a:p>
-        </p:txBody>
-      </p:sp>
-      <p:sp>
-        <p:nvSpPr>
-          <p:cNvPr id="23" name="TextBox 22"/>
-          <p:cNvSpPr txBox="1"/>
-          <p:nvPr/>
-        </p:nvSpPr>
-        <p:spPr>
-          <a:xfrm>
-            <a:off x="10332720" y="4663440"/>
-            <a:ext cx="594360" cy="274320"/>
-          </a:xfrm>
-          <a:prstGeom prst="rect">
-            <a:avLst/>
-          </a:prstGeom>
-          <a:noFill/>
-        </p:spPr>
-        <p:txBody>
-          <a:bodyPr wrap="square" anchor="t">
-            <a:spAutoFit/>
-          </a:bodyPr>
-          <a:lstStyle/>
-          <a:p>
-            <a:pPr algn="r"/>
-            <a:r>
-              <a:rPr sz="1200" b="1">
-                <a:solidFill>
-                  <a:srgbClr val="1F2937"/>
-                </a:solidFill>
-                <a:latin typeface="Aptos"/>
-              </a:rPr>
               <a:t>3.79</a:t>
-            </a:r>
-          </a:p>
-        </p:txBody>
-      </p:sp>
-      <p:sp>
-        <p:nvSpPr>
-          <p:cNvPr id="24" name="TextBox 23"/>
-          <p:cNvSpPr txBox="1"/>
-          <p:nvPr/>
-        </p:nvSpPr>
-        <p:spPr>
-          <a:xfrm>
-            <a:off x="7223760" y="5349240"/>
-            <a:ext cx="1097280" cy="228600"/>
-          </a:xfrm>
-          <a:prstGeom prst="rect">
-            <a:avLst/>
-          </a:prstGeom>
-          <a:noFill/>
-        </p:spPr>
-        <p:txBody>
-          <a:bodyPr wrap="square" anchor="t">
-            <a:spAutoFit/>
-          </a:bodyPr>
-          <a:lstStyle/>
-          <a:p>
-            <a:pPr algn="l"/>
-            <a:r>
-              <a:rPr sz="900" b="1">
-                <a:solidFill>
-                  <a:srgbClr val="1F8584"/>
-                </a:solidFill>
-                <a:latin typeface="Aptos"/>
-              </a:rPr>
-              <a:t>Use cases</a:t>
-            </a:r>
-          </a:p>
-        </p:txBody>
-      </p:sp>
-      <p:sp>
-        <p:nvSpPr>
-          <p:cNvPr id="25" name="TextBox 24"/>
-          <p:cNvSpPr txBox="1"/>
-          <p:nvPr/>
-        </p:nvSpPr>
-        <p:spPr>
-          <a:xfrm>
-            <a:off x="7223760" y="5650992"/>
-            <a:ext cx="3749039" cy="411480"/>
-          </a:xfrm>
-          <a:prstGeom prst="rect">
-            <a:avLst/>
-          </a:prstGeom>
-          <a:noFill/>
-        </p:spPr>
-        <p:txBody>
-          <a:bodyPr wrap="square" anchor="t">
-            <a:spAutoFit/>
-          </a:bodyPr>
-          <a:lstStyle/>
-          <a:p>
-            <a:pPr algn="l"/>
-            <a:r>
-              <a:rPr sz="1050" b="0">
-                <a:solidFill>
-                  <a:srgbClr val="64748B"/>
-                </a:solidFill>
-                <a:latin typeface="Aptos"/>
-              </a:rPr>
-              <a:t>Recommendations • social proof • premium placement • campaign creative</a:t>
             </a:r>
           </a:p>
         </p:txBody>
@@ -14298,6 +14518,364 @@
               </a:rPr>
               <a:t>06</a:t>
             </a:r>
+          </a:p>
+        </p:txBody>
+      </p:sp>
+      <p:sp>
+        <p:nvSpPr>
+          <p:cNvPr id="28" name="Rounded Rectangle 18">
+            <a:extLst>
+              <a:ext uri="{FF2B5EF4-FFF2-40B4-BE49-F238E27FC236}">
+                <a16:creationId xmlns:a16="http://schemas.microsoft.com/office/drawing/2014/main" id="{59136665-B4F5-149C-CED0-C9C0A8C6CC48}"/>
+              </a:ext>
+            </a:extLst>
+          </p:cNvPr>
+          <p:cNvSpPr/>
+          <p:nvPr/>
+        </p:nvSpPr>
+        <p:spPr>
+          <a:xfrm>
+            <a:off x="5669280" y="1280160"/>
+            <a:ext cx="5905648" cy="2534756"/>
+          </a:xfrm>
+          <a:prstGeom prst="roundRect">
+            <a:avLst/>
+          </a:prstGeom>
+          <a:solidFill>
+            <a:srgbClr val="E2ECF9"/>
+          </a:solidFill>
+          <a:ln w="8890">
+            <a:solidFill>
+              <a:srgbClr val="E1E7EF"/>
+            </a:solidFill>
+          </a:ln>
+        </p:spPr>
+        <p:style>
+          <a:lnRef idx="1">
+            <a:schemeClr val="accent1"/>
+          </a:lnRef>
+          <a:fillRef idx="3">
+            <a:schemeClr val="accent1"/>
+          </a:fillRef>
+          <a:effectRef idx="2">
+            <a:schemeClr val="accent1"/>
+          </a:effectRef>
+          <a:fontRef idx="minor">
+            <a:schemeClr val="lt1"/>
+          </a:fontRef>
+        </p:style>
+        <p:txBody>
+          <a:bodyPr rtlCol="0" anchor="ctr"/>
+          <a:lstStyle/>
+          <a:p>
+            <a:pPr algn="ctr"/>
+            <a:endParaRPr/>
+          </a:p>
+        </p:txBody>
+      </p:sp>
+      <p:sp>
+        <p:nvSpPr>
+          <p:cNvPr id="30" name="TextBox 29">
+            <a:extLst>
+              <a:ext uri="{FF2B5EF4-FFF2-40B4-BE49-F238E27FC236}">
+                <a16:creationId xmlns:a16="http://schemas.microsoft.com/office/drawing/2014/main" id="{382A2A92-64C2-A314-536C-022DEF8FF1AA}"/>
+              </a:ext>
+            </a:extLst>
+          </p:cNvPr>
+          <p:cNvSpPr txBox="1"/>
+          <p:nvPr/>
+        </p:nvSpPr>
+        <p:spPr>
+          <a:xfrm>
+            <a:off x="5872852" y="1492579"/>
+            <a:ext cx="1828800" cy="292388"/>
+          </a:xfrm>
+          <a:prstGeom prst="rect">
+            <a:avLst/>
+          </a:prstGeom>
+          <a:noFill/>
+        </p:spPr>
+        <p:txBody>
+          <a:bodyPr wrap="square" anchor="t">
+            <a:spAutoFit/>
+          </a:bodyPr>
+          <a:lstStyle/>
+          <a:p>
+            <a:pPr algn="l"/>
+            <a:r>
+              <a:rPr sz="1300" b="1" dirty="0">
+                <a:solidFill>
+                  <a:srgbClr val="2A64AA"/>
+                </a:solidFill>
+                <a:latin typeface="Aptos"/>
+              </a:rPr>
+              <a:t>WHAT IT MEANS</a:t>
+            </a:r>
+          </a:p>
+        </p:txBody>
+      </p:sp>
+      <p:sp>
+        <p:nvSpPr>
+          <p:cNvPr id="32" name="TextBox 31">
+            <a:extLst>
+              <a:ext uri="{FF2B5EF4-FFF2-40B4-BE49-F238E27FC236}">
+                <a16:creationId xmlns:a16="http://schemas.microsoft.com/office/drawing/2014/main" id="{EE4A2FC0-CE88-232C-A98E-2B13E5C86129}"/>
+              </a:ext>
+            </a:extLst>
+          </p:cNvPr>
+          <p:cNvSpPr txBox="1"/>
+          <p:nvPr/>
+        </p:nvSpPr>
+        <p:spPr>
+          <a:xfrm>
+            <a:off x="5872852" y="1929714"/>
+            <a:ext cx="5602868" cy="1590179"/>
+          </a:xfrm>
+          <a:prstGeom prst="rect">
+            <a:avLst/>
+          </a:prstGeom>
+          <a:noFill/>
+        </p:spPr>
+        <p:txBody>
+          <a:bodyPr wrap="square">
+            <a:spAutoFit/>
+          </a:bodyPr>
+          <a:lstStyle/>
+          <a:p>
+            <a:pPr marL="285750" indent="-285750">
+              <a:spcAft>
+                <a:spcPts val="800"/>
+              </a:spcAft>
+              <a:buFont typeface="Arial" panose="020B0604020202020204" pitchFamily="34" charset="0"/>
+              <a:buChar char="•"/>
+              <a:defRPr sz="1050">
+                <a:solidFill>
+                  <a:srgbClr val="1F2937"/>
+                </a:solidFill>
+                <a:latin typeface="Aptos"/>
+              </a:defRPr>
+            </a:pPr>
+            <a:r>
+              <a:rPr lang="en-US" sz="1400" dirty="0"/>
+              <a:t>These products may be perceived as high quality or good value.</a:t>
+            </a:r>
+          </a:p>
+          <a:p>
+            <a:pPr marL="285750" indent="-285750">
+              <a:spcAft>
+                <a:spcPts val="800"/>
+              </a:spcAft>
+              <a:buFont typeface="Arial" panose="020B0604020202020204" pitchFamily="34" charset="0"/>
+              <a:buChar char="•"/>
+              <a:defRPr sz="1050">
+                <a:solidFill>
+                  <a:srgbClr val="1F2937"/>
+                </a:solidFill>
+                <a:latin typeface="Aptos"/>
+              </a:defRPr>
+            </a:pPr>
+            <a:r>
+              <a:rPr lang="en-US" sz="1400" dirty="0"/>
+              <a:t>These could be strong candidates for marketing campaigns, recommendations &amp; cross-selling.</a:t>
+            </a:r>
+          </a:p>
+          <a:p>
+            <a:pPr marL="285750" indent="-285750">
+              <a:spcAft>
+                <a:spcPts val="800"/>
+              </a:spcAft>
+              <a:buFont typeface="Arial" panose="020B0604020202020204" pitchFamily="34" charset="0"/>
+              <a:buChar char="•"/>
+              <a:defRPr sz="1050">
+                <a:solidFill>
+                  <a:srgbClr val="1F2937"/>
+                </a:solidFill>
+                <a:latin typeface="Aptos"/>
+              </a:defRPr>
+            </a:pPr>
+            <a:r>
+              <a:rPr lang="en-US" sz="1400" dirty="0"/>
+              <a:t>They may deserve greater attention when deciding which products to keep in stock or expand, although other factors  such as sales volume and repeat purchases should also be considered.</a:t>
+            </a:r>
+          </a:p>
+        </p:txBody>
+      </p:sp>
+      <p:sp>
+        <p:nvSpPr>
+          <p:cNvPr id="34" name="Rounded Rectangle 24">
+            <a:extLst>
+              <a:ext uri="{FF2B5EF4-FFF2-40B4-BE49-F238E27FC236}">
+                <a16:creationId xmlns:a16="http://schemas.microsoft.com/office/drawing/2014/main" id="{C62259D4-FEE8-94C7-7AD8-10FA929301AB}"/>
+              </a:ext>
+            </a:extLst>
+          </p:cNvPr>
+          <p:cNvSpPr/>
+          <p:nvPr/>
+        </p:nvSpPr>
+        <p:spPr>
+          <a:xfrm>
+            <a:off x="5669280" y="4270248"/>
+            <a:ext cx="5852160" cy="1658604"/>
+          </a:xfrm>
+          <a:prstGeom prst="roundRect">
+            <a:avLst/>
+          </a:prstGeom>
+          <a:solidFill>
+            <a:srgbClr val="FFFFFF"/>
+          </a:solidFill>
+          <a:ln w="8890">
+            <a:solidFill>
+              <a:srgbClr val="E1E7EF"/>
+            </a:solidFill>
+          </a:ln>
+        </p:spPr>
+        <p:style>
+          <a:lnRef idx="1">
+            <a:schemeClr val="accent1"/>
+          </a:lnRef>
+          <a:fillRef idx="3">
+            <a:schemeClr val="accent1"/>
+          </a:fillRef>
+          <a:effectRef idx="2">
+            <a:schemeClr val="accent1"/>
+          </a:effectRef>
+          <a:fontRef idx="minor">
+            <a:schemeClr val="lt1"/>
+          </a:fontRef>
+        </p:style>
+        <p:txBody>
+          <a:bodyPr rtlCol="0" anchor="ctr"/>
+          <a:lstStyle/>
+          <a:p>
+            <a:pPr algn="ctr"/>
+            <a:endParaRPr/>
+          </a:p>
+        </p:txBody>
+      </p:sp>
+      <p:sp>
+        <p:nvSpPr>
+          <p:cNvPr id="36" name="TextBox 35">
+            <a:extLst>
+              <a:ext uri="{FF2B5EF4-FFF2-40B4-BE49-F238E27FC236}">
+                <a16:creationId xmlns:a16="http://schemas.microsoft.com/office/drawing/2014/main" id="{CCD075B8-0ACF-F7DD-A165-17F2678E5631}"/>
+              </a:ext>
+            </a:extLst>
+          </p:cNvPr>
+          <p:cNvSpPr txBox="1"/>
+          <p:nvPr/>
+        </p:nvSpPr>
+        <p:spPr>
+          <a:xfrm>
+            <a:off x="5835740" y="4493070"/>
+            <a:ext cx="2520499" cy="369332"/>
+          </a:xfrm>
+          <a:prstGeom prst="rect">
+            <a:avLst/>
+          </a:prstGeom>
+          <a:noFill/>
+        </p:spPr>
+        <p:txBody>
+          <a:bodyPr wrap="square" anchor="t">
+            <a:spAutoFit/>
+          </a:bodyPr>
+          <a:lstStyle/>
+          <a:p>
+            <a:pPr algn="l"/>
+            <a:r>
+              <a:rPr lang="en-GB" b="1" dirty="0">
+                <a:solidFill>
+                  <a:srgbClr val="1F8584"/>
+                </a:solidFill>
+                <a:latin typeface="Aptos"/>
+              </a:rPr>
+              <a:t>Recommendation</a:t>
+            </a:r>
+            <a:endParaRPr b="1" dirty="0">
+              <a:solidFill>
+                <a:srgbClr val="1F8584"/>
+              </a:solidFill>
+              <a:latin typeface="Aptos"/>
+            </a:endParaRPr>
+          </a:p>
+        </p:txBody>
+      </p:sp>
+      <p:sp>
+        <p:nvSpPr>
+          <p:cNvPr id="38" name="TextBox 37">
+            <a:extLst>
+              <a:ext uri="{FF2B5EF4-FFF2-40B4-BE49-F238E27FC236}">
+                <a16:creationId xmlns:a16="http://schemas.microsoft.com/office/drawing/2014/main" id="{6E963FAF-C2C7-DD67-4276-8F573A75A61D}"/>
+              </a:ext>
+            </a:extLst>
+          </p:cNvPr>
+          <p:cNvSpPr txBox="1"/>
+          <p:nvPr/>
+        </p:nvSpPr>
+        <p:spPr>
+          <a:xfrm>
+            <a:off x="5835740" y="4852881"/>
+            <a:ext cx="5502819" cy="954107"/>
+          </a:xfrm>
+          <a:prstGeom prst="rect">
+            <a:avLst/>
+          </a:prstGeom>
+          <a:noFill/>
+        </p:spPr>
+        <p:txBody>
+          <a:bodyPr wrap="square" anchor="t">
+            <a:spAutoFit/>
+          </a:bodyPr>
+          <a:lstStyle/>
+          <a:p>
+            <a:pPr marL="285750" indent="-285750">
+              <a:buFont typeface="Arial" panose="020B0604020202020204" pitchFamily="34" charset="0"/>
+              <a:buChar char="•"/>
+            </a:pPr>
+            <a:r>
+              <a:rPr lang="en-US" sz="1400" b="1" dirty="0">
+                <a:solidFill>
+                  <a:srgbClr val="141F31"/>
+                </a:solidFill>
+                <a:latin typeface="Aptos"/>
+              </a:rPr>
+              <a:t>Feature them on website &amp; social media</a:t>
+            </a:r>
+          </a:p>
+          <a:p>
+            <a:pPr marL="285750" indent="-285750">
+              <a:buFont typeface="Arial" panose="020B0604020202020204" pitchFamily="34" charset="0"/>
+              <a:buChar char="•"/>
+            </a:pPr>
+            <a:r>
+              <a:rPr lang="en-US" sz="1400" b="1" dirty="0">
+                <a:solidFill>
+                  <a:srgbClr val="141F31"/>
+                </a:solidFill>
+                <a:latin typeface="Aptos"/>
+              </a:rPr>
+              <a:t>Prioritise them in search results and recommendations</a:t>
+            </a:r>
+          </a:p>
+          <a:p>
+            <a:pPr marL="285750" indent="-285750">
+              <a:buFont typeface="Arial" panose="020B0604020202020204" pitchFamily="34" charset="0"/>
+              <a:buChar char="•"/>
+            </a:pPr>
+            <a:r>
+              <a:rPr lang="en-US" sz="1400" b="1" dirty="0">
+                <a:solidFill>
+                  <a:srgbClr val="141F31"/>
+                </a:solidFill>
+                <a:latin typeface="Aptos"/>
+              </a:rPr>
+              <a:t>Identify complementary products and create bundles or deals around them</a:t>
+            </a:r>
+            <a:endParaRPr sz="1400" b="1" dirty="0">
+              <a:solidFill>
+                <a:srgbClr val="141F31"/>
+              </a:solidFill>
+              <a:latin typeface="Aptos"/>
+            </a:endParaRPr>
           </a:p>
         </p:txBody>
       </p:sp>
@@ -15714,6 +16292,7 @@
               </a:defRPr>
             </a:pPr>
             <a:r>
+              <a:rPr dirty="0"/>
               <a:t>• Build benefits around frequency, convenience and exclusive value.</a:t>
             </a:r>
           </a:p>
@@ -15730,6 +16309,7 @@
               </a:defRPr>
             </a:pPr>
             <a:r>
+              <a:rPr dirty="0"/>
               <a:t>• Use personalised offers to convert highly engaged shoppers.</a:t>
             </a:r>
           </a:p>
@@ -15746,6 +16326,7 @@
               </a:defRPr>
             </a:pPr>
             <a:r>
+              <a:rPr dirty="0"/>
               <a:t>• Track retention and purchase frequency alongside basket size.</a:t>
             </a:r>
           </a:p>
